--- a/3-Master_Plan/re_entry/HEROs_and_PASSes/slides/CHAR_Phase_B_characterization.pptx
+++ b/3-Master_Plan/re_entry/HEROs_and_PASSes/slides/CHAR_Phase_B_characterization.pptx
@@ -5,13 +5,15 @@
     <p:sldMasterId id="2147483648" r:id="rId1"/>
   </p:sldMasterIdLst>
   <p:sldIdLst>
-    <p:sldId id="256" r:id="rId2"/>
-    <p:sldId id="257" r:id="rId3"/>
-    <p:sldId id="258" r:id="rId4"/>
-    <p:sldId id="259" r:id="rId5"/>
-    <p:sldId id="260" r:id="rId6"/>
-    <p:sldId id="261" r:id="rId7"/>
-    <p:sldId id="262" r:id="rId8"/>
+    <p:sldId id="264" r:id="rId2"/>
+    <p:sldId id="256" r:id="rId3"/>
+    <p:sldId id="257" r:id="rId4"/>
+    <p:sldId id="258" r:id="rId5"/>
+    <p:sldId id="259" r:id="rId6"/>
+    <p:sldId id="263" r:id="rId7"/>
+    <p:sldId id="260" r:id="rId8"/>
+    <p:sldId id="261" r:id="rId9"/>
+    <p:sldId id="262" r:id="rId10"/>
   </p:sldIdLst>
   <p:sldSz cx="12192000" cy="6858000"/>
   <p:notesSz cx="6858000" cy="9144000"/>
@@ -3104,6 +3106,2865 @@
         </p:nvSpPr>
         <p:spPr>
           <a:xfrm>
+            <a:off x="384048" y="219456"/>
+            <a:ext cx="11423599" cy="457200"/>
+          </a:xfrm>
+          <a:prstGeom prst="rect">
+            <a:avLst/>
+          </a:prstGeom>
+          <a:noFill/>
+        </p:spPr>
+        <p:txBody>
+          <a:bodyPr wrap="none">
+            <a:spAutoFit/>
+          </a:bodyPr>
+          <a:lstStyle/>
+          <a:p>
+            <a:pPr>
+              <a:defRPr b="1"/>
+            </a:pPr>
+            <a:r>
+              <a:rPr sz="2000"/>
+              <a:t>Phase B — Fake-league characterization (not curve fitting)</a:t>
+            </a:r>
+          </a:p>
+        </p:txBody>
+      </p:sp>
+      <p:sp>
+        <p:nvSpPr>
+          <p:cNvPr id="3" name="TextBox 2"/>
+          <p:cNvSpPr txBox="1"/>
+          <p:nvPr/>
+        </p:nvSpPr>
+        <p:spPr>
+          <a:xfrm>
+            <a:off x="384048" y="749808"/>
+            <a:ext cx="5806440" cy="256032"/>
+          </a:xfrm>
+          <a:prstGeom prst="rect">
+            <a:avLst/>
+          </a:prstGeom>
+          <a:noFill/>
+        </p:spPr>
+        <p:txBody>
+          <a:bodyPr wrap="none">
+            <a:spAutoFit/>
+          </a:bodyPr>
+          <a:lstStyle/>
+          <a:p>
+            <a:pPr>
+              <a:defRPr b="1"/>
+            </a:pPr>
+            <a:r>
+              <a:rPr sz="1200"/>
+              <a:t>Knobs (mini glossary)</a:t>
+            </a:r>
+          </a:p>
+        </p:txBody>
+      </p:sp>
+      <mc:AlternateContent xmlns:mc="http://schemas.openxmlformats.org/markup-compatibility/2006">
+        <mc:Choice xmlns:a14="http://schemas.microsoft.com/office/drawing/2010/main" Requires="a14">
+          <p:graphicFrame>
+            <p:nvGraphicFramePr>
+              <p:cNvPr id="4" name="Table 3"/>
+              <p:cNvGraphicFramePr>
+                <a:graphicFrameLocks noGrp="1"/>
+              </p:cNvGraphicFramePr>
+              <p:nvPr/>
+            </p:nvGraphicFramePr>
+            <p:xfrm>
+              <a:off x="384048" y="1024128"/>
+              <a:ext cx="5806439" cy="4908593"/>
+            </p:xfrm>
+            <a:graphic>
+              <a:graphicData uri="http://schemas.openxmlformats.org/drawingml/2006/table">
+                <a:tbl>
+                  <a:tblPr firstRow="1" bandRow="1">
+                    <a:tableStyleId>{21E4AEA4-8DFA-4A89-87EB-49C32662AFE0}</a:tableStyleId>
+                  </a:tblPr>
+                  <a:tblGrid>
+                    <a:gridCol w="812901">
+                      <a:extLst>
+                        <a:ext uri="{9D8B030D-6E8A-4147-A177-3AD203B41FA5}">
+                          <a16:colId xmlns:a16="http://schemas.microsoft.com/office/drawing/2014/main" val="20000"/>
+                        </a:ext>
+                      </a:extLst>
+                    </a:gridCol>
+                    <a:gridCol w="1625803">
+                      <a:extLst>
+                        <a:ext uri="{9D8B030D-6E8A-4147-A177-3AD203B41FA5}">
+                          <a16:colId xmlns:a16="http://schemas.microsoft.com/office/drawing/2014/main" val="20001"/>
+                        </a:ext>
+                      </a:extLst>
+                    </a:gridCol>
+                    <a:gridCol w="3367735">
+                      <a:extLst>
+                        <a:ext uri="{9D8B030D-6E8A-4147-A177-3AD203B41FA5}">
+                          <a16:colId xmlns:a16="http://schemas.microsoft.com/office/drawing/2014/main" val="20002"/>
+                        </a:ext>
+                      </a:extLst>
+                    </a:gridCol>
+                  </a:tblGrid>
+                  <a:tr h="526403">
+                    <a:tc>
+                      <a:txBody>
+                        <a:bodyPr/>
+                        <a:lstStyle/>
+                        <a:p>
+                          <a:pPr algn="ctr">
+                            <a:defRPr sz="900" b="1">
+                              <a:latin typeface="Calibri"/>
+                            </a:defRPr>
+                          </a:pPr>
+                          <a:r>
+                            <a:rPr sz="1200" b="0" i="0" dirty="0">
+                              <a:latin typeface="Avenir Next" panose="020B0503020202020204" pitchFamily="34" charset="0"/>
+                            </a:rPr>
+                            <a:t>Symbol</a:t>
+                          </a:r>
+                        </a:p>
+                      </a:txBody>
+                      <a:tcPr anchor="ctr"/>
+                    </a:tc>
+                    <a:tc>
+                      <a:txBody>
+                        <a:bodyPr/>
+                        <a:lstStyle/>
+                        <a:p>
+                          <a:pPr>
+                            <a:defRPr sz="900" b="1">
+                              <a:latin typeface="Calibri"/>
+                            </a:defRPr>
+                          </a:pPr>
+                          <a:r>
+                            <a:rPr sz="1200" b="0" i="0" dirty="0">
+                              <a:latin typeface="Avenir Next" panose="020B0503020202020204" pitchFamily="34" charset="0"/>
+                            </a:rPr>
+                            <a:t>Plain name</a:t>
+                          </a:r>
+                        </a:p>
+                      </a:txBody>
+                      <a:tcPr anchor="ctr"/>
+                    </a:tc>
+                    <a:tc>
+                      <a:txBody>
+                        <a:bodyPr/>
+                        <a:lstStyle/>
+                        <a:p>
+                          <a:pPr>
+                            <a:defRPr sz="900" b="1">
+                              <a:latin typeface="Calibri"/>
+                            </a:defRPr>
+                          </a:pPr>
+                          <a:r>
+                            <a:rPr sz="1200" b="0" i="0" dirty="0">
+                              <a:latin typeface="Avenir Next" panose="020B0503020202020204" pitchFamily="34" charset="0"/>
+                            </a:rPr>
+                            <a:t>What it controls</a:t>
+                          </a:r>
+                        </a:p>
+                      </a:txBody>
+                      <a:tcPr anchor="ctr"/>
+                    </a:tc>
+                    <a:extLst>
+                      <a:ext uri="{0D108BD9-81ED-4DB2-BD59-A6C34878D82A}">
+                        <a16:rowId xmlns:a16="http://schemas.microsoft.com/office/drawing/2014/main" val="10000"/>
+                      </a:ext>
+                    </a:extLst>
+                  </a:tr>
+                  <a:tr h="526403">
+                    <a:tc>
+                      <a:txBody>
+                        <a:bodyPr/>
+                        <a:lstStyle/>
+                        <a:p>
+                          <a:pPr algn="ctr"/>
+                          <a:r>
+                            <a:rPr sz="1200" b="0" i="0" dirty="0">
+                              <a:latin typeface="Avenir Next" panose="020B0503020202020204" pitchFamily="34" charset="0"/>
+                            </a:rPr>
+                            <a:t>A</a:t>
+                          </a:r>
+                          <a:r>
+                            <a:rPr sz="1100" b="0" i="0" baseline="-25000" dirty="0">
+                              <a:latin typeface="Avenir Next" panose="020B0503020202020204" pitchFamily="34" charset="0"/>
+                            </a:rPr>
+                            <a:t>i</a:t>
+                          </a:r>
+                        </a:p>
+                      </a:txBody>
+                      <a:tcPr anchor="ctr"/>
+                    </a:tc>
+                    <a:tc>
+                      <a:txBody>
+                        <a:bodyPr/>
+                        <a:lstStyle/>
+                        <a:p>
+                          <a:pPr>
+                            <a:defRPr sz="900">
+                              <a:latin typeface="Calibri"/>
+                            </a:defRPr>
+                          </a:pPr>
+                          <a:r>
+                            <a:rPr sz="1200" b="0" i="0">
+                              <a:latin typeface="Avenir Next" panose="020B0503020202020204" pitchFamily="34" charset="0"/>
+                            </a:rPr>
+                            <a:t>Player ability</a:t>
+                          </a:r>
+                        </a:p>
+                      </a:txBody>
+                      <a:tcPr anchor="ctr"/>
+                    </a:tc>
+                    <a:tc>
+                      <a:txBody>
+                        <a:bodyPr/>
+                        <a:lstStyle/>
+                        <a:p>
+                          <a:pPr>
+                            <a:defRPr sz="800">
+                              <a:latin typeface="Calibri"/>
+                            </a:defRPr>
+                          </a:pPr>
+                          <a:r>
+                            <a:rPr sz="1100" b="0" i="0" dirty="0">
+                              <a:latin typeface="Avenir Next" panose="020B0503020202020204" pitchFamily="34" charset="0"/>
+                            </a:rPr>
+                            <a:t>Innate talent draw (Beta(2,2) on [0,1])</a:t>
+                          </a:r>
+                          <a:endParaRPr lang="en-US" sz="1100" b="0" i="0" dirty="0">
+                            <a:latin typeface="Avenir Next" panose="020B0503020202020204" pitchFamily="34" charset="0"/>
+                          </a:endParaRPr>
+                        </a:p>
+                        <a:p>
+                          <a:pPr>
+                            <a:defRPr sz="800">
+                              <a:latin typeface="Calibri"/>
+                            </a:defRPr>
+                          </a:pPr>
+                          <a:r>
+                            <a:rPr lang="en-US" sz="1100" b="0" i="0" dirty="0">
+                              <a:latin typeface="Avenir Next" panose="020B0503020202020204" pitchFamily="34" charset="0"/>
+                            </a:rPr>
+                            <a:t>539 Preset</a:t>
+                          </a:r>
+                          <a:endParaRPr sz="1100" b="0" i="0" dirty="0">
+                            <a:latin typeface="Avenir Next" panose="020B0503020202020204" pitchFamily="34" charset="0"/>
+                          </a:endParaRPr>
+                        </a:p>
+                      </a:txBody>
+                      <a:tcPr anchor="ctr"/>
+                    </a:tc>
+                    <a:extLst>
+                      <a:ext uri="{0D108BD9-81ED-4DB2-BD59-A6C34878D82A}">
+                        <a16:rowId xmlns:a16="http://schemas.microsoft.com/office/drawing/2014/main" val="10001"/>
+                      </a:ext>
+                    </a:extLst>
+                  </a:tr>
+                  <a:tr h="561945">
+                    <a:tc>
+                      <a:txBody>
+                        <a:bodyPr/>
+                        <a:lstStyle/>
+                        <a:p>
+                          <a:pPr algn="ctr"/>
+                          <a:r>
+                            <a:rPr lang="en-US" sz="1200" b="0" dirty="0"/>
+                            <a:t>T</a:t>
+                          </a:r>
+                          <a:r>
+                            <a:rPr lang="en-US" sz="1200" b="0" baseline="-25000" dirty="0"/>
+                            <a:t>j</a:t>
+                          </a:r>
+                          <a14:m/>
+                        </a:p>
+                      </a:txBody>
+                      <a:tcPr anchor="ctr"/>
+                    </a:tc>
+                    <a:tc>
+                      <a:txBody>
+                        <a:bodyPr/>
+                        <a:lstStyle/>
+                        <a:p>
+                          <a:pPr>
+                            <a:defRPr sz="900">
+                              <a:latin typeface="Calibri"/>
+                            </a:defRPr>
+                          </a:pPr>
+                          <a:r>
+                            <a:rPr lang="en-US" sz="1200" b="0" i="0" dirty="0">
+                              <a:latin typeface="Avenir Next" panose="020B0503020202020204" pitchFamily="34" charset="0"/>
+                            </a:rPr>
+                            <a:t>Team talent target</a:t>
+                          </a:r>
+                          <a:endParaRPr sz="1200" b="0" i="0" dirty="0">
+                            <a:latin typeface="Avenir Next" panose="020B0503020202020204" pitchFamily="34" charset="0"/>
+                          </a:endParaRPr>
+                        </a:p>
+                      </a:txBody>
+                      <a:tcPr anchor="ctr"/>
+                    </a:tc>
+                    <a:tc>
+                      <a:txBody>
+                        <a:bodyPr/>
+                        <a:lstStyle/>
+                        <a:p>
+                          <a:pPr marL="0" marR="0" lvl="0" indent="0" algn="l" defTabSz="457200" rtl="0" eaLnBrk="1" fontAlgn="auto" latinLnBrk="0" hangingPunct="1">
+                            <a:lnSpc>
+                              <a:spcPct val="100000"/>
+                            </a:lnSpc>
+                            <a:spcBef>
+                              <a:spcPts val="0"/>
+                            </a:spcBef>
+                            <a:spcAft>
+                              <a:spcPts val="0"/>
+                            </a:spcAft>
+                            <a:buClrTx/>
+                            <a:buSzTx/>
+                            <a:buFontTx/>
+                            <a:buNone/>
+                            <a:tabLst/>
+                            <a:defRPr sz="800">
+                              <a:latin typeface="Calibri"/>
+                            </a:defRPr>
+                          </a:pPr>
+                          <a:r>
+                            <a:rPr lang="en-US" sz="1100" b="0" i="0" dirty="0">
+                              <a:latin typeface="Avenir Next" panose="020B0503020202020204" pitchFamily="34" charset="0"/>
+                            </a:rPr>
+                            <a:t>Synthetic </a:t>
+                          </a:r>
+                          <a:r>
+                            <a:rPr lang="en-US" sz="1100" b="0" i="0" dirty="0" err="1">
+                              <a:latin typeface="Avenir Next" panose="020B0503020202020204" pitchFamily="34" charset="0"/>
+                            </a:rPr>
+                            <a:t>i.i.d.</a:t>
+                          </a:r>
+                          <a:r>
+                            <a:rPr lang="en-US" sz="1100" b="0" i="0" dirty="0">
+                              <a:latin typeface="Avenir Next" panose="020B0503020202020204" pitchFamily="34" charset="0"/>
+                            </a:rPr>
+                            <a:t> Uniform[0,1] per team— ideal “seat” for soft assignment</a:t>
+                          </a:r>
+                        </a:p>
+                        <a:p>
+                          <a:pPr marL="0" marR="0" lvl="0" indent="0" algn="l" defTabSz="457200" rtl="0" eaLnBrk="1" fontAlgn="auto" latinLnBrk="0" hangingPunct="1">
+                            <a:lnSpc>
+                              <a:spcPct val="100000"/>
+                            </a:lnSpc>
+                            <a:spcBef>
+                              <a:spcPts val="0"/>
+                            </a:spcBef>
+                            <a:spcAft>
+                              <a:spcPts val="0"/>
+                            </a:spcAft>
+                            <a:buClrTx/>
+                            <a:buSzTx/>
+                            <a:buFontTx/>
+                            <a:buNone/>
+                            <a:tabLst/>
+                            <a:defRPr sz="800">
+                              <a:latin typeface="Calibri"/>
+                            </a:defRPr>
+                          </a:pPr>
+                          <a:endParaRPr sz="1100" b="0" i="0" dirty="0">
+                            <a:latin typeface="Avenir Next" panose="020B0503020202020204" pitchFamily="34" charset="0"/>
+                          </a:endParaRPr>
+                        </a:p>
+                      </a:txBody>
+                      <a:tcPr anchor="ctr"/>
+                    </a:tc>
+                    <a:extLst>
+                      <a:ext uri="{0D108BD9-81ED-4DB2-BD59-A6C34878D82A}">
+                        <a16:rowId xmlns:a16="http://schemas.microsoft.com/office/drawing/2014/main" val="2549253264"/>
+                      </a:ext>
+                    </a:extLst>
+                  </a:tr>
+                  <a:tr h="526403">
+                    <a:tc>
+                      <a:txBody>
+                        <a:bodyPr/>
+                        <a:lstStyle/>
+                        <a:p>
+                          <a:pPr algn="ctr"/>
+                          <a:r>
+                            <a:rPr sz="1200" b="0" i="0" dirty="0">
+                              <a:latin typeface="Avenir Next" panose="020B0503020202020204" pitchFamily="34" charset="0"/>
+                            </a:rPr>
+                            <a:t>ρ</a:t>
+                          </a:r>
+                        </a:p>
+                      </a:txBody>
+                      <a:tcPr anchor="ctr"/>
+                    </a:tc>
+                    <a:tc>
+                      <a:txBody>
+                        <a:bodyPr/>
+                        <a:lstStyle/>
+                        <a:p>
+                          <a:pPr>
+                            <a:defRPr sz="900">
+                              <a:latin typeface="Calibri"/>
+                            </a:defRPr>
+                          </a:pPr>
+                          <a:r>
+                            <a:rPr sz="1200" b="0" i="0">
+                              <a:latin typeface="Avenir Next" panose="020B0503020202020204" pitchFamily="34" charset="0"/>
+                            </a:rPr>
+                            <a:t>Assignment assortativity</a:t>
+                          </a:r>
+                        </a:p>
+                      </a:txBody>
+                      <a:tcPr anchor="ctr"/>
+                    </a:tc>
+                    <a:tc>
+                      <a:txBody>
+                        <a:bodyPr/>
+                        <a:lstStyle/>
+                        <a:p>
+                          <a:pPr>
+                            <a:defRPr sz="800">
+                              <a:latin typeface="Calibri"/>
+                            </a:defRPr>
+                          </a:pPr>
+                          <a:r>
+                            <a:rPr sz="1100" b="0" i="0" dirty="0">
+                              <a:latin typeface="Avenir Next" panose="020B0503020202020204" pitchFamily="34" charset="0"/>
+                            </a:rPr>
+                            <a:t>How tightly players match team talent targets</a:t>
+                          </a:r>
+                        </a:p>
+                      </a:txBody>
+                      <a:tcPr anchor="ctr"/>
+                    </a:tc>
+                    <a:extLst>
+                      <a:ext uri="{0D108BD9-81ED-4DB2-BD59-A6C34878D82A}">
+                        <a16:rowId xmlns:a16="http://schemas.microsoft.com/office/drawing/2014/main" val="10002"/>
+                      </a:ext>
+                    </a:extLst>
+                  </a:tr>
+                  <a:tr h="526403">
+                    <a:tc>
+                      <a:txBody>
+                        <a:bodyPr/>
+                        <a:lstStyle/>
+                        <a:p>
+                          <a:pPr algn="ctr"/>
+                          <a:r>
+                            <a:rPr sz="1200" b="0" i="0" dirty="0">
+                              <a:latin typeface="Avenir Next" panose="020B0503020202020204" pitchFamily="34" charset="0"/>
+                            </a:rPr>
+                            <a:t>L</a:t>
+                          </a:r>
+                          <a:r>
+                            <a:rPr sz="1100" b="0" i="0" baseline="-25000" dirty="0">
+                              <a:latin typeface="Avenir Next" panose="020B0503020202020204" pitchFamily="34" charset="0"/>
+                            </a:rPr>
+                            <a:t>C</a:t>
+                          </a:r>
+                        </a:p>
+                      </a:txBody>
+                      <a:tcPr anchor="ctr"/>
+                    </a:tc>
+                    <a:tc>
+                      <a:txBody>
+                        <a:bodyPr/>
+                        <a:lstStyle/>
+                        <a:p>
+                          <a:pPr>
+                            <a:defRPr sz="900">
+                              <a:latin typeface="Calibri"/>
+                            </a:defRPr>
+                          </a:pPr>
+                          <a:r>
+                            <a:rPr sz="1200" b="0" i="0">
+                              <a:latin typeface="Avenir Next" panose="020B0503020202020204" pitchFamily="34" charset="0"/>
+                            </a:rPr>
+                            <a:t>Congestion measure</a:t>
+                          </a:r>
+                        </a:p>
+                      </a:txBody>
+                      <a:tcPr anchor="ctr"/>
+                    </a:tc>
+                    <a:tc>
+                      <a:txBody>
+                        <a:bodyPr/>
+                        <a:lstStyle/>
+                        <a:p>
+                          <a:r>
+                            <a:rPr lang="en-US" sz="1100" b="0" i="0" dirty="0">
+                              <a:latin typeface="Avenir Next" panose="020B0503020202020204" pitchFamily="34" charset="0"/>
+                            </a:rPr>
+                            <a:t>LOO peer</a:t>
+                          </a:r>
+                          <a:r>
+                            <a:rPr lang="en-US" sz="1100" b="0" i="0" baseline="0" dirty="0">
+                              <a:latin typeface="Avenir Next" panose="020B0503020202020204" pitchFamily="34" charset="0"/>
+                            </a:rPr>
+                            <a:t> viability</a:t>
+                          </a:r>
+                        </a:p>
+                        <a:p>
+                          <a:r>
+                            <a:rPr lang="en-US" sz="1100" b="0" i="0" dirty="0">
+                              <a:latin typeface="Avenir Next" panose="020B0503020202020204" pitchFamily="34" charset="0"/>
+                            </a:rPr>
+                            <a:t>Smooth</a:t>
+                          </a:r>
+                          <a:r>
+                            <a:rPr lang="en-US" sz="1100" b="0" i="0" baseline="0" dirty="0">
+                              <a:latin typeface="Avenir Next" panose="020B0503020202020204" pitchFamily="34" charset="0"/>
+                            </a:rPr>
+                            <a:t> - </a:t>
+                          </a:r>
+                          <a:r>
+                            <a:rPr lang="en-US" sz="1100" b="0" i="0" dirty="0">
+                              <a:latin typeface="Avenir Next" panose="020B0503020202020204" pitchFamily="34" charset="0"/>
+                            </a:rPr>
+                            <a:t> mean of </a:t>
+                          </a:r>
+                          <a14:m>
+                            <m:oMath xmlns:m="http://schemas.openxmlformats.org/officeDocument/2006/math">
+                              <m:r>
+                                <a:rPr lang="en-US" sz="1100" b="0" i="1" dirty="0" smtClean="0">
+                                  <a:latin typeface="Cambria Math" panose="02040503050406030204" pitchFamily="18" charset="0"/>
+                                </a:rPr>
+                                <m:t>𝜎</m:t>
+                              </m:r>
+                              <m:d>
+                                <m:dPr>
+                                  <m:ctrlPr>
+                                    <a:rPr lang="ar-AE" sz="1100" b="0" i="1" dirty="0" smtClean="0">
+                                      <a:latin typeface="Cambria Math" panose="02040503050406030204" pitchFamily="18" charset="0"/>
+                                    </a:rPr>
+                                  </m:ctrlPr>
+                                </m:dPr>
+                                <m:e>
+                                  <m:r>
+                                    <a:rPr lang="ar-AE" sz="1100" b="0" i="1" dirty="0" smtClean="0">
+                                      <a:latin typeface="Cambria Math" panose="02040503050406030204" pitchFamily="18" charset="0"/>
+                                    </a:rPr>
+                                    <m:t>𝛾</m:t>
+                                  </m:r>
+                                  <m:d>
+                                    <m:dPr>
+                                      <m:ctrlPr>
+                                        <a:rPr lang="ar-AE" sz="1100" b="0" i="1" dirty="0" smtClean="0">
+                                          <a:latin typeface="Cambria Math" panose="02040503050406030204" pitchFamily="18" charset="0"/>
+                                        </a:rPr>
+                                      </m:ctrlPr>
+                                    </m:dPr>
+                                    <m:e>
+                                      <m:r>
+                                        <a:rPr lang="ar-AE" sz="1100" b="0" i="1" dirty="0" smtClean="0">
+                                          <a:latin typeface="Cambria Math" panose="02040503050406030204" pitchFamily="18" charset="0"/>
+                                        </a:rPr>
+                                        <m:t>𝐴</m:t>
+                                      </m:r>
+                                      <m:r>
+                                        <a:rPr lang="ar-AE" sz="1100" b="0" i="1" baseline="-25000" dirty="0">
+                                          <a:latin typeface="Cambria Math" panose="02040503050406030204" pitchFamily="18" charset="0"/>
+                                        </a:rPr>
+                                        <m:t>𝑗</m:t>
+                                      </m:r>
+                                      <m:r>
+                                        <a:rPr lang="ar-AE" sz="1100" b="0" i="1" dirty="0">
+                                          <a:latin typeface="Cambria Math" panose="02040503050406030204" pitchFamily="18" charset="0"/>
+                                        </a:rPr>
+                                        <m:t>−</m:t>
+                                      </m:r>
+                                      <m:r>
+                                        <a:rPr lang="ar-AE" sz="1100" b="0" i="1" dirty="0">
+                                          <a:latin typeface="Cambria Math" panose="02040503050406030204" pitchFamily="18" charset="0"/>
+                                        </a:rPr>
+                                        <m:t>𝜃</m:t>
+                                      </m:r>
+                                    </m:e>
+                                  </m:d>
+                                </m:e>
+                              </m:d>
+                            </m:oMath>
+                          </a14:m>
+                          <a:r>
+                            <a:rPr lang="en-US" sz="1100" b="0" i="0" dirty="0">
+                              <a:latin typeface="Avenir Next" panose="020B0503020202020204" pitchFamily="34" charset="0"/>
+                            </a:rPr>
+                            <a:t>over teammates</a:t>
+                          </a:r>
+                        </a:p>
+                        <a:p>
+                          <a:r>
+                            <a:rPr lang="en-US" sz="1100" b="0" i="0" dirty="0">
+                              <a:latin typeface="Avenir Next" panose="020B0503020202020204" pitchFamily="34" charset="0"/>
+                            </a:rPr>
+                            <a:t>Hard option in code (</a:t>
+                          </a:r>
+                          <a14:m>
+                            <m:oMath xmlns:m="http://schemas.openxmlformats.org/officeDocument/2006/math">
+                              <m:sSub>
+                                <m:sSubPr>
+                                  <m:ctrlPr>
+                                    <a:rPr lang="ar-AE" sz="1100" b="0" i="1" dirty="0" smtClean="0">
+                                      <a:latin typeface="Cambria Math" panose="02040503050406030204" pitchFamily="18" charset="0"/>
+                                    </a:rPr>
+                                  </m:ctrlPr>
+                                </m:sSubPr>
+                                <m:e>
+                                  <m:r>
+                                    <a:rPr lang="ar-AE" sz="1100" b="0" i="1" dirty="0" smtClean="0">
+                                      <a:latin typeface="Cambria Math" panose="02040503050406030204" pitchFamily="18" charset="0"/>
+                                    </a:rPr>
+                                    <m:t>𝐴</m:t>
+                                  </m:r>
+                                </m:e>
+                                <m:sub>
+                                  <m:r>
+                                    <a:rPr lang="ar-AE" sz="1100" b="0" i="1" dirty="0" smtClean="0">
+                                      <a:latin typeface="Cambria Math" panose="02040503050406030204" pitchFamily="18" charset="0"/>
+                                    </a:rPr>
+                                    <m:t>𝑗</m:t>
+                                  </m:r>
+                                </m:sub>
+                              </m:sSub>
+                              <m:r>
+                                <a:rPr lang="ar-AE" sz="1100" b="0" i="1" dirty="0" smtClean="0">
+                                  <a:latin typeface="Cambria Math" panose="02040503050406030204" pitchFamily="18" charset="0"/>
+                                </a:rPr>
+                                <m:t>&gt; </m:t>
+                              </m:r>
+                              <m:r>
+                                <a:rPr lang="ar-AE" sz="1100" b="0" i="1" dirty="0" smtClean="0">
+                                  <a:latin typeface="Cambria Math" panose="02040503050406030204" pitchFamily="18" charset="0"/>
+                                </a:rPr>
+                                <m:t>𝜃</m:t>
+                              </m:r>
+                              <m:r>
+                                <a:rPr lang="en-US" sz="1100" b="0" i="0" dirty="0" smtClean="0">
+                                  <a:latin typeface="Cambria Math" panose="02040503050406030204" pitchFamily="18" charset="0"/>
+                                </a:rPr>
+                                <m:t>)</m:t>
+                              </m:r>
+                            </m:oMath>
+                          </a14:m>
+                          <a:endParaRPr sz="1100" b="0" i="0" dirty="0">
+                            <a:latin typeface="Avenir Next" panose="020B0503020202020204" pitchFamily="34" charset="0"/>
+                          </a:endParaRPr>
+                        </a:p>
+                      </a:txBody>
+                      <a:tcPr anchor="ctr"/>
+                    </a:tc>
+                    <a:extLst>
+                      <a:ext uri="{0D108BD9-81ED-4DB2-BD59-A6C34878D82A}">
+                        <a16:rowId xmlns:a16="http://schemas.microsoft.com/office/drawing/2014/main" val="10003"/>
+                      </a:ext>
+                    </a:extLst>
+                  </a:tr>
+                  <a:tr h="526403">
+                    <a:tc>
+                      <a:txBody>
+                        <a:bodyPr/>
+                        <a:lstStyle/>
+                        <a:p>
+                          <a:pPr algn="ctr"/>
+                          <a:r>
+                            <a:rPr sz="1200" b="0" i="0" dirty="0">
+                              <a:latin typeface="Avenir Next" panose="020B0503020202020204" pitchFamily="34" charset="0"/>
+                            </a:rPr>
+                            <a:t>λ</a:t>
+                          </a:r>
+                        </a:p>
+                      </a:txBody>
+                      <a:tcPr anchor="ctr"/>
+                    </a:tc>
+                    <a:tc>
+                      <a:txBody>
+                        <a:bodyPr/>
+                        <a:lstStyle/>
+                        <a:p>
+                          <a:pPr>
+                            <a:defRPr sz="900">
+                              <a:latin typeface="Calibri"/>
+                            </a:defRPr>
+                          </a:pPr>
+                          <a:r>
+                            <a:rPr sz="1200" b="0" i="0">
+                              <a:latin typeface="Avenir Next" panose="020B0503020202020204" pitchFamily="34" charset="0"/>
+                            </a:rPr>
+                            <a:t>Congestion weight in score</a:t>
+                          </a:r>
+                        </a:p>
+                      </a:txBody>
+                      <a:tcPr anchor="ctr"/>
+                    </a:tc>
+                    <a:tc>
+                      <a:txBody>
+                        <a:bodyPr/>
+                        <a:lstStyle/>
+                        <a:p>
+                          <a:r>
+                            <a:rPr sz="1100" b="0" i="0" dirty="0">
+                              <a:latin typeface="Avenir Next" panose="020B0503020202020204" pitchFamily="34" charset="0"/>
+                            </a:rPr>
+                            <a:t>How hard L</a:t>
+                          </a:r>
+                          <a:r>
+                            <a:rPr sz="1100" b="0" i="0" baseline="-25000" dirty="0">
+                              <a:latin typeface="Avenir Next" panose="020B0503020202020204" pitchFamily="34" charset="0"/>
+                            </a:rPr>
+                            <a:t>C</a:t>
+                          </a:r>
+                          <a:r>
+                            <a:rPr sz="1100" b="0" i="0" dirty="0">
+                              <a:latin typeface="Avenir Next" panose="020B0503020202020204" pitchFamily="34" charset="0"/>
+                            </a:rPr>
+                            <a:t> penalizes ranking — not congestion itself</a:t>
+                          </a:r>
+                        </a:p>
+                      </a:txBody>
+                      <a:tcPr anchor="ctr"/>
+                    </a:tc>
+                    <a:extLst>
+                      <a:ext uri="{0D108BD9-81ED-4DB2-BD59-A6C34878D82A}">
+                        <a16:rowId xmlns:a16="http://schemas.microsoft.com/office/drawing/2014/main" val="10004"/>
+                      </a:ext>
+                    </a:extLst>
+                  </a:tr>
+                  <a:tr h="526403">
+                    <a:tc>
+                      <a:txBody>
+                        <a:bodyPr/>
+                        <a:lstStyle/>
+                        <a:p>
+                          <a:pPr algn="ctr"/>
+                          <a14:m>
+                            <m:oMathPara xmlns:m="http://schemas.openxmlformats.org/officeDocument/2006/math">
+                              <m:oMathParaPr>
+                                <m:jc m:val="centerGroup"/>
+                              </m:oMathParaPr>
+                              <m:oMath xmlns:m="http://schemas.openxmlformats.org/officeDocument/2006/math">
+                                <m:r>
+                                  <a:rPr lang="en-US" sz="1200" b="0" i="1" dirty="0" smtClean="0">
+                                    <a:latin typeface="Cambria Math" panose="02040503050406030204" pitchFamily="18" charset="0"/>
+                                  </a:rPr>
+                                  <m:t>𝜃</m:t>
+                                </m:r>
+                              </m:oMath>
+                            </m:oMathPara>
+                          </a14:m>
+                          <a:endParaRPr sz="1200" b="0" i="0" dirty="0">
+                            <a:latin typeface="Avenir Next" panose="020B0503020202020204" pitchFamily="34" charset="0"/>
+                          </a:endParaRPr>
+                        </a:p>
+                      </a:txBody>
+                      <a:tcPr anchor="ctr"/>
+                    </a:tc>
+                    <a:tc>
+                      <a:txBody>
+                        <a:bodyPr/>
+                        <a:lstStyle/>
+                        <a:p>
+                          <a:pPr>
+                            <a:defRPr sz="900">
+                              <a:latin typeface="Calibri"/>
+                            </a:defRPr>
+                          </a:pPr>
+                          <a:r>
+                            <a:rPr sz="1200" b="0" i="0">
+                              <a:latin typeface="Avenir Next" panose="020B0503020202020204" pitchFamily="34" charset="0"/>
+                            </a:rPr>
+                            <a:t>Viability cutline</a:t>
+                          </a:r>
+                        </a:p>
+                      </a:txBody>
+                      <a:tcPr anchor="ctr"/>
+                    </a:tc>
+                    <a:tc>
+                      <a:txBody>
+                        <a:bodyPr/>
+                        <a:lstStyle/>
+                        <a:p>
+                          <a:pPr>
+                            <a:defRPr sz="800">
+                              <a:latin typeface="Calibri"/>
+                            </a:defRPr>
+                          </a:pPr>
+                          <a:r>
+                            <a:rPr sz="1100" b="0" i="0">
+                              <a:latin typeface="Avenir Next" panose="020B0503020202020204" pitchFamily="34" charset="0"/>
+                            </a:rPr>
+                            <a:t>Center of the sigmoid</a:t>
+                          </a:r>
+                        </a:p>
+                      </a:txBody>
+                      <a:tcPr anchor="ctr"/>
+                    </a:tc>
+                    <a:extLst>
+                      <a:ext uri="{0D108BD9-81ED-4DB2-BD59-A6C34878D82A}">
+                        <a16:rowId xmlns:a16="http://schemas.microsoft.com/office/drawing/2014/main" val="10005"/>
+                      </a:ext>
+                    </a:extLst>
+                  </a:tr>
+                  <a:tr h="526403">
+                    <a:tc>
+                      <a:txBody>
+                        <a:bodyPr/>
+                        <a:lstStyle/>
+                        <a:p>
+                          <a:pPr algn="ctr"/>
+                          <a14:m>
+                            <m:oMathPara xmlns:m="http://schemas.openxmlformats.org/officeDocument/2006/math">
+                              <m:oMathParaPr>
+                                <m:jc m:val="centerGroup"/>
+                              </m:oMathParaPr>
+                              <m:oMath xmlns:m="http://schemas.openxmlformats.org/officeDocument/2006/math">
+                                <m:r>
+                                  <a:rPr lang="en-US" sz="1200" b="0" i="1" dirty="0" smtClean="0">
+                                    <a:latin typeface="Cambria Math" panose="02040503050406030204" pitchFamily="18" charset="0"/>
+                                  </a:rPr>
+                                  <m:t>𝛾</m:t>
+                                </m:r>
+                              </m:oMath>
+                            </m:oMathPara>
+                          </a14:m>
+                          <a:endParaRPr sz="1600"/>
+                        </a:p>
+                      </a:txBody>
+                      <a:tcPr anchor="ctr"/>
+                    </a:tc>
+                    <a:tc>
+                      <a:txBody>
+                        <a:bodyPr/>
+                        <a:lstStyle/>
+                        <a:p>
+                          <a:pPr>
+                            <a:defRPr sz="900">
+                              <a:latin typeface="Calibri"/>
+                            </a:defRPr>
+                          </a:pPr>
+                          <a:r>
+                            <a:rPr sz="1200" b="0" i="0">
+                              <a:latin typeface="Avenir Next" panose="020B0503020202020204" pitchFamily="34" charset="0"/>
+                            </a:rPr>
+                            <a:t>Sigmoid sharpness</a:t>
+                          </a:r>
+                        </a:p>
+                      </a:txBody>
+                      <a:tcPr anchor="ctr"/>
+                    </a:tc>
+                    <a:tc>
+                      <a:txBody>
+                        <a:bodyPr/>
+                        <a:lstStyle/>
+                        <a:p>
+                          <a:r>
+                            <a:rPr sz="1100" b="0" i="0" dirty="0">
+                              <a:latin typeface="Avenir Next" panose="020B0503020202020204" pitchFamily="34" charset="0"/>
+                            </a:rPr>
+                            <a:t>Steepness of viability step around </a:t>
+                          </a:r>
+                          <a14:m>
+                            <m:oMath xmlns:m="http://schemas.openxmlformats.org/officeDocument/2006/math">
+                              <m:r>
+                                <a:rPr lang="en-US" sz="1100" b="0" i="1" dirty="0" smtClean="0">
+                                  <a:latin typeface="Cambria Math" panose="02040503050406030204" pitchFamily="18" charset="0"/>
+                                </a:rPr>
+                                <m:t>𝜃</m:t>
+                              </m:r>
+                            </m:oMath>
+                          </a14:m>
+                          <a:endParaRPr sz="1100" b="0" i="0" dirty="0">
+                            <a:latin typeface="Avenir Next" panose="020B0503020202020204" pitchFamily="34" charset="0"/>
+                          </a:endParaRPr>
+                        </a:p>
+                      </a:txBody>
+                      <a:tcPr anchor="ctr"/>
+                    </a:tc>
+                    <a:extLst>
+                      <a:ext uri="{0D108BD9-81ED-4DB2-BD59-A6C34878D82A}">
+                        <a16:rowId xmlns:a16="http://schemas.microsoft.com/office/drawing/2014/main" val="10006"/>
+                      </a:ext>
+                    </a:extLst>
+                  </a:tr>
+                  <a:tr h="526403">
+                    <a:tc>
+                      <a:txBody>
+                        <a:bodyPr/>
+                        <a:lstStyle/>
+                        <a:p>
+                          <a:pPr algn="ctr"/>
+                          <a14:m>
+                            <m:oMathPara xmlns:m="http://schemas.openxmlformats.org/officeDocument/2006/math">
+                              <m:oMathParaPr>
+                                <m:jc m:val="centerGroup"/>
+                              </m:oMathParaPr>
+                              <m:oMath xmlns:m="http://schemas.openxmlformats.org/officeDocument/2006/math">
+                                <m:r>
+                                  <a:rPr lang="en-US" sz="1200" b="0" i="1" dirty="0" smtClean="0">
+                                    <a:latin typeface="Cambria Math" panose="02040503050406030204" pitchFamily="18" charset="0"/>
+                                  </a:rPr>
+                                  <m:t>𝐾</m:t>
+                                </m:r>
+                                <m:r>
+                                  <a:rPr lang="en-US" sz="1200" b="0" i="1" dirty="0" smtClean="0">
+                                    <a:latin typeface="Cambria Math" panose="02040503050406030204" pitchFamily="18" charset="0"/>
+                                  </a:rPr>
+                                  <m:t>/</m:t>
+                                </m:r>
+                                <m:r>
+                                  <a:rPr lang="en-US" sz="1200" b="0" i="1" dirty="0" smtClean="0">
+                                    <a:latin typeface="Cambria Math" panose="02040503050406030204" pitchFamily="18" charset="0"/>
+                                  </a:rPr>
+                                  <m:t>𝑁</m:t>
+                                </m:r>
+                              </m:oMath>
+                            </m:oMathPara>
+                          </a14:m>
+                          <a:endParaRPr sz="1600"/>
+                        </a:p>
+                      </a:txBody>
+                      <a:tcPr anchor="ctr"/>
+                    </a:tc>
+                    <a:tc>
+                      <a:txBody>
+                        <a:bodyPr/>
+                        <a:lstStyle/>
+                        <a:p>
+                          <a:pPr>
+                            <a:defRPr sz="900">
+                              <a:latin typeface="Calibri"/>
+                            </a:defRPr>
+                          </a:pPr>
+                          <a:r>
+                            <a:rPr sz="1200" b="0" i="0">
+                              <a:latin typeface="Avenir Next" panose="020B0503020202020204" pitchFamily="34" charset="0"/>
+                            </a:rPr>
+                            <a:t>Selectivity</a:t>
+                          </a:r>
+                        </a:p>
+                      </a:txBody>
+                      <a:tcPr anchor="ctr"/>
+                    </a:tc>
+                    <a:tc>
+                      <a:txBody>
+                        <a:bodyPr/>
+                        <a:lstStyle/>
+                        <a:p>
+                          <a:r>
+                            <a:rPr sz="1100" b="0" i="0" dirty="0">
+                              <a:latin typeface="Avenir Next" panose="020B0503020202020204" pitchFamily="34" charset="0"/>
+                            </a:rPr>
+                            <a:t>Fraction of league selected (</a:t>
+                          </a:r>
+                          <a14:m>
+                            <m:oMath xmlns:m="http://schemas.openxmlformats.org/officeDocument/2006/math">
+                              <m:r>
+                                <a:rPr lang="en-US" sz="1100" b="0" i="1" dirty="0" smtClean="0">
+                                  <a:latin typeface="Cambria Math" panose="02040503050406030204" pitchFamily="18" charset="0"/>
+                                </a:rPr>
+                                <m:t>𝐾</m:t>
+                              </m:r>
+                              <m:r>
+                                <a:rPr lang="en-US" sz="1100" b="0" i="1" dirty="0" smtClean="0">
+                                  <a:latin typeface="Cambria Math" panose="02040503050406030204" pitchFamily="18" charset="0"/>
+                                </a:rPr>
+                                <m:t> ÷</m:t>
+                              </m:r>
+                              <m:r>
+                                <a:rPr lang="en-US" sz="1100" b="0" i="1" dirty="0" smtClean="0">
+                                  <a:latin typeface="Cambria Math" panose="02040503050406030204" pitchFamily="18" charset="0"/>
+                                </a:rPr>
+                                <m:t>𝑁</m:t>
+                              </m:r>
+                            </m:oMath>
+                          </a14:m>
+                          <a:r>
+                            <a:rPr sz="1100" b="0" i="0" dirty="0">
+                              <a:latin typeface="Avenir Next" panose="020B0503020202020204" pitchFamily="34" charset="0"/>
+                            </a:rPr>
+                            <a:t>)</a:t>
+                          </a:r>
+                        </a:p>
+                      </a:txBody>
+                      <a:tcPr anchor="ctr"/>
+                    </a:tc>
+                    <a:extLst>
+                      <a:ext uri="{0D108BD9-81ED-4DB2-BD59-A6C34878D82A}">
+                        <a16:rowId xmlns:a16="http://schemas.microsoft.com/office/drawing/2014/main" val="10007"/>
+                      </a:ext>
+                    </a:extLst>
+                  </a:tr>
+                </a:tbl>
+              </a:graphicData>
+            </a:graphic>
+          </p:graphicFrame>
+        </mc:Choice>
+        <mc:Fallback>
+          <p:graphicFrame>
+            <p:nvGraphicFramePr>
+              <p:cNvPr id="4" name="Table 3"/>
+              <p:cNvGraphicFramePr>
+                <a:graphicFrameLocks noGrp="1"/>
+              </p:cNvGraphicFramePr>
+              <p:nvPr/>
+            </p:nvGraphicFramePr>
+            <p:xfrm>
+              <a:off x="384048" y="1024128"/>
+              <a:ext cx="5806439" cy="4908593"/>
+            </p:xfrm>
+            <a:graphic>
+              <a:graphicData uri="http://schemas.openxmlformats.org/drawingml/2006/table">
+                <a:tbl>
+                  <a:tblPr firstRow="1" bandRow="1">
+                    <a:tableStyleId>{21E4AEA4-8DFA-4A89-87EB-49C32662AFE0}</a:tableStyleId>
+                  </a:tblPr>
+                  <a:tblGrid>
+                    <a:gridCol w="812901">
+                      <a:extLst>
+                        <a:ext uri="{9D8B030D-6E8A-4147-A177-3AD203B41FA5}">
+                          <a16:colId xmlns:a16="http://schemas.microsoft.com/office/drawing/2014/main" val="20000"/>
+                        </a:ext>
+                      </a:extLst>
+                    </a:gridCol>
+                    <a:gridCol w="1625803">
+                      <a:extLst>
+                        <a:ext uri="{9D8B030D-6E8A-4147-A177-3AD203B41FA5}">
+                          <a16:colId xmlns:a16="http://schemas.microsoft.com/office/drawing/2014/main" val="20001"/>
+                        </a:ext>
+                      </a:extLst>
+                    </a:gridCol>
+                    <a:gridCol w="3367735">
+                      <a:extLst>
+                        <a:ext uri="{9D8B030D-6E8A-4147-A177-3AD203B41FA5}">
+                          <a16:colId xmlns:a16="http://schemas.microsoft.com/office/drawing/2014/main" val="20002"/>
+                        </a:ext>
+                      </a:extLst>
+                    </a:gridCol>
+                  </a:tblGrid>
+                  <a:tr h="526403">
+                    <a:tc>
+                      <a:txBody>
+                        <a:bodyPr/>
+                        <a:lstStyle/>
+                        <a:p>
+                          <a:pPr algn="ctr">
+                            <a:defRPr sz="900" b="1">
+                              <a:latin typeface="Calibri"/>
+                            </a:defRPr>
+                          </a:pPr>
+                          <a:r>
+                            <a:rPr sz="1200" b="0" i="0" dirty="0">
+                              <a:latin typeface="Avenir Next" panose="020B0503020202020204" pitchFamily="34" charset="0"/>
+                            </a:rPr>
+                            <a:t>Symbol</a:t>
+                          </a:r>
+                        </a:p>
+                      </a:txBody>
+                      <a:tcPr anchor="ctr"/>
+                    </a:tc>
+                    <a:tc>
+                      <a:txBody>
+                        <a:bodyPr/>
+                        <a:lstStyle/>
+                        <a:p>
+                          <a:pPr>
+                            <a:defRPr sz="900" b="1">
+                              <a:latin typeface="Calibri"/>
+                            </a:defRPr>
+                          </a:pPr>
+                          <a:r>
+                            <a:rPr sz="1200" b="0" i="0" dirty="0">
+                              <a:latin typeface="Avenir Next" panose="020B0503020202020204" pitchFamily="34" charset="0"/>
+                            </a:rPr>
+                            <a:t>Plain name</a:t>
+                          </a:r>
+                        </a:p>
+                      </a:txBody>
+                      <a:tcPr anchor="ctr"/>
+                    </a:tc>
+                    <a:tc>
+                      <a:txBody>
+                        <a:bodyPr/>
+                        <a:lstStyle/>
+                        <a:p>
+                          <a:pPr>
+                            <a:defRPr sz="900" b="1">
+                              <a:latin typeface="Calibri"/>
+                            </a:defRPr>
+                          </a:pPr>
+                          <a:r>
+                            <a:rPr sz="1200" b="0" i="0" dirty="0">
+                              <a:latin typeface="Avenir Next" panose="020B0503020202020204" pitchFamily="34" charset="0"/>
+                            </a:rPr>
+                            <a:t>What it controls</a:t>
+                          </a:r>
+                        </a:p>
+                      </a:txBody>
+                      <a:tcPr anchor="ctr"/>
+                    </a:tc>
+                    <a:extLst>
+                      <a:ext uri="{0D108BD9-81ED-4DB2-BD59-A6C34878D82A}">
+                        <a16:rowId xmlns:a16="http://schemas.microsoft.com/office/drawing/2014/main" val="10000"/>
+                      </a:ext>
+                    </a:extLst>
+                  </a:tr>
+                  <a:tr h="526403">
+                    <a:tc>
+                      <a:txBody>
+                        <a:bodyPr/>
+                        <a:lstStyle/>
+                        <a:p>
+                          <a:pPr algn="ctr"/>
+                          <a:r>
+                            <a:rPr sz="1200" b="0" i="0" dirty="0">
+                              <a:latin typeface="Avenir Next" panose="020B0503020202020204" pitchFamily="34" charset="0"/>
+                            </a:rPr>
+                            <a:t>A</a:t>
+                          </a:r>
+                          <a:r>
+                            <a:rPr sz="1100" b="0" i="0" baseline="-25000" dirty="0">
+                              <a:latin typeface="Avenir Next" panose="020B0503020202020204" pitchFamily="34" charset="0"/>
+                            </a:rPr>
+                            <a:t>i</a:t>
+                          </a:r>
+                        </a:p>
+                      </a:txBody>
+                      <a:tcPr anchor="ctr"/>
+                    </a:tc>
+                    <a:tc>
+                      <a:txBody>
+                        <a:bodyPr/>
+                        <a:lstStyle/>
+                        <a:p>
+                          <a:pPr>
+                            <a:defRPr sz="900">
+                              <a:latin typeface="Calibri"/>
+                            </a:defRPr>
+                          </a:pPr>
+                          <a:r>
+                            <a:rPr sz="1200" b="0" i="0">
+                              <a:latin typeface="Avenir Next" panose="020B0503020202020204" pitchFamily="34" charset="0"/>
+                            </a:rPr>
+                            <a:t>Player ability</a:t>
+                          </a:r>
+                        </a:p>
+                      </a:txBody>
+                      <a:tcPr anchor="ctr"/>
+                    </a:tc>
+                    <a:tc>
+                      <a:txBody>
+                        <a:bodyPr/>
+                        <a:lstStyle/>
+                        <a:p>
+                          <a:pPr>
+                            <a:defRPr sz="800">
+                              <a:latin typeface="Calibri"/>
+                            </a:defRPr>
+                          </a:pPr>
+                          <a:r>
+                            <a:rPr sz="1100" b="0" i="0" dirty="0">
+                              <a:latin typeface="Avenir Next" panose="020B0503020202020204" pitchFamily="34" charset="0"/>
+                            </a:rPr>
+                            <a:t>Innate talent draw (Beta(2,2) on [0,1])</a:t>
+                          </a:r>
+                          <a:endParaRPr lang="en-US" sz="1100" b="0" i="0" dirty="0">
+                            <a:latin typeface="Avenir Next" panose="020B0503020202020204" pitchFamily="34" charset="0"/>
+                          </a:endParaRPr>
+                        </a:p>
+                        <a:p>
+                          <a:pPr>
+                            <a:defRPr sz="800">
+                              <a:latin typeface="Calibri"/>
+                            </a:defRPr>
+                          </a:pPr>
+                          <a:r>
+                            <a:rPr lang="en-US" sz="1100" b="0" i="0" dirty="0">
+                              <a:latin typeface="Avenir Next" panose="020B0503020202020204" pitchFamily="34" charset="0"/>
+                            </a:rPr>
+                            <a:t>539 Preset</a:t>
+                          </a:r>
+                          <a:endParaRPr sz="1100" b="0" i="0" dirty="0">
+                            <a:latin typeface="Avenir Next" panose="020B0503020202020204" pitchFamily="34" charset="0"/>
+                          </a:endParaRPr>
+                        </a:p>
+                      </a:txBody>
+                      <a:tcPr anchor="ctr"/>
+                    </a:tc>
+                    <a:extLst>
+                      <a:ext uri="{0D108BD9-81ED-4DB2-BD59-A6C34878D82A}">
+                        <a16:rowId xmlns:a16="http://schemas.microsoft.com/office/drawing/2014/main" val="10001"/>
+                      </a:ext>
+                    </a:extLst>
+                  </a:tr>
+                  <a:tr h="594360">
+                    <a:tc>
+                      <a:txBody>
+                        <a:bodyPr/>
+                        <a:lstStyle/>
+                        <a:p>
+                          <a:endParaRPr lang="en-US"/>
+                        </a:p>
+                      </a:txBody>
+                      <a:tcPr anchor="ctr">
+                        <a:blipFill>
+                          <a:blip r:embed="rId2"/>
+                          <a:stretch>
+                            <a:fillRect l="-1563" t="-178723" r="-618750" b="-551064"/>
+                          </a:stretch>
+                        </a:blipFill>
+                      </a:tcPr>
+                    </a:tc>
+                    <a:tc>
+                      <a:txBody>
+                        <a:bodyPr/>
+                        <a:lstStyle/>
+                        <a:p>
+                          <a:pPr>
+                            <a:defRPr sz="900">
+                              <a:latin typeface="Calibri"/>
+                            </a:defRPr>
+                          </a:pPr>
+                          <a:r>
+                            <a:rPr lang="en-US" sz="1200" b="0" i="0" dirty="0">
+                              <a:latin typeface="Avenir Next" panose="020B0503020202020204" pitchFamily="34" charset="0"/>
+                            </a:rPr>
+                            <a:t>Team talent target</a:t>
+                          </a:r>
+                          <a:endParaRPr sz="1200" b="0" i="0" dirty="0">
+                            <a:latin typeface="Avenir Next" panose="020B0503020202020204" pitchFamily="34" charset="0"/>
+                          </a:endParaRPr>
+                        </a:p>
+                      </a:txBody>
+                      <a:tcPr anchor="ctr"/>
+                    </a:tc>
+                    <a:tc>
+                      <a:txBody>
+                        <a:bodyPr/>
+                        <a:lstStyle/>
+                        <a:p>
+                          <a:pPr marL="0" marR="0" lvl="0" indent="0" algn="l" defTabSz="457200" rtl="0" eaLnBrk="1" fontAlgn="auto" latinLnBrk="0" hangingPunct="1">
+                            <a:lnSpc>
+                              <a:spcPct val="100000"/>
+                            </a:lnSpc>
+                            <a:spcBef>
+                              <a:spcPts val="0"/>
+                            </a:spcBef>
+                            <a:spcAft>
+                              <a:spcPts val="0"/>
+                            </a:spcAft>
+                            <a:buClrTx/>
+                            <a:buSzTx/>
+                            <a:buFontTx/>
+                            <a:buNone/>
+                            <a:tabLst/>
+                            <a:defRPr sz="800">
+                              <a:latin typeface="Calibri"/>
+                            </a:defRPr>
+                          </a:pPr>
+                          <a:r>
+                            <a:rPr lang="en-US" sz="1100" b="0" i="0" dirty="0">
+                              <a:latin typeface="Avenir Next" panose="020B0503020202020204" pitchFamily="34" charset="0"/>
+                            </a:rPr>
+                            <a:t>Synthetic </a:t>
+                          </a:r>
+                          <a:r>
+                            <a:rPr lang="en-US" sz="1100" b="0" i="0" dirty="0" err="1">
+                              <a:latin typeface="Avenir Next" panose="020B0503020202020204" pitchFamily="34" charset="0"/>
+                            </a:rPr>
+                            <a:t>i.i.d.</a:t>
+                          </a:r>
+                          <a:r>
+                            <a:rPr lang="en-US" sz="1100" b="0" i="0" dirty="0">
+                              <a:latin typeface="Avenir Next" panose="020B0503020202020204" pitchFamily="34" charset="0"/>
+                            </a:rPr>
+                            <a:t> Uniform[0,1] per team— ideal “seat” for soft assignment</a:t>
+                          </a:r>
+                        </a:p>
+                        <a:p>
+                          <a:pPr marL="0" marR="0" lvl="0" indent="0" algn="l" defTabSz="457200" rtl="0" eaLnBrk="1" fontAlgn="auto" latinLnBrk="0" hangingPunct="1">
+                            <a:lnSpc>
+                              <a:spcPct val="100000"/>
+                            </a:lnSpc>
+                            <a:spcBef>
+                              <a:spcPts val="0"/>
+                            </a:spcBef>
+                            <a:spcAft>
+                              <a:spcPts val="0"/>
+                            </a:spcAft>
+                            <a:buClrTx/>
+                            <a:buSzTx/>
+                            <a:buFontTx/>
+                            <a:buNone/>
+                            <a:tabLst/>
+                            <a:defRPr sz="800">
+                              <a:latin typeface="Calibri"/>
+                            </a:defRPr>
+                          </a:pPr>
+                          <a:endParaRPr sz="1100" b="0" i="0" dirty="0">
+                            <a:latin typeface="Avenir Next" panose="020B0503020202020204" pitchFamily="34" charset="0"/>
+                          </a:endParaRPr>
+                        </a:p>
+                      </a:txBody>
+                      <a:tcPr anchor="ctr"/>
+                    </a:tc>
+                    <a:extLst>
+                      <a:ext uri="{0D108BD9-81ED-4DB2-BD59-A6C34878D82A}">
+                        <a16:rowId xmlns:a16="http://schemas.microsoft.com/office/drawing/2014/main" val="2549253264"/>
+                      </a:ext>
+                    </a:extLst>
+                  </a:tr>
+                  <a:tr h="526403">
+                    <a:tc>
+                      <a:txBody>
+                        <a:bodyPr/>
+                        <a:lstStyle/>
+                        <a:p>
+                          <a:pPr algn="ctr"/>
+                          <a:r>
+                            <a:rPr sz="1200" b="0" i="0" dirty="0">
+                              <a:latin typeface="Avenir Next" panose="020B0503020202020204" pitchFamily="34" charset="0"/>
+                            </a:rPr>
+                            <a:t>ρ</a:t>
+                          </a:r>
+                        </a:p>
+                      </a:txBody>
+                      <a:tcPr anchor="ctr"/>
+                    </a:tc>
+                    <a:tc>
+                      <a:txBody>
+                        <a:bodyPr/>
+                        <a:lstStyle/>
+                        <a:p>
+                          <a:pPr>
+                            <a:defRPr sz="900">
+                              <a:latin typeface="Calibri"/>
+                            </a:defRPr>
+                          </a:pPr>
+                          <a:r>
+                            <a:rPr sz="1200" b="0" i="0">
+                              <a:latin typeface="Avenir Next" panose="020B0503020202020204" pitchFamily="34" charset="0"/>
+                            </a:rPr>
+                            <a:t>Assignment assortativity</a:t>
+                          </a:r>
+                        </a:p>
+                      </a:txBody>
+                      <a:tcPr anchor="ctr"/>
+                    </a:tc>
+                    <a:tc>
+                      <a:txBody>
+                        <a:bodyPr/>
+                        <a:lstStyle/>
+                        <a:p>
+                          <a:pPr>
+                            <a:defRPr sz="800">
+                              <a:latin typeface="Calibri"/>
+                            </a:defRPr>
+                          </a:pPr>
+                          <a:r>
+                            <a:rPr sz="1100" b="0" i="0" dirty="0">
+                              <a:latin typeface="Avenir Next" panose="020B0503020202020204" pitchFamily="34" charset="0"/>
+                            </a:rPr>
+                            <a:t>How tightly players match team talent targets</a:t>
+                          </a:r>
+                        </a:p>
+                      </a:txBody>
+                      <a:tcPr anchor="ctr"/>
+                    </a:tc>
+                    <a:extLst>
+                      <a:ext uri="{0D108BD9-81ED-4DB2-BD59-A6C34878D82A}">
+                        <a16:rowId xmlns:a16="http://schemas.microsoft.com/office/drawing/2014/main" val="10002"/>
+                      </a:ext>
+                    </a:extLst>
+                  </a:tr>
+                  <a:tr h="629412">
+                    <a:tc>
+                      <a:txBody>
+                        <a:bodyPr/>
+                        <a:lstStyle/>
+                        <a:p>
+                          <a:pPr algn="ctr"/>
+                          <a:r>
+                            <a:rPr sz="1200" b="0" i="0" dirty="0">
+                              <a:latin typeface="Avenir Next" panose="020B0503020202020204" pitchFamily="34" charset="0"/>
+                            </a:rPr>
+                            <a:t>L</a:t>
+                          </a:r>
+                          <a:r>
+                            <a:rPr sz="1100" b="0" i="0" baseline="-25000" dirty="0">
+                              <a:latin typeface="Avenir Next" panose="020B0503020202020204" pitchFamily="34" charset="0"/>
+                            </a:rPr>
+                            <a:t>C</a:t>
+                          </a:r>
+                        </a:p>
+                      </a:txBody>
+                      <a:tcPr anchor="ctr"/>
+                    </a:tc>
+                    <a:tc>
+                      <a:txBody>
+                        <a:bodyPr/>
+                        <a:lstStyle/>
+                        <a:p>
+                          <a:pPr>
+                            <a:defRPr sz="900">
+                              <a:latin typeface="Calibri"/>
+                            </a:defRPr>
+                          </a:pPr>
+                          <a:r>
+                            <a:rPr sz="1200" b="0" i="0">
+                              <a:latin typeface="Avenir Next" panose="020B0503020202020204" pitchFamily="34" charset="0"/>
+                            </a:rPr>
+                            <a:t>Congestion measure</a:t>
+                          </a:r>
+                        </a:p>
+                      </a:txBody>
+                      <a:tcPr anchor="ctr"/>
+                    </a:tc>
+                    <a:tc>
+                      <a:txBody>
+                        <a:bodyPr/>
+                        <a:lstStyle/>
+                        <a:p>
+                          <a:endParaRPr lang="en-US"/>
+                        </a:p>
+                      </a:txBody>
+                      <a:tcPr anchor="ctr">
+                        <a:blipFill>
+                          <a:blip r:embed="rId2"/>
+                          <a:stretch>
+                            <a:fillRect l="-72556" t="-346000" r="-752" b="-334000"/>
+                          </a:stretch>
+                        </a:blipFill>
+                      </a:tcPr>
+                    </a:tc>
+                    <a:extLst>
+                      <a:ext uri="{0D108BD9-81ED-4DB2-BD59-A6C34878D82A}">
+                        <a16:rowId xmlns:a16="http://schemas.microsoft.com/office/drawing/2014/main" val="10003"/>
+                      </a:ext>
+                    </a:extLst>
+                  </a:tr>
+                  <a:tr h="526403">
+                    <a:tc>
+                      <a:txBody>
+                        <a:bodyPr/>
+                        <a:lstStyle/>
+                        <a:p>
+                          <a:pPr algn="ctr"/>
+                          <a:r>
+                            <a:rPr sz="1200" b="0" i="0" dirty="0">
+                              <a:latin typeface="Avenir Next" panose="020B0503020202020204" pitchFamily="34" charset="0"/>
+                            </a:rPr>
+                            <a:t>λ</a:t>
+                          </a:r>
+                        </a:p>
+                      </a:txBody>
+                      <a:tcPr anchor="ctr"/>
+                    </a:tc>
+                    <a:tc>
+                      <a:txBody>
+                        <a:bodyPr/>
+                        <a:lstStyle/>
+                        <a:p>
+                          <a:pPr>
+                            <a:defRPr sz="900">
+                              <a:latin typeface="Calibri"/>
+                            </a:defRPr>
+                          </a:pPr>
+                          <a:r>
+                            <a:rPr sz="1200" b="0" i="0">
+                              <a:latin typeface="Avenir Next" panose="020B0503020202020204" pitchFamily="34" charset="0"/>
+                            </a:rPr>
+                            <a:t>Congestion weight in score</a:t>
+                          </a:r>
+                        </a:p>
+                      </a:txBody>
+                      <a:tcPr anchor="ctr"/>
+                    </a:tc>
+                    <a:tc>
+                      <a:txBody>
+                        <a:bodyPr/>
+                        <a:lstStyle/>
+                        <a:p>
+                          <a:r>
+                            <a:rPr sz="1100" b="0" i="0" dirty="0">
+                              <a:latin typeface="Avenir Next" panose="020B0503020202020204" pitchFamily="34" charset="0"/>
+                            </a:rPr>
+                            <a:t>How hard L</a:t>
+                          </a:r>
+                          <a:r>
+                            <a:rPr sz="1100" b="0" i="0" baseline="-25000" dirty="0">
+                              <a:latin typeface="Avenir Next" panose="020B0503020202020204" pitchFamily="34" charset="0"/>
+                            </a:rPr>
+                            <a:t>C</a:t>
+                          </a:r>
+                          <a:r>
+                            <a:rPr sz="1100" b="0" i="0" dirty="0">
+                              <a:latin typeface="Avenir Next" panose="020B0503020202020204" pitchFamily="34" charset="0"/>
+                            </a:rPr>
+                            <a:t> penalizes ranking — not congestion itself</a:t>
+                          </a:r>
+                        </a:p>
+                      </a:txBody>
+                      <a:tcPr anchor="ctr"/>
+                    </a:tc>
+                    <a:extLst>
+                      <a:ext uri="{0D108BD9-81ED-4DB2-BD59-A6C34878D82A}">
+                        <a16:rowId xmlns:a16="http://schemas.microsoft.com/office/drawing/2014/main" val="10004"/>
+                      </a:ext>
+                    </a:extLst>
+                  </a:tr>
+                  <a:tr h="526403">
+                    <a:tc>
+                      <a:txBody>
+                        <a:bodyPr/>
+                        <a:lstStyle/>
+                        <a:p>
+                          <a:endParaRPr lang="en-US"/>
+                        </a:p>
+                      </a:txBody>
+                      <a:tcPr anchor="ctr">
+                        <a:blipFill>
+                          <a:blip r:embed="rId2"/>
+                          <a:stretch>
+                            <a:fillRect l="-1563" t="-628571" r="-618750" b="-200000"/>
+                          </a:stretch>
+                        </a:blipFill>
+                      </a:tcPr>
+                    </a:tc>
+                    <a:tc>
+                      <a:txBody>
+                        <a:bodyPr/>
+                        <a:lstStyle/>
+                        <a:p>
+                          <a:pPr>
+                            <a:defRPr sz="900">
+                              <a:latin typeface="Calibri"/>
+                            </a:defRPr>
+                          </a:pPr>
+                          <a:r>
+                            <a:rPr sz="1200" b="0" i="0">
+                              <a:latin typeface="Avenir Next" panose="020B0503020202020204" pitchFamily="34" charset="0"/>
+                            </a:rPr>
+                            <a:t>Viability cutline</a:t>
+                          </a:r>
+                        </a:p>
+                      </a:txBody>
+                      <a:tcPr anchor="ctr"/>
+                    </a:tc>
+                    <a:tc>
+                      <a:txBody>
+                        <a:bodyPr/>
+                        <a:lstStyle/>
+                        <a:p>
+                          <a:pPr>
+                            <a:defRPr sz="800">
+                              <a:latin typeface="Calibri"/>
+                            </a:defRPr>
+                          </a:pPr>
+                          <a:r>
+                            <a:rPr sz="1100" b="0" i="0">
+                              <a:latin typeface="Avenir Next" panose="020B0503020202020204" pitchFamily="34" charset="0"/>
+                            </a:rPr>
+                            <a:t>Center of the sigmoid</a:t>
+                          </a:r>
+                        </a:p>
+                      </a:txBody>
+                      <a:tcPr anchor="ctr"/>
+                    </a:tc>
+                    <a:extLst>
+                      <a:ext uri="{0D108BD9-81ED-4DB2-BD59-A6C34878D82A}">
+                        <a16:rowId xmlns:a16="http://schemas.microsoft.com/office/drawing/2014/main" val="10005"/>
+                      </a:ext>
+                    </a:extLst>
+                  </a:tr>
+                  <a:tr h="526403">
+                    <a:tc>
+                      <a:txBody>
+                        <a:bodyPr/>
+                        <a:lstStyle/>
+                        <a:p>
+                          <a:endParaRPr lang="en-US"/>
+                        </a:p>
+                      </a:txBody>
+                      <a:tcPr anchor="ctr">
+                        <a:blipFill>
+                          <a:blip r:embed="rId2"/>
+                          <a:stretch>
+                            <a:fillRect l="-1563" t="-746341" r="-618750" b="-104878"/>
+                          </a:stretch>
+                        </a:blipFill>
+                      </a:tcPr>
+                    </a:tc>
+                    <a:tc>
+                      <a:txBody>
+                        <a:bodyPr/>
+                        <a:lstStyle/>
+                        <a:p>
+                          <a:pPr>
+                            <a:defRPr sz="900">
+                              <a:latin typeface="Calibri"/>
+                            </a:defRPr>
+                          </a:pPr>
+                          <a:r>
+                            <a:rPr sz="1200" b="0" i="0">
+                              <a:latin typeface="Avenir Next" panose="020B0503020202020204" pitchFamily="34" charset="0"/>
+                            </a:rPr>
+                            <a:t>Sigmoid sharpness</a:t>
+                          </a:r>
+                        </a:p>
+                      </a:txBody>
+                      <a:tcPr anchor="ctr"/>
+                    </a:tc>
+                    <a:tc>
+                      <a:txBody>
+                        <a:bodyPr/>
+                        <a:lstStyle/>
+                        <a:p>
+                          <a:endParaRPr lang="en-US"/>
+                        </a:p>
+                      </a:txBody>
+                      <a:tcPr anchor="ctr">
+                        <a:blipFill>
+                          <a:blip r:embed="rId2"/>
+                          <a:stretch>
+                            <a:fillRect l="-72556" t="-746341" r="-752" b="-104878"/>
+                          </a:stretch>
+                        </a:blipFill>
+                      </a:tcPr>
+                    </a:tc>
+                    <a:extLst>
+                      <a:ext uri="{0D108BD9-81ED-4DB2-BD59-A6C34878D82A}">
+                        <a16:rowId xmlns:a16="http://schemas.microsoft.com/office/drawing/2014/main" val="10006"/>
+                      </a:ext>
+                    </a:extLst>
+                  </a:tr>
+                  <a:tr h="526403">
+                    <a:tc>
+                      <a:txBody>
+                        <a:bodyPr/>
+                        <a:lstStyle/>
+                        <a:p>
+                          <a:endParaRPr lang="en-US"/>
+                        </a:p>
+                      </a:txBody>
+                      <a:tcPr anchor="ctr">
+                        <a:blipFill>
+                          <a:blip r:embed="rId2"/>
+                          <a:stretch>
+                            <a:fillRect l="-1563" t="-826190" r="-618750" b="-2381"/>
+                          </a:stretch>
+                        </a:blipFill>
+                      </a:tcPr>
+                    </a:tc>
+                    <a:tc>
+                      <a:txBody>
+                        <a:bodyPr/>
+                        <a:lstStyle/>
+                        <a:p>
+                          <a:pPr>
+                            <a:defRPr sz="900">
+                              <a:latin typeface="Calibri"/>
+                            </a:defRPr>
+                          </a:pPr>
+                          <a:r>
+                            <a:rPr sz="1200" b="0" i="0">
+                              <a:latin typeface="Avenir Next" panose="020B0503020202020204" pitchFamily="34" charset="0"/>
+                            </a:rPr>
+                            <a:t>Selectivity</a:t>
+                          </a:r>
+                        </a:p>
+                      </a:txBody>
+                      <a:tcPr anchor="ctr"/>
+                    </a:tc>
+                    <a:tc>
+                      <a:txBody>
+                        <a:bodyPr/>
+                        <a:lstStyle/>
+                        <a:p>
+                          <a:endParaRPr lang="en-US"/>
+                        </a:p>
+                      </a:txBody>
+                      <a:tcPr anchor="ctr">
+                        <a:blipFill>
+                          <a:blip r:embed="rId2"/>
+                          <a:stretch>
+                            <a:fillRect l="-72556" t="-826190" r="-752" b="-2381"/>
+                          </a:stretch>
+                        </a:blipFill>
+                      </a:tcPr>
+                    </a:tc>
+                    <a:extLst>
+                      <a:ext uri="{0D108BD9-81ED-4DB2-BD59-A6C34878D82A}">
+                        <a16:rowId xmlns:a16="http://schemas.microsoft.com/office/drawing/2014/main" val="10007"/>
+                      </a:ext>
+                    </a:extLst>
+                  </a:tr>
+                </a:tbl>
+              </a:graphicData>
+            </a:graphic>
+          </p:graphicFrame>
+        </mc:Fallback>
+      </mc:AlternateContent>
+      <mc:AlternateContent xmlns:mc="http://schemas.openxmlformats.org/markup-compatibility/2006">
+        <mc:Choice xmlns:a14="http://schemas.microsoft.com/office/drawing/2010/main" Requires="a14">
+          <p:sp>
+            <p:nvSpPr>
+              <p:cNvPr id="5" name="TextBox 4"/>
+              <p:cNvSpPr txBox="1"/>
+              <p:nvPr/>
+            </p:nvSpPr>
+            <p:spPr>
+              <a:xfrm>
+                <a:off x="6446520" y="749808"/>
+                <a:ext cx="5361127" cy="2267800"/>
+              </a:xfrm>
+              <a:prstGeom prst="rect">
+                <a:avLst/>
+              </a:prstGeom>
+              <a:noFill/>
+            </p:spPr>
+            <p:txBody>
+              <a:bodyPr wrap="square">
+                <a:spAutoFit/>
+              </a:bodyPr>
+              <a:lstStyle/>
+              <a:p>
+                <a:pPr>
+                  <a:lnSpc>
+                    <a:spcPct val="150000"/>
+                  </a:lnSpc>
+                  <a:spcBef>
+                    <a:spcPts val="0"/>
+                  </a:spcBef>
+                  <a:spcAft>
+                    <a:spcPts val="0"/>
+                  </a:spcAft>
+                  <a:defRPr b="1"/>
+                </a:pPr>
+                <a:r>
+                  <a:rPr lang="en-US" sz="1050" dirty="0"/>
+                  <a:t>Not curve fitting: which rules </a:t>
+                </a:r>
+                <a:r>
+                  <a:rPr lang="en-US" sz="1050" i="1" dirty="0">
+                    <a:solidFill>
+                      <a:srgbClr val="FF0000"/>
+                    </a:solidFill>
+                  </a:rPr>
+                  <a:t>bend</a:t>
+                </a:r>
+                <a:r>
+                  <a:rPr lang="en-US" sz="1050" dirty="0"/>
+                  <a:t> synthetic selection curves — not NCAA fit yet.</a:t>
+                </a:r>
+              </a:p>
+              <a:p>
+                <a:pPr marL="171450" indent="-171450">
+                  <a:lnSpc>
+                    <a:spcPct val="150000"/>
+                  </a:lnSpc>
+                  <a:spcBef>
+                    <a:spcPts val="0"/>
+                  </a:spcBef>
+                  <a:spcAft>
+                    <a:spcPts val="0"/>
+                  </a:spcAft>
+                  <a:buFont typeface="Arial" panose="020B0604020202020204" pitchFamily="34" charset="0"/>
+                  <a:buChar char="•"/>
+                </a:pPr>
+                <a:r>
+                  <a:rPr lang="en-US" sz="1050" dirty="0"/>
+                  <a:t>Three steps: ASSIGN </a:t>
+                </a:r>
+                <a14:m>
+                  <m:oMath xmlns:m="http://schemas.openxmlformats.org/officeDocument/2006/math">
+                    <m:d>
+                      <m:dPr>
+                        <m:ctrlPr>
+                          <a:rPr lang="ar-AE" sz="1050" i="1" dirty="0" smtClean="0">
+                            <a:latin typeface="Cambria Math" panose="02040503050406030204" pitchFamily="18" charset="0"/>
+                          </a:rPr>
+                        </m:ctrlPr>
+                      </m:dPr>
+                      <m:e>
+                        <m:r>
+                          <a:rPr lang="ar-AE" sz="1050" i="1" dirty="0" smtClean="0">
+                            <a:latin typeface="Cambria Math" panose="02040503050406030204" pitchFamily="18" charset="0"/>
+                          </a:rPr>
+                          <m:t>𝜌</m:t>
+                        </m:r>
+                      </m:e>
+                    </m:d>
+                    <m:r>
+                      <a:rPr lang="ar-AE" sz="1050" i="1" dirty="0" smtClean="0">
+                        <a:latin typeface="Cambria Math" panose="02040503050406030204" pitchFamily="18" charset="0"/>
+                      </a:rPr>
+                      <m:t>→</m:t>
+                    </m:r>
+                    <m:r>
+                      <a:rPr lang="ar-AE" sz="1050" i="1" dirty="0" smtClean="0">
+                        <a:latin typeface="Cambria Math" panose="02040503050406030204" pitchFamily="18" charset="0"/>
+                      </a:rPr>
+                      <m:t>𝑆𝐶𝑂𝑅𝐸</m:t>
+                    </m:r>
+                    <m:r>
+                      <a:rPr lang="ar-AE" sz="1050" i="1" dirty="0" smtClean="0">
+                        <a:latin typeface="Cambria Math" panose="02040503050406030204" pitchFamily="18" charset="0"/>
+                      </a:rPr>
+                      <m:t> </m:t>
+                    </m:r>
+                    <m:d>
+                      <m:dPr>
+                        <m:ctrlPr>
+                          <a:rPr lang="ar-AE" sz="1050" i="1" dirty="0" smtClean="0">
+                            <a:latin typeface="Cambria Math" panose="02040503050406030204" pitchFamily="18" charset="0"/>
+                          </a:rPr>
+                        </m:ctrlPr>
+                      </m:dPr>
+                      <m:e>
+                        <m:r>
+                          <a:rPr lang="ar-AE" sz="1050" i="1" dirty="0" smtClean="0">
+                            <a:latin typeface="Cambria Math" panose="02040503050406030204" pitchFamily="18" charset="0"/>
+                          </a:rPr>
+                          <m:t>𝑆</m:t>
+                        </m:r>
+                        <m:r>
+                          <a:rPr lang="ar-AE" sz="1000" i="1" baseline="-25000" dirty="0">
+                            <a:latin typeface="Cambria Math" panose="02040503050406030204" pitchFamily="18" charset="0"/>
+                          </a:rPr>
+                          <m:t>𝑖</m:t>
+                        </m:r>
+                        <m:r>
+                          <a:rPr lang="ar-AE" sz="1050" i="1" dirty="0">
+                            <a:latin typeface="Cambria Math" panose="02040503050406030204" pitchFamily="18" charset="0"/>
+                          </a:rPr>
+                          <m:t> = </m:t>
+                        </m:r>
+                        <m:r>
+                          <a:rPr lang="ar-AE" sz="1050" i="1" dirty="0">
+                            <a:latin typeface="Cambria Math" panose="02040503050406030204" pitchFamily="18" charset="0"/>
+                          </a:rPr>
+                          <m:t>𝐴</m:t>
+                        </m:r>
+                        <m:r>
+                          <a:rPr lang="ar-AE" sz="1000" i="1" baseline="-25000" dirty="0">
+                            <a:latin typeface="Cambria Math" panose="02040503050406030204" pitchFamily="18" charset="0"/>
+                          </a:rPr>
+                          <m:t>𝑖</m:t>
+                        </m:r>
+                        <m:r>
+                          <a:rPr lang="ar-AE" sz="1050" i="1" dirty="0">
+                            <a:latin typeface="Cambria Math" panose="02040503050406030204" pitchFamily="18" charset="0"/>
+                          </a:rPr>
+                          <m:t> − </m:t>
+                        </m:r>
+                        <m:r>
+                          <a:rPr lang="ar-AE" sz="1050" i="1" dirty="0">
+                            <a:latin typeface="Cambria Math" panose="02040503050406030204" pitchFamily="18" charset="0"/>
+                          </a:rPr>
+                          <m:t>𝜆</m:t>
+                        </m:r>
+                        <m:r>
+                          <a:rPr lang="ar-AE" sz="1050" i="1" dirty="0">
+                            <a:latin typeface="Cambria Math" panose="02040503050406030204" pitchFamily="18" charset="0"/>
+                          </a:rPr>
+                          <m:t> </m:t>
+                        </m:r>
+                        <m:r>
+                          <a:rPr lang="ar-AE" sz="1050" i="1" dirty="0">
+                            <a:latin typeface="Cambria Math" panose="02040503050406030204" pitchFamily="18" charset="0"/>
+                          </a:rPr>
+                          <m:t>𝐿</m:t>
+                        </m:r>
+                        <m:r>
+                          <a:rPr lang="ar-AE" sz="1000" i="1" baseline="-25000" dirty="0">
+                            <a:latin typeface="Cambria Math" panose="02040503050406030204" pitchFamily="18" charset="0"/>
+                          </a:rPr>
+                          <m:t>𝐶</m:t>
+                        </m:r>
+                      </m:e>
+                    </m:d>
+                    <m:r>
+                      <a:rPr lang="ar-AE" sz="1050" i="1" dirty="0">
+                        <a:latin typeface="Cambria Math" panose="02040503050406030204" pitchFamily="18" charset="0"/>
+                      </a:rPr>
+                      <m:t>→</m:t>
+                    </m:r>
+                    <m:r>
+                      <a:rPr lang="ar-AE" sz="1050" i="1" dirty="0">
+                        <a:latin typeface="Cambria Math" panose="02040503050406030204" pitchFamily="18" charset="0"/>
+                      </a:rPr>
+                      <m:t>𝑆𝐸𝐿𝐸𝐶𝑇</m:t>
+                    </m:r>
+                    <m:r>
+                      <a:rPr lang="ar-AE" sz="1050" i="1" dirty="0">
+                        <a:latin typeface="Cambria Math" panose="02040503050406030204" pitchFamily="18" charset="0"/>
+                      </a:rPr>
+                      <m:t> </m:t>
+                    </m:r>
+                    <m:d>
+                      <m:dPr>
+                        <m:ctrlPr>
+                          <a:rPr lang="ar-AE" sz="1050" i="1" dirty="0">
+                            <a:latin typeface="Cambria Math" panose="02040503050406030204" pitchFamily="18" charset="0"/>
+                          </a:rPr>
+                        </m:ctrlPr>
+                      </m:dPr>
+                      <m:e>
+                        <m:r>
+                          <a:rPr lang="ar-AE" sz="1050" i="1" dirty="0">
+                            <a:latin typeface="Cambria Math" panose="02040503050406030204" pitchFamily="18" charset="0"/>
+                          </a:rPr>
+                          <m:t>𝑡𝑜𝑝</m:t>
+                        </m:r>
+                        <m:r>
+                          <a:rPr lang="ar-AE" sz="1050" i="1" dirty="0">
+                            <a:latin typeface="Cambria Math" panose="02040503050406030204" pitchFamily="18" charset="0"/>
+                          </a:rPr>
+                          <m:t>−</m:t>
+                        </m:r>
+                        <m:r>
+                          <a:rPr lang="ar-AE" sz="1050" i="1" dirty="0">
+                            <a:latin typeface="Cambria Math" panose="02040503050406030204" pitchFamily="18" charset="0"/>
+                          </a:rPr>
+                          <m:t>𝐾</m:t>
+                        </m:r>
+                      </m:e>
+                    </m:d>
+                  </m:oMath>
+                </a14:m>
+                <a:endParaRPr lang="ar-AE" sz="1050" dirty="0"/>
+              </a:p>
+              <a:p>
+                <a:pPr marL="171450" indent="-171450">
+                  <a:lnSpc>
+                    <a:spcPct val="150000"/>
+                  </a:lnSpc>
+                  <a:spcBef>
+                    <a:spcPts val="0"/>
+                  </a:spcBef>
+                  <a:spcAft>
+                    <a:spcPts val="0"/>
+                  </a:spcAft>
+                  <a:buFont typeface="Arial" panose="020B0604020202020204" pitchFamily="34" charset="0"/>
+                  <a:buChar char="•"/>
+                </a:pPr>
+                <a:r>
+                  <a:rPr lang="en-US" sz="1050" dirty="0"/>
+                  <a:t>then VISUALIZE by pool-mean bin.</a:t>
+                </a:r>
+              </a:p>
+              <a:p>
+                <a:pPr marL="171450" indent="-171450">
+                  <a:lnSpc>
+                    <a:spcPct val="150000"/>
+                  </a:lnSpc>
+                  <a:buFont typeface="Arial" panose="020B0604020202020204" pitchFamily="34" charset="0"/>
+                  <a:buChar char="•"/>
+                </a:pPr>
+                <a14:m>
+                  <m:oMath xmlns:m="http://schemas.openxmlformats.org/officeDocument/2006/math">
+                    <m:r>
+                      <a:rPr lang="en-US" sz="1050" i="1" dirty="0" smtClean="0">
+                        <a:latin typeface="Cambria Math" panose="02040503050406030204" pitchFamily="18" charset="0"/>
+                      </a:rPr>
+                      <m:t>𝐿</m:t>
+                    </m:r>
+                    <m:r>
+                      <a:rPr lang="en-US" sz="1000" i="1" baseline="-25000" dirty="0">
+                        <a:latin typeface="Cambria Math" panose="02040503050406030204" pitchFamily="18" charset="0"/>
+                      </a:rPr>
+                      <m:t>𝐶</m:t>
+                    </m:r>
+                    <m:r>
+                      <a:rPr lang="en-US" sz="1050" i="1" dirty="0">
+                        <a:latin typeface="Cambria Math" panose="02040503050406030204" pitchFamily="18" charset="0"/>
+                      </a:rPr>
+                      <m:t> </m:t>
+                    </m:r>
+                  </m:oMath>
+                </a14:m>
+                <a:r>
+                  <a:rPr lang="en-US" sz="1050" dirty="0"/>
+                  <a:t>in this deck: </a:t>
+                </a:r>
+                <a:r>
+                  <a:rPr lang="en-US" sz="1000" dirty="0" err="1">
+                    <a:latin typeface="Consolas" panose="020B0609020204030204" pitchFamily="49" charset="0"/>
+                    <a:cs typeface="Consolas" panose="020B0609020204030204" pitchFamily="49" charset="0"/>
+                  </a:rPr>
+                  <a:t>crowding_smooth</a:t>
+                </a:r>
+                <a:r>
+                  <a:rPr lang="en-US" sz="1000" dirty="0"/>
+                  <a:t> </a:t>
+                </a:r>
+                <a:r>
+                  <a:rPr lang="en-US" sz="1050" dirty="0"/>
+                  <a:t>(mean </a:t>
+                </a:r>
+                <a:r>
+                  <a:rPr lang="el-GR" sz="1050" i="1" dirty="0">
+                    <a:latin typeface="Cambria Math"/>
+                  </a:rPr>
+                  <a:t>σ</a:t>
+                </a:r>
+                <a:r>
+                  <a:rPr lang="el-GR" sz="1050" dirty="0"/>
+                  <a:t>). </a:t>
+                </a:r>
+                <a:r>
+                  <a:rPr lang="en-US" sz="1050" dirty="0"/>
+                  <a:t>Code also builds hard </a:t>
+                </a:r>
+                <a:r>
+                  <a:rPr lang="en-US" sz="1050" i="1" dirty="0">
+                    <a:latin typeface="Cambria Math"/>
+                  </a:rPr>
+                  <a:t>L</a:t>
+                </a:r>
+                <a:r>
+                  <a:rPr lang="en-US" sz="1000" i="1" baseline="-25000" dirty="0">
+                    <a:latin typeface="Cambria Math"/>
+                  </a:rPr>
+                  <a:t>C</a:t>
+                </a:r>
+                <a:r>
+                  <a:rPr lang="en-US" sz="1050" dirty="0"/>
+                  <a:t> = LOO share with </a:t>
+                </a:r>
+                <a14:m>
+                  <m:oMath xmlns:m="http://schemas.openxmlformats.org/officeDocument/2006/math">
+                    <m:r>
+                      <a:rPr lang="en-US" sz="1050" i="1" dirty="0" smtClean="0">
+                        <a:latin typeface="Cambria Math" panose="02040503050406030204" pitchFamily="18" charset="0"/>
+                      </a:rPr>
+                      <m:t>𝐴</m:t>
+                    </m:r>
+                    <m:r>
+                      <a:rPr lang="en-US" sz="1000" i="1" baseline="-25000" dirty="0">
+                        <a:latin typeface="Cambria Math" panose="02040503050406030204" pitchFamily="18" charset="0"/>
+                      </a:rPr>
+                      <m:t>𝑗</m:t>
+                    </m:r>
+                    <m:r>
+                      <a:rPr lang="en-US" sz="1050" i="1" dirty="0">
+                        <a:latin typeface="Cambria Math" panose="02040503050406030204" pitchFamily="18" charset="0"/>
+                      </a:rPr>
+                      <m:t> &gt; </m:t>
+                    </m:r>
+                    <m:r>
+                      <a:rPr lang="en-US" sz="1050" i="1" dirty="0">
+                        <a:latin typeface="Cambria Math" panose="02040503050406030204" pitchFamily="18" charset="0"/>
+                      </a:rPr>
+                      <m:t>𝜃</m:t>
+                    </m:r>
+                  </m:oMath>
+                </a14:m>
+                <a:r>
+                  <a:rPr lang="en-US" sz="1050" dirty="0"/>
+                  <a:t>— not shown here.</a:t>
+                </a:r>
+              </a:p>
+              <a:p>
+                <a:pPr marL="171450" indent="-171450">
+                  <a:lnSpc>
+                    <a:spcPct val="150000"/>
+                  </a:lnSpc>
+                  <a:spcBef>
+                    <a:spcPts val="0"/>
+                  </a:spcBef>
+                  <a:spcAft>
+                    <a:spcPts val="0"/>
+                  </a:spcAft>
+                  <a:buFont typeface="Arial" panose="020B0604020202020204" pitchFamily="34" charset="0"/>
+                  <a:buChar char="•"/>
+                </a:pPr>
+                <a:r>
+                  <a:rPr lang="en-US" sz="1050" dirty="0"/>
+                  <a:t>One-at-a-time (OAT): each slide moves one knob; other settings stay at benchmark values.</a:t>
+                </a:r>
+              </a:p>
+              <a:p>
+                <a:pPr marL="171450" indent="-171450">
+                  <a:lnSpc>
+                    <a:spcPct val="150000"/>
+                  </a:lnSpc>
+                  <a:spcBef>
+                    <a:spcPts val="0"/>
+                  </a:spcBef>
+                  <a:spcAft>
+                    <a:spcPts val="0"/>
+                  </a:spcAft>
+                  <a:buFont typeface="Arial" panose="020B0604020202020204" pitchFamily="34" charset="0"/>
+                  <a:buChar char="•"/>
+                </a:pPr>
+                <a:r>
+                  <a:rPr lang="en-US" sz="1050" dirty="0"/>
+                  <a:t>Seed 42 on stochastic steps: draw </a:t>
+                </a:r>
+                <a14:m>
+                  <m:oMath xmlns:m="http://schemas.openxmlformats.org/officeDocument/2006/math">
+                    <m:r>
+                      <a:rPr lang="en-US" sz="1050" i="1" dirty="0" smtClean="0">
+                        <a:latin typeface="Cambria Math" panose="02040503050406030204" pitchFamily="18" charset="0"/>
+                      </a:rPr>
+                      <m:t>𝐴</m:t>
+                    </m:r>
+                    <m:r>
+                      <a:rPr lang="en-US" sz="1000" i="1" baseline="-25000" dirty="0">
+                        <a:latin typeface="Cambria Math" panose="02040503050406030204" pitchFamily="18" charset="0"/>
+                      </a:rPr>
+                      <m:t>𝑖</m:t>
+                    </m:r>
+                    <m:r>
+                      <a:rPr lang="en-US" sz="1050" i="1" dirty="0">
+                        <a:latin typeface="Cambria Math" panose="02040503050406030204" pitchFamily="18" charset="0"/>
+                      </a:rPr>
+                      <m:t>, </m:t>
+                    </m:r>
+                    <m:sSub>
+                      <m:sSubPr>
+                        <m:ctrlPr>
+                          <a:rPr lang="en-US" sz="1050" b="0" i="1" dirty="0" smtClean="0">
+                            <a:latin typeface="Cambria Math" panose="02040503050406030204" pitchFamily="18" charset="0"/>
+                          </a:rPr>
+                        </m:ctrlPr>
+                      </m:sSubPr>
+                      <m:e>
+                        <m:r>
+                          <a:rPr lang="en-US" sz="1050" b="0" i="1" dirty="0" smtClean="0">
+                            <a:latin typeface="Cambria Math" panose="02040503050406030204" pitchFamily="18" charset="0"/>
+                          </a:rPr>
+                          <m:t>𝑇</m:t>
+                        </m:r>
+                      </m:e>
+                      <m:sub>
+                        <m:r>
+                          <a:rPr lang="en-US" sz="1050" b="0" i="1" dirty="0" smtClean="0">
+                            <a:latin typeface="Cambria Math" panose="02040503050406030204" pitchFamily="18" charset="0"/>
+                          </a:rPr>
+                          <m:t>𝑗</m:t>
+                        </m:r>
+                      </m:sub>
+                    </m:sSub>
+                    <m:r>
+                      <a:rPr lang="en-US" sz="1050" i="1" dirty="0">
+                        <a:latin typeface="Cambria Math" panose="02040503050406030204" pitchFamily="18" charset="0"/>
+                      </a:rPr>
+                      <m:t>; </m:t>
+                    </m:r>
+                  </m:oMath>
+                </a14:m>
+                <a:r>
+                  <a:rPr lang="en-US" sz="1050" dirty="0"/>
+                  <a:t>soft-</a:t>
+                </a:r>
+                <a14:m>
+                  <m:oMath xmlns:m="http://schemas.openxmlformats.org/officeDocument/2006/math">
+                    <m:r>
+                      <a:rPr lang="en-US" sz="1050" i="1" dirty="0" smtClean="0">
+                        <a:latin typeface="Cambria Math" panose="02040503050406030204" pitchFamily="18" charset="0"/>
+                      </a:rPr>
+                      <m:t>𝜌</m:t>
+                    </m:r>
+                  </m:oMath>
+                </a14:m>
+                <a:r>
+                  <a:rPr lang="en-US" sz="1050" dirty="0"/>
+                  <a:t> assignment. </a:t>
+                </a:r>
+              </a:p>
+              <a:p>
+                <a:pPr marL="171450" indent="-171450">
+                  <a:lnSpc>
+                    <a:spcPct val="150000"/>
+                  </a:lnSpc>
+                  <a:spcBef>
+                    <a:spcPts val="0"/>
+                  </a:spcBef>
+                  <a:spcAft>
+                    <a:spcPts val="0"/>
+                  </a:spcAft>
+                  <a:buFont typeface="Arial" panose="020B0604020202020204" pitchFamily="34" charset="0"/>
+                  <a:buChar char="•"/>
+                </a:pPr>
+                <a:r>
+                  <a:rPr lang="en-US" sz="1050" dirty="0"/>
+                  <a:t>Score, top-</a:t>
+                </a:r>
+                <a14:m>
+                  <m:oMath xmlns:m="http://schemas.openxmlformats.org/officeDocument/2006/math">
+                    <m:r>
+                      <a:rPr lang="en-US" sz="1050" i="1" dirty="0" smtClean="0">
+                        <a:latin typeface="Cambria Math" panose="02040503050406030204" pitchFamily="18" charset="0"/>
+                      </a:rPr>
+                      <m:t>𝐾</m:t>
+                    </m:r>
+                  </m:oMath>
+                </a14:m>
+                <a:r>
+                  <a:rPr lang="en-US" sz="1050" dirty="0"/>
+                  <a:t>, bins are deterministic.</a:t>
+                </a:r>
+              </a:p>
+              <a:p>
+                <a:pPr marL="171450" indent="-171450">
+                  <a:lnSpc>
+                    <a:spcPct val="150000"/>
+                  </a:lnSpc>
+                  <a:spcBef>
+                    <a:spcPts val="0"/>
+                  </a:spcBef>
+                  <a:spcAft>
+                    <a:spcPts val="0"/>
+                  </a:spcAft>
+                  <a:buFont typeface="Arial" panose="020B0604020202020204" pitchFamily="34" charset="0"/>
+                  <a:buChar char="•"/>
+                </a:pPr>
+                <a:r>
+                  <a:rPr lang="en-US" sz="1050" dirty="0"/>
+                  <a:t>League:</a:t>
+                </a:r>
+                <a14:m>
+                  <m:oMath xmlns:m="http://schemas.openxmlformats.org/officeDocument/2006/math">
+                    <m:r>
+                      <a:rPr lang="en-US" sz="1050" i="1" dirty="0" smtClean="0">
+                        <a:latin typeface="Cambria Math" panose="02040503050406030204" pitchFamily="18" charset="0"/>
+                      </a:rPr>
+                      <m:t> </m:t>
+                    </m:r>
+                    <m:r>
+                      <a:rPr lang="en-US" sz="1050" i="1" dirty="0" smtClean="0">
+                        <a:latin typeface="Cambria Math" panose="02040503050406030204" pitchFamily="18" charset="0"/>
+                      </a:rPr>
+                      <m:t>𝑁</m:t>
+                    </m:r>
+                    <m:r>
+                      <a:rPr lang="en-US" sz="1050" i="1" dirty="0" smtClean="0">
+                        <a:latin typeface="Cambria Math" panose="02040503050406030204" pitchFamily="18" charset="0"/>
+                      </a:rPr>
+                      <m:t>=5600, </m:t>
+                    </m:r>
+                    <m:r>
+                      <a:rPr lang="en-US" sz="1050" i="1" dirty="0" smtClean="0">
+                        <a:latin typeface="Cambria Math" panose="02040503050406030204" pitchFamily="18" charset="0"/>
+                      </a:rPr>
+                      <m:t>𝐾</m:t>
+                    </m:r>
+                    <m:r>
+                      <a:rPr lang="en-US" sz="1050" i="1" dirty="0" smtClean="0">
+                        <a:latin typeface="Cambria Math" panose="02040503050406030204" pitchFamily="18" charset="0"/>
+                      </a:rPr>
+                      <m:t>=560, </m:t>
+                    </m:r>
+                    <m:r>
+                      <a:rPr lang="en-US" sz="1050" i="1" dirty="0" smtClean="0">
+                        <a:latin typeface="Cambria Math" panose="02040503050406030204" pitchFamily="18" charset="0"/>
+                      </a:rPr>
+                      <m:t>𝐾</m:t>
+                    </m:r>
+                    <m:r>
+                      <a:rPr lang="en-US" sz="1050" i="1" dirty="0" smtClean="0">
+                        <a:latin typeface="Cambria Math" panose="02040503050406030204" pitchFamily="18" charset="0"/>
+                      </a:rPr>
+                      <m:t>/</m:t>
+                    </m:r>
+                    <m:r>
+                      <a:rPr lang="en-US" sz="1050" i="1" dirty="0" smtClean="0">
+                        <a:latin typeface="Cambria Math" panose="02040503050406030204" pitchFamily="18" charset="0"/>
+                      </a:rPr>
+                      <m:t>𝑁</m:t>
+                    </m:r>
+                    <m:r>
+                      <a:rPr lang="en-US" sz="1050" i="1" dirty="0" smtClean="0">
+                        <a:latin typeface="Cambria Math" panose="02040503050406030204" pitchFamily="18" charset="0"/>
+                      </a:rPr>
+                      <m:t>=10% </m:t>
+                    </m:r>
+                  </m:oMath>
+                </a14:m>
+                <a:r>
+                  <a:rPr lang="en-US" sz="1050" dirty="0"/>
+                  <a:t>(539 preset).</a:t>
+                </a:r>
+                <a:endParaRPr sz="1050" dirty="0"/>
+              </a:p>
+            </p:txBody>
+          </p:sp>
+        </mc:Choice>
+        <mc:Fallback>
+          <p:sp>
+            <p:nvSpPr>
+              <p:cNvPr id="5" name="TextBox 4"/>
+              <p:cNvSpPr txBox="1">
+                <a:spLocks noRot="1" noChangeAspect="1" noMove="1" noResize="1" noEditPoints="1" noAdjustHandles="1" noChangeArrowheads="1" noChangeShapeType="1" noTextEdit="1"/>
+              </p:cNvSpPr>
+              <p:nvPr/>
+            </p:nvSpPr>
+            <p:spPr>
+              <a:xfrm>
+                <a:off x="6446520" y="749808"/>
+                <a:ext cx="5361127" cy="2267800"/>
+              </a:xfrm>
+              <a:prstGeom prst="rect">
+                <a:avLst/>
+              </a:prstGeom>
+              <a:blipFill>
+                <a:blip r:embed="rId3"/>
+                <a:stretch>
+                  <a:fillRect b="-1117"/>
+                </a:stretch>
+              </a:blipFill>
+            </p:spPr>
+            <p:txBody>
+              <a:bodyPr/>
+              <a:lstStyle/>
+              <a:p>
+                <a:r>
+                  <a:rPr lang="en-US">
+                    <a:noFill/>
+                  </a:rPr>
+                  <a:t> </a:t>
+                </a:r>
+              </a:p>
+            </p:txBody>
+          </p:sp>
+        </mc:Fallback>
+      </mc:AlternateContent>
+      <mc:AlternateContent xmlns:mc="http://schemas.openxmlformats.org/markup-compatibility/2006">
+        <mc:Choice xmlns:a14="http://schemas.microsoft.com/office/drawing/2010/main" Requires="a14">
+          <p:sp>
+            <p:nvSpPr>
+              <p:cNvPr id="6" name="TextBox 5"/>
+              <p:cNvSpPr txBox="1"/>
+              <p:nvPr/>
+            </p:nvSpPr>
+            <p:spPr>
+              <a:xfrm>
+                <a:off x="6446520" y="3138121"/>
+                <a:ext cx="5361127" cy="1278748"/>
+              </a:xfrm>
+              <a:prstGeom prst="rect">
+                <a:avLst/>
+              </a:prstGeom>
+              <a:noFill/>
+            </p:spPr>
+            <p:txBody>
+              <a:bodyPr wrap="square">
+                <a:spAutoFit/>
+              </a:bodyPr>
+              <a:lstStyle/>
+              <a:p>
+                <a:pPr marL="171450" indent="-171450">
+                  <a:lnSpc>
+                    <a:spcPct val="150000"/>
+                  </a:lnSpc>
+                  <a:buFont typeface="Arial" panose="020B0604020202020204" pitchFamily="34" charset="0"/>
+                  <a:buChar char="•"/>
+                  <a:defRPr b="1"/>
+                </a:pPr>
+                <a:r>
+                  <a:rPr lang="en-US" sz="1050" i="1" dirty="0">
+                    <a:latin typeface="Cambria Math" panose="02040503050406030204" pitchFamily="18" charset="0"/>
+                  </a:rPr>
+                  <a:t>A_</a:t>
+                </a:r>
+              </a:p>
+              <a:p>
+                <a:pPr marL="171450" indent="-171450">
+                  <a:lnSpc>
+                    <a:spcPct val="150000"/>
+                  </a:lnSpc>
+                  <a:buFont typeface="Arial" panose="020B0604020202020204" pitchFamily="34" charset="0"/>
+                  <a:buChar char="•"/>
+                  <a:defRPr b="1"/>
+                </a:pPr>
+                <a14:m>
+                  <m:oMath xmlns:m="http://schemas.openxmlformats.org/officeDocument/2006/math">
+                    <m:r>
+                      <a:rPr lang="el-GR" sz="1050" i="1" dirty="0" smtClean="0">
+                        <a:latin typeface="Cambria Math" panose="02040503050406030204" pitchFamily="18" charset="0"/>
+                      </a:rPr>
+                      <m:t>𝜆</m:t>
+                    </m:r>
+                    <m:r>
+                      <a:rPr lang="el-GR" sz="1050" i="1" dirty="0" smtClean="0">
+                        <a:latin typeface="Cambria Math" panose="02040503050406030204" pitchFamily="18" charset="0"/>
+                      </a:rPr>
+                      <m:t>=0.55 —</m:t>
+                    </m:r>
+                    <m:r>
+                      <a:rPr lang="en-US" sz="1050" b="1" i="1" dirty="0" smtClean="0">
+                        <a:latin typeface="Cambria Math" panose="02040503050406030204" pitchFamily="18" charset="0"/>
+                      </a:rPr>
+                      <m:t> </m:t>
+                    </m:r>
+                  </m:oMath>
+                </a14:m>
+                <a:r>
+                  <a:rPr lang="en-US" sz="1050" dirty="0"/>
+                  <a:t> </a:t>
+                </a:r>
+                <a:r>
+                  <a:rPr lang="en-US" sz="1050" dirty="0">
+                    <a:latin typeface="Consolas" panose="020B0609020204030204" pitchFamily="49" charset="0"/>
+                    <a:cs typeface="Consolas" panose="020B0609020204030204" pitchFamily="49" charset="0"/>
+                  </a:rPr>
+                  <a:t>tier1_539_reference_settings.json </a:t>
+                </a:r>
+                <a:r>
+                  <a:rPr lang="en-US" sz="1050" dirty="0"/>
+                  <a:t>/ playground default</a:t>
+                </a:r>
+              </a:p>
+              <a:p>
+                <a:pPr marL="171450" indent="-171450">
+                  <a:lnSpc>
+                    <a:spcPct val="150000"/>
+                  </a:lnSpc>
+                  <a:spcBef>
+                    <a:spcPts val="0"/>
+                  </a:spcBef>
+                  <a:spcAft>
+                    <a:spcPts val="0"/>
+                  </a:spcAft>
+                  <a:buFont typeface="Arial" panose="020B0604020202020204" pitchFamily="34" charset="0"/>
+                  <a:buChar char="•"/>
+                </a:pPr>
+                <a14:m>
+                  <m:oMath xmlns:m="http://schemas.openxmlformats.org/officeDocument/2006/math">
+                    <m:r>
+                      <a:rPr lang="en-US" sz="1050" i="1" dirty="0" smtClean="0">
+                        <a:latin typeface="Cambria Math" panose="02040503050406030204" pitchFamily="18" charset="0"/>
+                      </a:rPr>
+                      <m:t>𝜃</m:t>
+                    </m:r>
+                    <m:r>
+                      <a:rPr lang="en-US" sz="1050" i="1" dirty="0" smtClean="0">
+                        <a:latin typeface="Cambria Math" panose="02040503050406030204" pitchFamily="18" charset="0"/>
+                      </a:rPr>
+                      <m:t>=0.72, </m:t>
+                    </m:r>
+                    <m:r>
+                      <a:rPr lang="en-US" sz="1050" i="1" dirty="0" smtClean="0">
+                        <a:latin typeface="Cambria Math" panose="02040503050406030204" pitchFamily="18" charset="0"/>
+                      </a:rPr>
+                      <m:t>𝛾</m:t>
+                    </m:r>
+                    <m:r>
+                      <a:rPr lang="en-US" sz="1050" i="1" dirty="0" smtClean="0">
+                        <a:latin typeface="Cambria Math" panose="02040503050406030204" pitchFamily="18" charset="0"/>
+                      </a:rPr>
+                      <m:t>=10 </m:t>
+                    </m:r>
+                  </m:oMath>
+                </a14:m>
+                <a:r>
+                  <a:rPr lang="en-US" sz="1050" dirty="0"/>
+                  <a:t>— same 539 reference JSON</a:t>
+                </a:r>
+              </a:p>
+              <a:p>
+                <a:pPr marL="171450" indent="-171450">
+                  <a:lnSpc>
+                    <a:spcPct val="150000"/>
+                  </a:lnSpc>
+                  <a:spcBef>
+                    <a:spcPts val="0"/>
+                  </a:spcBef>
+                  <a:spcAft>
+                    <a:spcPts val="0"/>
+                  </a:spcAft>
+                  <a:buFont typeface="Arial" panose="020B0604020202020204" pitchFamily="34" charset="0"/>
+                  <a:buChar char="•"/>
+                </a:pPr>
+                <a14:m>
+                  <m:oMath xmlns:m="http://schemas.openxmlformats.org/officeDocument/2006/math">
+                    <m:r>
+                      <a:rPr lang="en-US" sz="1050" i="1" dirty="0" smtClean="0">
+                        <a:latin typeface="Cambria Math" panose="02040503050406030204" pitchFamily="18" charset="0"/>
+                      </a:rPr>
+                      <m:t>𝜌</m:t>
+                    </m:r>
+                    <m:r>
+                      <a:rPr lang="en-US" sz="1050" i="1" dirty="0" smtClean="0">
+                        <a:latin typeface="Cambria Math" panose="02040503050406030204" pitchFamily="18" charset="0"/>
+                      </a:rPr>
+                      <m:t>=8 </m:t>
+                    </m:r>
+                  </m:oMath>
+                </a14:m>
+                <a:r>
+                  <a:rPr lang="en-US" sz="1050" dirty="0"/>
+                  <a:t>— gallery fixed assign for </a:t>
+                </a:r>
+                <a14:m>
+                  <m:oMath xmlns:m="http://schemas.openxmlformats.org/officeDocument/2006/math">
+                    <m:r>
+                      <a:rPr lang="en-US" sz="1050" i="1" dirty="0" smtClean="0">
+                        <a:latin typeface="Cambria Math" panose="02040503050406030204" pitchFamily="18" charset="0"/>
+                      </a:rPr>
+                      <m:t>𝜆</m:t>
+                    </m:r>
+                    <m:r>
+                      <m:rPr>
+                        <m:nor/>
+                      </m:rPr>
+                      <a:rPr lang="en-US" sz="1050" b="0" i="0" dirty="0" smtClean="0">
+                        <a:latin typeface="Cambria Math" panose="02040503050406030204" pitchFamily="18" charset="0"/>
+                      </a:rPr>
+                      <m:t>/</m:t>
+                    </m:r>
+                    <m:r>
+                      <a:rPr lang="en-US" sz="1050" i="1" dirty="0" smtClean="0">
+                        <a:latin typeface="Cambria Math" panose="02040503050406030204" pitchFamily="18" charset="0"/>
+                      </a:rPr>
+                      <m:t>𝜃</m:t>
+                    </m:r>
+                  </m:oMath>
+                </a14:m>
+                <a:r>
+                  <a:rPr lang="en-US" sz="1050" dirty="0"/>
+                  <a:t> slides (moderate-high mixing; not a 539 JSON field)</a:t>
+                </a:r>
+              </a:p>
+              <a:p>
+                <a:pPr marL="171450" indent="-171450">
+                  <a:lnSpc>
+                    <a:spcPct val="150000"/>
+                  </a:lnSpc>
+                  <a:spcBef>
+                    <a:spcPts val="0"/>
+                  </a:spcBef>
+                  <a:spcAft>
+                    <a:spcPts val="0"/>
+                  </a:spcAft>
+                  <a:buFont typeface="Arial" panose="020B0604020202020204" pitchFamily="34" charset="0"/>
+                  <a:buChar char="•"/>
+                </a:pPr>
+                <a14:m>
+                  <m:oMath xmlns:m="http://schemas.openxmlformats.org/officeDocument/2006/math">
+                    <m:r>
+                      <a:rPr lang="en-US" sz="1050" i="1" dirty="0" smtClean="0">
+                        <a:latin typeface="Cambria Math" panose="02040503050406030204" pitchFamily="18" charset="0"/>
+                      </a:rPr>
+                      <m:t>𝐾</m:t>
+                    </m:r>
+                    <m:r>
+                      <a:rPr lang="en-US" sz="1050" i="1" dirty="0" smtClean="0">
+                        <a:latin typeface="Cambria Math" panose="02040503050406030204" pitchFamily="18" charset="0"/>
+                      </a:rPr>
+                      <m:t>/</m:t>
+                    </m:r>
+                    <m:r>
+                      <a:rPr lang="en-US" sz="1050" i="1" dirty="0" smtClean="0">
+                        <a:latin typeface="Cambria Math" panose="02040503050406030204" pitchFamily="18" charset="0"/>
+                      </a:rPr>
+                      <m:t>𝑁</m:t>
+                    </m:r>
+                    <m:r>
+                      <a:rPr lang="en-US" sz="1050" i="1" dirty="0" smtClean="0">
+                        <a:latin typeface="Cambria Math" panose="02040503050406030204" pitchFamily="18" charset="0"/>
+                      </a:rPr>
+                      <m:t>=10% </m:t>
+                    </m:r>
+                  </m:oMath>
+                </a14:m>
+                <a:r>
+                  <a:rPr lang="en-US" sz="1050" dirty="0"/>
+                  <a:t>— characterization default (MBB draft </a:t>
+                </a:r>
+                <a14:m>
+                  <m:oMath xmlns:m="http://schemas.openxmlformats.org/officeDocument/2006/math">
+                    <m:r>
+                      <a:rPr lang="en-US" sz="1050" i="1" dirty="0" smtClean="0">
+                        <a:latin typeface="Cambria Math" panose="02040503050406030204" pitchFamily="18" charset="0"/>
+                      </a:rPr>
+                      <m:t>≈</m:t>
+                    </m:r>
+                    <m:r>
+                      <a:rPr lang="en-US" sz="1050" i="1" dirty="0">
+                        <a:latin typeface="Cambria Math" panose="02040503050406030204" pitchFamily="18" charset="0"/>
+                      </a:rPr>
+                      <m:t>1% </m:t>
+                    </m:r>
+                  </m:oMath>
+                </a14:m>
+                <a:r>
+                  <a:rPr lang="en-US" sz="1050" dirty="0"/>
+                  <a:t>is a separate calibration point)</a:t>
+                </a:r>
+                <a:endParaRPr sz="1050" dirty="0"/>
+              </a:p>
+            </p:txBody>
+          </p:sp>
+        </mc:Choice>
+        <mc:Fallback>
+          <p:sp>
+            <p:nvSpPr>
+              <p:cNvPr id="6" name="TextBox 5"/>
+              <p:cNvSpPr txBox="1">
+                <a:spLocks noRot="1" noChangeAspect="1" noMove="1" noResize="1" noEditPoints="1" noAdjustHandles="1" noChangeArrowheads="1" noChangeShapeType="1" noTextEdit="1"/>
+              </p:cNvSpPr>
+              <p:nvPr/>
+            </p:nvSpPr>
+            <p:spPr>
+              <a:xfrm>
+                <a:off x="6446520" y="3138121"/>
+                <a:ext cx="5361127" cy="1278748"/>
+              </a:xfrm>
+              <a:prstGeom prst="rect">
+                <a:avLst/>
+              </a:prstGeom>
+              <a:blipFill>
+                <a:blip r:embed="rId4"/>
+                <a:stretch>
+                  <a:fillRect b="-2970"/>
+                </a:stretch>
+              </a:blipFill>
+            </p:spPr>
+            <p:txBody>
+              <a:bodyPr/>
+              <a:lstStyle/>
+              <a:p>
+                <a:r>
+                  <a:rPr lang="en-US">
+                    <a:noFill/>
+                  </a:rPr>
+                  <a:t> </a:t>
+                </a:r>
+              </a:p>
+            </p:txBody>
+          </p:sp>
+        </mc:Fallback>
+      </mc:AlternateContent>
+      <p:sp>
+        <p:nvSpPr>
+          <p:cNvPr id="7" name="TextBox 6"/>
+          <p:cNvSpPr txBox="1"/>
+          <p:nvPr/>
+        </p:nvSpPr>
+        <p:spPr>
+          <a:xfrm>
+            <a:off x="6446520" y="4779755"/>
+            <a:ext cx="5433092" cy="1198341"/>
+          </a:xfrm>
+          <a:prstGeom prst="rect">
+            <a:avLst/>
+          </a:prstGeom>
+          <a:noFill/>
+        </p:spPr>
+        <p:txBody>
+          <a:bodyPr wrap="square">
+            <a:spAutoFit/>
+          </a:bodyPr>
+          <a:lstStyle/>
+          <a:p>
+            <a:pPr>
+              <a:spcBef>
+                <a:spcPts val="0"/>
+              </a:spcBef>
+              <a:spcAft>
+                <a:spcPts val="0"/>
+              </a:spcAft>
+              <a:defRPr b="1"/>
+            </a:pPr>
+            <a:r>
+              <a:rPr sz="1050" dirty="0"/>
+              <a:t>Real hero: draft rate vs </a:t>
+            </a:r>
+            <a:r>
+              <a:rPr sz="1050" dirty="0">
+                <a:solidFill>
+                  <a:srgbClr val="002060"/>
+                </a:solidFill>
+              </a:rPr>
+              <a:t>poolq_loo</a:t>
+            </a:r>
+            <a:r>
+              <a:rPr sz="1050" dirty="0"/>
+              <a:t> (teammate quality, leave-one-out) — a </a:t>
+            </a:r>
+            <a:r>
+              <a:rPr sz="1050" dirty="0">
+                <a:solidFill>
+                  <a:srgbClr val="002060"/>
+                </a:solidFill>
+              </a:rPr>
+              <a:t>bend</a:t>
+            </a:r>
+            <a:r>
+              <a:rPr sz="1050" dirty="0"/>
+              <a:t> at the top bins.</a:t>
+            </a:r>
+          </a:p>
+          <a:p>
+            <a:pPr marL="171450" indent="-171450">
+              <a:lnSpc>
+                <a:spcPct val="150000"/>
+              </a:lnSpc>
+              <a:spcBef>
+                <a:spcPts val="0"/>
+              </a:spcBef>
+              <a:spcAft>
+                <a:spcPts val="0"/>
+              </a:spcAft>
+              <a:buFont typeface="Arial" panose="020B0604020202020204" pitchFamily="34" charset="0"/>
+              <a:buChar char="•"/>
+            </a:pPr>
+            <a:r>
+              <a:rPr sz="1050" dirty="0"/>
+              <a:t>This deck: fraction selected vs </a:t>
+            </a:r>
+            <a:r>
+              <a:rPr sz="1050" b="1" dirty="0"/>
+              <a:t>pool mean</a:t>
+            </a:r>
+            <a:r>
+              <a:rPr sz="1050" dirty="0"/>
+              <a:t> in a fake league — same </a:t>
+            </a:r>
+            <a:r>
+              <a:rPr sz="1050" i="1" dirty="0"/>
+              <a:t>kind</a:t>
+            </a:r>
+            <a:r>
+              <a:rPr sz="1050" dirty="0"/>
+              <a:t> of question, different axis and league.</a:t>
+            </a:r>
+          </a:p>
+          <a:p>
+            <a:pPr marL="171450" indent="-171450">
+              <a:lnSpc>
+                <a:spcPct val="150000"/>
+              </a:lnSpc>
+              <a:spcBef>
+                <a:spcPts val="0"/>
+              </a:spcBef>
+              <a:spcAft>
+                <a:spcPts val="0"/>
+              </a:spcAft>
+              <a:buFont typeface="Arial" panose="020B0604020202020204" pitchFamily="34" charset="0"/>
+              <a:buChar char="•"/>
+            </a:pPr>
+            <a:r>
+              <a:rPr sz="1050" dirty="0"/>
+              <a:t>Benchmarks anchor to the Alex 539 playground track so sim slides stay comparable</a:t>
+            </a:r>
+            <a:endParaRPr lang="en-US" sz="1050" dirty="0"/>
+          </a:p>
+          <a:p>
+            <a:pPr marL="171450" indent="-171450">
+              <a:lnSpc>
+                <a:spcPct val="150000"/>
+              </a:lnSpc>
+              <a:spcBef>
+                <a:spcPts val="0"/>
+              </a:spcBef>
+              <a:spcAft>
+                <a:spcPts val="0"/>
+              </a:spcAft>
+              <a:buFont typeface="Arial" panose="020B0604020202020204" pitchFamily="34" charset="0"/>
+              <a:buChar char="•"/>
+            </a:pPr>
+            <a:r>
+              <a:rPr lang="en-US" sz="1050" dirty="0"/>
+              <a:t>W</a:t>
+            </a:r>
+            <a:r>
+              <a:rPr sz="1050" dirty="0"/>
+              <a:t>e have </a:t>
+            </a:r>
+            <a:r>
+              <a:rPr sz="1050" b="1" dirty="0"/>
+              <a:t>not</a:t>
+            </a:r>
+            <a:r>
+              <a:rPr sz="1050" dirty="0"/>
+              <a:t> re-fit those numbers to NCAA data in Phase B.</a:t>
+            </a:r>
+          </a:p>
+        </p:txBody>
+      </p:sp>
+      <p:sp>
+        <p:nvSpPr>
+          <p:cNvPr id="8" name="TextBox 7"/>
+          <p:cNvSpPr txBox="1"/>
+          <p:nvPr/>
+        </p:nvSpPr>
+        <p:spPr>
+          <a:xfrm>
+            <a:off x="384049" y="6126480"/>
+            <a:ext cx="7349162" cy="430887"/>
+          </a:xfrm>
+          <a:prstGeom prst="rect">
+            <a:avLst/>
+          </a:prstGeom>
+          <a:noFill/>
+        </p:spPr>
+        <p:txBody>
+          <a:bodyPr wrap="square">
+            <a:spAutoFit/>
+          </a:bodyPr>
+          <a:lstStyle/>
+          <a:p>
+            <a:pPr>
+              <a:defRPr b="1"/>
+            </a:pPr>
+            <a:r>
+              <a:rPr sz="1100" dirty="0"/>
+              <a:t>Claim: Phase B maps which generative knobs move</a:t>
+            </a:r>
+            <a:r>
+              <a:rPr lang="en-US" sz="1100" dirty="0"/>
+              <a:t> </a:t>
+            </a:r>
+            <a:r>
+              <a:rPr sz="1100" i="1" dirty="0">
+                <a:solidFill>
+                  <a:srgbClr val="FF0000"/>
+                </a:solidFill>
+              </a:rPr>
+              <a:t>who gets selected</a:t>
+            </a:r>
+            <a:r>
+              <a:rPr sz="1100" dirty="0"/>
+              <a:t> — prerequisite before Phase C calibration to the hero.</a:t>
+            </a:r>
+          </a:p>
+        </p:txBody>
+      </p:sp>
+    </p:spTree>
+  </p:cSld>
+  <p:clrMapOvr>
+    <a:masterClrMapping/>
+  </p:clrMapOvr>
+</p:sld>
+</file>
+
+<file path=ppt/slides/slide2.xml><?xml version="1.0" encoding="utf-8"?>
+<p:sld xmlns:a="http://schemas.openxmlformats.org/drawingml/2006/main" xmlns:r="http://schemas.openxmlformats.org/officeDocument/2006/relationships" xmlns:p="http://schemas.openxmlformats.org/presentationml/2006/main" show="0">
+  <p:cSld>
+    <p:spTree>
+      <p:nvGrpSpPr>
+        <p:cNvPr id="1" name=""/>
+        <p:cNvGrpSpPr/>
+        <p:nvPr/>
+      </p:nvGrpSpPr>
+      <p:grpSpPr>
+        <a:xfrm>
+          <a:off x="0" y="0"/>
+          <a:ext cx="0" cy="0"/>
+          <a:chOff x="0" y="0"/>
+          <a:chExt cx="0" cy="0"/>
+        </a:xfrm>
+      </p:grpSpPr>
+      <p:sp>
+        <p:nvSpPr>
+          <p:cNvPr id="2" name="TextBox 1"/>
+          <p:cNvSpPr txBox="1"/>
+          <p:nvPr/>
+        </p:nvSpPr>
+        <p:spPr>
+          <a:xfrm>
             <a:off x="411480" y="256032"/>
             <a:ext cx="11368735" cy="420624"/>
           </a:xfrm>
@@ -3149,7 +6010,7 @@
             <p:spPr>
               <a:xfrm>
                 <a:off x="411480" y="768096"/>
-                <a:ext cx="4160520" cy="1897507"/>
+                <a:ext cx="4160520" cy="1971117"/>
               </a:xfrm>
               <a:prstGeom prst="rect">
                 <a:avLst/>
@@ -3236,14 +6097,14 @@
                       <m:sSub>
                         <m:sSubPr>
                           <m:ctrlPr>
-                            <a:rPr lang="en-US" sz="1000" i="1" dirty="0">
+                            <a:rPr lang="en-US" sz="1050" i="1" dirty="0">
                               <a:latin typeface="Cambria Math" panose="02040503050406030204" pitchFamily="18" charset="0"/>
                             </a:rPr>
                           </m:ctrlPr>
                         </m:sSubPr>
                         <m:e>
                           <m:r>
-                            <a:rPr lang="en-US" sz="1000" dirty="0">
+                            <a:rPr lang="en-US" sz="1050" dirty="0">
                               <a:latin typeface="Cambria Math" panose="02040503050406030204" pitchFamily="18" charset="0"/>
                             </a:rPr>
                             <m:t>𝜋</m:t>
@@ -3251,7 +6112,7 @@
                         </m:e>
                         <m:sub>
                           <m:r>
-                            <a:rPr lang="en-US" sz="1000" dirty="0">
+                            <a:rPr lang="en-US" sz="1050" dirty="0">
                               <a:latin typeface="Cambria Math" panose="02040503050406030204" pitchFamily="18" charset="0"/>
                             </a:rPr>
                             <m:t>𝑖𝑗</m:t>
@@ -3259,7 +6120,7 @@
                         </m:sub>
                       </m:sSub>
                       <m:r>
-                        <a:rPr lang="en-US" sz="1000" dirty="0">
+                        <a:rPr lang="en-US" sz="1050" dirty="0">
                           <a:latin typeface="Cambria Math" panose="02040503050406030204" pitchFamily="18" charset="0"/>
                         </a:rPr>
                         <m:t>∝</m:t>
@@ -3267,7 +6128,7 @@
                       <m:func>
                         <m:funcPr>
                           <m:ctrlPr>
-                            <a:rPr lang="en-US" sz="1000" i="1" dirty="0">
+                            <a:rPr lang="en-US" sz="1050" i="1" dirty="0">
                               <a:latin typeface="Cambria Math" panose="02040503050406030204" pitchFamily="18" charset="0"/>
                             </a:rPr>
                           </m:ctrlPr>
@@ -3277,7 +6138,7 @@
                             <m:rPr>
                               <m:sty m:val="p"/>
                             </m:rPr>
-                            <a:rPr lang="en-US" sz="1000" dirty="0">
+                            <a:rPr lang="en-US" sz="1050" dirty="0">
                               <a:latin typeface="Cambria Math" panose="02040503050406030204" pitchFamily="18" charset="0"/>
                             </a:rPr>
                             <m:t>exp</m:t>
@@ -3287,26 +6148,26 @@
                           <m:d>
                             <m:dPr>
                               <m:ctrlPr>
-                                <a:rPr lang="en-US" sz="1000" i="1" dirty="0">
+                                <a:rPr lang="en-US" sz="1050" i="1" dirty="0">
                                   <a:latin typeface="Cambria Math" panose="02040503050406030204" pitchFamily="18" charset="0"/>
                                 </a:rPr>
                               </m:ctrlPr>
                             </m:dPr>
                             <m:e>
                               <m:r>
-                                <a:rPr lang="en-US" sz="1000" dirty="0">
+                                <a:rPr lang="en-US" sz="1050" dirty="0">
                                   <a:latin typeface="Cambria Math" panose="02040503050406030204" pitchFamily="18" charset="0"/>
                                 </a:rPr>
                                 <m:t>−</m:t>
                               </m:r>
                               <m:r>
-                                <a:rPr lang="en-US" sz="1000" dirty="0">
+                                <a:rPr lang="en-US" sz="1050" dirty="0">
                                   <a:latin typeface="Cambria Math" panose="02040503050406030204" pitchFamily="18" charset="0"/>
                                 </a:rPr>
                                 <m:t>𝜌</m:t>
                               </m:r>
                               <m:r>
-                                <a:rPr lang="en-US" sz="1000" dirty="0">
+                                <a:rPr lang="en-US" sz="1050" dirty="0">
                                   <a:latin typeface="Cambria Math" panose="02040503050406030204" pitchFamily="18" charset="0"/>
                                 </a:rPr>
                                 <m:t>⋅</m:t>
@@ -3314,7 +6175,7 @@
                               <m:f>
                                 <m:fPr>
                                   <m:ctrlPr>
-                                    <a:rPr lang="en-US" sz="1000" i="1" dirty="0">
+                                    <a:rPr lang="en-US" sz="1050" i="1" dirty="0">
                                       <a:latin typeface="Cambria Math" panose="02040503050406030204" pitchFamily="18" charset="0"/>
                                     </a:rPr>
                                   </m:ctrlPr>
@@ -3323,7 +6184,7 @@
                                   <m:sSup>
                                     <m:sSupPr>
                                       <m:ctrlPr>
-                                        <a:rPr lang="en-US" sz="1000" i="1" dirty="0">
+                                        <a:rPr lang="en-US" sz="1050" i="1" dirty="0">
                                           <a:latin typeface="Cambria Math" panose="02040503050406030204" pitchFamily="18" charset="0"/>
                                         </a:rPr>
                                       </m:ctrlPr>
@@ -3332,7 +6193,7 @@
                                       <m:d>
                                         <m:dPr>
                                           <m:ctrlPr>
-                                            <a:rPr lang="en-US" sz="1000" i="1" dirty="0">
+                                            <a:rPr lang="en-US" sz="1050" i="1" dirty="0">
                                               <a:latin typeface="Cambria Math" panose="02040503050406030204" pitchFamily="18" charset="0"/>
                                             </a:rPr>
                                           </m:ctrlPr>
@@ -3341,14 +6202,14 @@
                                           <m:sSub>
                                             <m:sSubPr>
                                               <m:ctrlPr>
-                                                <a:rPr lang="en-US" sz="1000" i="1" dirty="0">
+                                                <a:rPr lang="en-US" sz="1050" i="1" dirty="0">
                                                   <a:latin typeface="Cambria Math" panose="02040503050406030204" pitchFamily="18" charset="0"/>
                                                 </a:rPr>
                                               </m:ctrlPr>
                                             </m:sSubPr>
                                             <m:e>
                                               <m:r>
-                                                <a:rPr lang="en-US" sz="1000" dirty="0">
+                                                <a:rPr lang="en-US" sz="1050" dirty="0">
                                                   <a:latin typeface="Cambria Math" panose="02040503050406030204" pitchFamily="18" charset="0"/>
                                                 </a:rPr>
                                                 <m:t>𝐴</m:t>
@@ -3356,7 +6217,7 @@
                                             </m:e>
                                             <m:sub>
                                               <m:r>
-                                                <a:rPr lang="en-US" sz="1000" dirty="0">
+                                                <a:rPr lang="en-US" sz="1050" dirty="0">
                                                   <a:latin typeface="Cambria Math" panose="02040503050406030204" pitchFamily="18" charset="0"/>
                                                 </a:rPr>
                                                 <m:t>𝑖</m:t>
@@ -3364,7 +6225,7 @@
                                             </m:sub>
                                           </m:sSub>
                                           <m:r>
-                                            <a:rPr lang="en-US" sz="1000" dirty="0">
+                                            <a:rPr lang="en-US" sz="1050" dirty="0">
                                               <a:latin typeface="Cambria Math" panose="02040503050406030204" pitchFamily="18" charset="0"/>
                                             </a:rPr>
                                             <m:t>−</m:t>
@@ -3372,14 +6233,14 @@
                                           <m:sSub>
                                             <m:sSubPr>
                                               <m:ctrlPr>
-                                                <a:rPr lang="en-US" sz="1000" i="1" dirty="0">
+                                                <a:rPr lang="en-US" sz="1050" i="1" dirty="0">
                                                   <a:latin typeface="Cambria Math" panose="02040503050406030204" pitchFamily="18" charset="0"/>
                                                 </a:rPr>
                                               </m:ctrlPr>
                                             </m:sSubPr>
                                             <m:e>
                                               <m:r>
-                                                <a:rPr lang="en-US" sz="1000" dirty="0">
+                                                <a:rPr lang="en-US" sz="1050" dirty="0">
                                                   <a:latin typeface="Cambria Math" panose="02040503050406030204" pitchFamily="18" charset="0"/>
                                                 </a:rPr>
                                                 <m:t>𝑇</m:t>
@@ -3387,7 +6248,7 @@
                                             </m:e>
                                             <m:sub>
                                               <m:r>
-                                                <a:rPr lang="en-US" sz="1000" dirty="0">
+                                                <a:rPr lang="en-US" sz="1050" dirty="0">
                                                   <a:latin typeface="Cambria Math" panose="02040503050406030204" pitchFamily="18" charset="0"/>
                                                 </a:rPr>
                                                 <m:t>𝑗</m:t>
@@ -3399,7 +6260,7 @@
                                     </m:e>
                                     <m:sup>
                                       <m:r>
-                                        <a:rPr lang="en-US" sz="1000" dirty="0">
+                                        <a:rPr lang="en-US" sz="1050" dirty="0">
                                           <a:latin typeface="Cambria Math" panose="02040503050406030204" pitchFamily="18" charset="0"/>
                                         </a:rPr>
                                         <m:t>2</m:t>
@@ -3409,7 +6270,7 @@
                                 </m:num>
                                 <m:den>
                                   <m:r>
-                                    <a:rPr lang="en-US" sz="1000" dirty="0">
+                                    <a:rPr lang="en-US" sz="1050" dirty="0">
                                       <a:latin typeface="Cambria Math" panose="02040503050406030204" pitchFamily="18" charset="0"/>
                                     </a:rPr>
                                     <m:t>2</m:t>
@@ -3417,14 +6278,14 @@
                                   <m:sSup>
                                     <m:sSupPr>
                                       <m:ctrlPr>
-                                        <a:rPr lang="en-US" sz="1000" i="1" dirty="0">
+                                        <a:rPr lang="en-US" sz="1050" i="1" dirty="0">
                                           <a:latin typeface="Cambria Math" panose="02040503050406030204" pitchFamily="18" charset="0"/>
                                         </a:rPr>
                                       </m:ctrlPr>
                                     </m:sSupPr>
                                     <m:e>
                                       <m:r>
-                                        <a:rPr lang="en-US" sz="1000" dirty="0">
+                                        <a:rPr lang="en-US" sz="1050" dirty="0">
                                           <a:latin typeface="Cambria Math" panose="02040503050406030204" pitchFamily="18" charset="0"/>
                                         </a:rPr>
                                         <m:t>𝜎</m:t>
@@ -3432,7 +6293,7 @@
                                     </m:e>
                                     <m:sup>
                                       <m:r>
-                                        <a:rPr lang="en-US" sz="1000" dirty="0">
+                                        <a:rPr lang="en-US" sz="1050" dirty="0">
                                           <a:latin typeface="Cambria Math" panose="02040503050406030204" pitchFamily="18" charset="0"/>
                                         </a:rPr>
                                         <m:t>2</m:t>
@@ -3448,7 +6309,7 @@
                     </m:oMath>
                   </m:oMathPara>
                 </a14:m>
-                <a:endParaRPr lang="en-US" sz="1000" i="1" dirty="0">
+                <a:endParaRPr lang="en-US" sz="1050" i="1" dirty="0">
                   <a:latin typeface="Cambria Math"/>
                 </a:endParaRPr>
               </a:p>
@@ -3466,13 +6327,13 @@
                 <a14:m>
                   <m:oMath xmlns:m="http://schemas.openxmlformats.org/officeDocument/2006/math">
                     <m:r>
-                      <a:rPr lang="el-GR" sz="1000" i="1" dirty="0" smtClean="0">
+                      <a:rPr lang="el-GR" sz="1050" i="1" dirty="0" smtClean="0">
                         <a:latin typeface="Cambria Math" panose="02040503050406030204" pitchFamily="18" charset="0"/>
                       </a:rPr>
                       <m:t>𝜎</m:t>
                     </m:r>
                     <m:r>
-                      <a:rPr lang="el-GR" sz="1000" i="1" dirty="0">
+                      <a:rPr lang="el-GR" sz="1050" i="1" dirty="0">
                         <a:latin typeface="Cambria Math" panose="02040503050406030204" pitchFamily="18" charset="0"/>
                       </a:rPr>
                       <m:t>=0.65 </m:t>
@@ -3480,7 +6341,7 @@
                   </m:oMath>
                 </a14:m>
                 <a:r>
-                  <a:rPr lang="en-US" sz="1000" dirty="0"/>
+                  <a:rPr lang="en-US" sz="1050" dirty="0"/>
                   <a:t>fixed</a:t>
                 </a:r>
               </a:p>
@@ -3496,19 +6357,19 @@
                   <a:buChar char="•"/>
                 </a:pPr>
                 <a:r>
-                  <a:rPr lang="en-US" sz="1000" dirty="0"/>
+                  <a:rPr lang="en-US" sz="1050" dirty="0"/>
                   <a:t>arms: </a:t>
                 </a:r>
                 <a14:m>
                   <m:oMath xmlns:m="http://schemas.openxmlformats.org/officeDocument/2006/math">
                     <m:r>
-                      <a:rPr lang="el-GR" sz="1000" i="1" dirty="0" smtClean="0">
+                      <a:rPr lang="el-GR" sz="1050" i="1" dirty="0" smtClean="0">
                         <a:latin typeface="Cambria Math" panose="02040503050406030204" pitchFamily="18" charset="0"/>
                       </a:rPr>
                       <m:t>𝜌</m:t>
                     </m:r>
                     <m:r>
-                      <a:rPr lang="el-GR" sz="1000" i="1" dirty="0" smtClean="0">
+                      <a:rPr lang="el-GR" sz="1050" i="1" dirty="0" smtClean="0">
                         <a:latin typeface="Cambria Math" panose="02040503050406030204" pitchFamily="18" charset="0"/>
                       </a:rPr>
                       <m:t> ∈ {0.1, 1, 8, 32} </m:t>
@@ -3516,11 +6377,11 @@
                   </m:oMath>
                 </a14:m>
                 <a:r>
-                  <a:rPr lang="el-GR" sz="1000" dirty="0"/>
+                  <a:rPr lang="el-GR" sz="1050" dirty="0"/>
                   <a:t>+ </a:t>
                 </a:r>
                 <a:r>
-                  <a:rPr lang="en-US" sz="1000" dirty="0"/>
+                  <a:rPr lang="en-US" sz="1050" dirty="0"/>
                   <a:t>sort-and-chop</a:t>
                 </a:r>
               </a:p>
@@ -3538,55 +6399,55 @@
                 <a14:m>
                   <m:oMath xmlns:m="http://schemas.openxmlformats.org/officeDocument/2006/math">
                     <m:r>
-                      <a:rPr lang="en-US" sz="1000" i="1" dirty="0" smtClean="0">
+                      <a:rPr lang="en-US" sz="1050" i="1" dirty="0" smtClean="0">
                         <a:latin typeface="Cambria Math" panose="02040503050406030204" pitchFamily="18" charset="0"/>
                       </a:rPr>
                       <m:t>𝑆</m:t>
                     </m:r>
                     <m:r>
-                      <a:rPr lang="en-US" sz="800" i="1" baseline="-25000" dirty="0">
+                      <a:rPr lang="en-US" sz="900" i="1" baseline="-25000" dirty="0">
                         <a:latin typeface="Cambria Math" panose="02040503050406030204" pitchFamily="18" charset="0"/>
                       </a:rPr>
                       <m:t>𝑖</m:t>
                     </m:r>
                     <m:r>
-                      <a:rPr lang="en-US" sz="1000" i="1" dirty="0">
+                      <a:rPr lang="en-US" sz="1050" i="1" dirty="0">
                         <a:latin typeface="Cambria Math" panose="02040503050406030204" pitchFamily="18" charset="0"/>
                       </a:rPr>
                       <m:t> = </m:t>
                     </m:r>
                     <m:r>
-                      <a:rPr lang="en-US" sz="1000" i="1" dirty="0">
+                      <a:rPr lang="en-US" sz="1050" i="1" dirty="0">
                         <a:latin typeface="Cambria Math" panose="02040503050406030204" pitchFamily="18" charset="0"/>
                       </a:rPr>
                       <m:t>𝐴</m:t>
                     </m:r>
                     <m:r>
-                      <a:rPr lang="en-US" sz="800" i="1" baseline="-25000" dirty="0">
+                      <a:rPr lang="en-US" sz="900" i="1" baseline="-25000" dirty="0">
                         <a:latin typeface="Cambria Math" panose="02040503050406030204" pitchFamily="18" charset="0"/>
                       </a:rPr>
                       <m:t>𝑖</m:t>
                     </m:r>
                     <m:r>
-                      <a:rPr lang="en-US" sz="1000" i="1" dirty="0">
+                      <a:rPr lang="en-US" sz="1050" i="1" dirty="0">
                         <a:latin typeface="Cambria Math" panose="02040503050406030204" pitchFamily="18" charset="0"/>
                       </a:rPr>
                       <m:t> − 0.55 · </m:t>
                     </m:r>
                     <m:r>
-                      <a:rPr lang="en-US" sz="1000" i="1" dirty="0">
+                      <a:rPr lang="en-US" sz="1050" i="1" dirty="0">
                         <a:latin typeface="Cambria Math" panose="02040503050406030204" pitchFamily="18" charset="0"/>
                       </a:rPr>
                       <m:t>𝐿</m:t>
                     </m:r>
                     <m:r>
-                      <a:rPr lang="en-US" sz="800" i="1" baseline="-25000" dirty="0">
+                      <a:rPr lang="en-US" sz="900" i="1" baseline="-25000" dirty="0">
                         <a:latin typeface="Cambria Math" panose="02040503050406030204" pitchFamily="18" charset="0"/>
                       </a:rPr>
                       <m:t>𝐶</m:t>
                     </m:r>
                     <m:r>
-                      <a:rPr lang="en-US" sz="1000" i="1" dirty="0">
+                      <a:rPr lang="en-US" sz="1050" i="1" dirty="0">
                         <a:latin typeface="Cambria Math" panose="02040503050406030204" pitchFamily="18" charset="0"/>
                       </a:rPr>
                       <m:t> </m:t>
@@ -3594,7 +6455,7 @@
                   </m:oMath>
                 </a14:m>
                 <a:r>
-                  <a:rPr lang="en-US" sz="1000" dirty="0"/>
+                  <a:rPr lang="en-US" sz="1050" dirty="0"/>
                   <a:t>(crowding in score held constant across arms)</a:t>
                 </a:r>
               </a:p>
@@ -3610,19 +6471,19 @@
                   <a:buChar char="•"/>
                 </a:pPr>
                 <a:r>
-                  <a:rPr lang="en-US" sz="1000" dirty="0"/>
+                  <a:rPr lang="en-US" sz="1050" dirty="0"/>
                   <a:t>top-</a:t>
                 </a:r>
                 <a14:m>
                   <m:oMath xmlns:m="http://schemas.openxmlformats.org/officeDocument/2006/math">
                     <m:r>
-                      <a:rPr lang="en-US" sz="1000" i="1" dirty="0" smtClean="0">
+                      <a:rPr lang="en-US" sz="1050" i="1" dirty="0" smtClean="0">
                         <a:latin typeface="Cambria Math" panose="02040503050406030204" pitchFamily="18" charset="0"/>
                       </a:rPr>
                       <m:t>𝐾</m:t>
                     </m:r>
                     <m:r>
-                      <a:rPr lang="en-US" sz="1000" i="1" dirty="0" smtClean="0">
+                      <a:rPr lang="en-US" sz="1050" i="1" dirty="0" smtClean="0">
                         <a:latin typeface="Cambria Math" panose="02040503050406030204" pitchFamily="18" charset="0"/>
                       </a:rPr>
                       <m:t> </m:t>
@@ -3630,19 +6491,19 @@
                   </m:oMath>
                 </a14:m>
                 <a:r>
-                  <a:rPr lang="en-US" sz="1000" dirty="0"/>
+                  <a:rPr lang="en-US" sz="1050" dirty="0"/>
                   <a:t>by </a:t>
                 </a:r>
                 <a14:m>
                   <m:oMath xmlns:m="http://schemas.openxmlformats.org/officeDocument/2006/math">
                     <m:r>
-                      <a:rPr lang="en-US" sz="1000" i="1" dirty="0" smtClean="0">
+                      <a:rPr lang="en-US" sz="1050" i="1" dirty="0" smtClean="0">
                         <a:latin typeface="Cambria Math" panose="02040503050406030204" pitchFamily="18" charset="0"/>
                       </a:rPr>
                       <m:t>𝑆</m:t>
                     </m:r>
                     <m:r>
-                      <a:rPr lang="en-US" sz="800" i="1" baseline="-25000" dirty="0">
+                      <a:rPr lang="en-US" sz="900" i="1" baseline="-25000" dirty="0">
                         <a:latin typeface="Cambria Math" panose="02040503050406030204" pitchFamily="18" charset="0"/>
                       </a:rPr>
                       <m:t>𝑖</m:t>
@@ -3662,25 +6523,25 @@
                   <a:buChar char="•"/>
                 </a:pPr>
                 <a:r>
-                  <a:rPr lang="en-US" sz="1000" dirty="0"/>
+                  <a:rPr lang="en-US" sz="1050" dirty="0"/>
                   <a:t>VISUALIZE = mean </a:t>
                 </a:r>
                 <a14:m>
                   <m:oMath xmlns:m="http://schemas.openxmlformats.org/officeDocument/2006/math">
                     <m:r>
-                      <a:rPr lang="en-US" sz="1000" i="1" dirty="0" smtClean="0">
+                      <a:rPr lang="en-US" sz="1050" i="1" dirty="0" smtClean="0">
                         <a:latin typeface="Cambria Math" panose="02040503050406030204" pitchFamily="18" charset="0"/>
                       </a:rPr>
                       <m:t>𝑌</m:t>
                     </m:r>
                     <m:r>
-                      <a:rPr lang="en-US" sz="800" i="1" baseline="-25000" dirty="0">
+                      <a:rPr lang="en-US" sz="900" i="1" baseline="-25000" dirty="0">
                         <a:latin typeface="Cambria Math" panose="02040503050406030204" pitchFamily="18" charset="0"/>
                       </a:rPr>
                       <m:t>𝑠𝑒𝑙𝑒𝑐𝑡𝑒𝑑</m:t>
                     </m:r>
                     <m:r>
-                      <a:rPr lang="en-US" sz="1000" i="1" dirty="0">
+                      <a:rPr lang="en-US" sz="1050" i="1" dirty="0">
                         <a:latin typeface="Cambria Math" panose="02040503050406030204" pitchFamily="18" charset="0"/>
                       </a:rPr>
                       <m:t> </m:t>
@@ -3688,13 +6549,13 @@
                   </m:oMath>
                 </a14:m>
                 <a:r>
-                  <a:rPr lang="en-US" sz="1000" dirty="0"/>
+                  <a:rPr lang="en-US" sz="1050" dirty="0"/>
                   <a:t>vs pool mean (</a:t>
                 </a:r>
                 <a14:m>
                   <m:oMath xmlns:m="http://schemas.openxmlformats.org/officeDocument/2006/math">
                     <m:r>
-                      <a:rPr lang="en-US" sz="1000" i="1" dirty="0" smtClean="0">
+                      <a:rPr lang="en-US" sz="1050" i="1" dirty="0" smtClean="0">
                         <a:latin typeface="Cambria Math" panose="02040503050406030204" pitchFamily="18" charset="0"/>
                       </a:rPr>
                       <m:t>16</m:t>
@@ -3702,10 +6563,10 @@
                   </m:oMath>
                 </a14:m>
                 <a:r>
-                  <a:rPr lang="en-US" sz="1000" dirty="0"/>
+                  <a:rPr lang="en-US" sz="1050" dirty="0"/>
                   <a:t> bins)</a:t>
                 </a:r>
-                <a:endParaRPr sz="1000" dirty="0"/>
+                <a:endParaRPr sz="1050" dirty="0"/>
               </a:p>
             </p:txBody>
           </p:sp>
@@ -3722,7 +6583,7 @@
             <p:spPr>
               <a:xfrm>
                 <a:off x="411480" y="768096"/>
-                <a:ext cx="4160520" cy="1897507"/>
+                <a:ext cx="4160520" cy="1971117"/>
               </a:xfrm>
               <a:prstGeom prst="rect">
                 <a:avLst/>
@@ -3730,7 +6591,7 @@
               <a:blipFill>
                 <a:blip r:embed="rId2"/>
                 <a:stretch>
-                  <a:fillRect b="-1333"/>
+                  <a:fillRect b="-1282"/>
                 </a:stretch>
               </a:blipFill>
             </p:spPr>
@@ -3773,175 +6634,248 @@
           </a:prstGeom>
         </p:spPr>
       </p:pic>
-      <p:sp>
-        <p:nvSpPr>
-          <p:cNvPr id="5" name="TextBox 4"/>
-          <p:cNvSpPr txBox="1"/>
-          <p:nvPr/>
-        </p:nvSpPr>
-        <p:spPr>
-          <a:xfrm>
-            <a:off x="411480" y="4681728"/>
-            <a:ext cx="11368735" cy="646331"/>
-          </a:xfrm>
-          <a:prstGeom prst="rect">
-            <a:avLst/>
-          </a:prstGeom>
-          <a:noFill/>
-        </p:spPr>
-        <p:txBody>
-          <a:bodyPr wrap="square">
-            <a:spAutoFit/>
-          </a:bodyPr>
-          <a:lstStyle/>
-          <a:p>
-            <a:pPr>
-              <a:spcBef>
-                <a:spcPts val="0"/>
-              </a:spcBef>
-              <a:spcAft>
-                <a:spcPts val="0"/>
-              </a:spcAft>
-            </a:pPr>
-            <a:r>
-              <a:rPr sz="900" dirty="0"/>
-              <a:t>OAT: one draw of </a:t>
-            </a:r>
-            <a:r>
-              <a:rPr sz="900" i="1" dirty="0">
-                <a:latin typeface="Cambria Math"/>
-              </a:rPr>
-              <a:t>A</a:t>
-            </a:r>
-            <a:r>
-              <a:rPr sz="800" i="1" baseline="-25000" dirty="0">
-                <a:latin typeface="Cambria Math"/>
-              </a:rPr>
-              <a:t>i</a:t>
-            </a:r>
-            <a:r>
-              <a:rPr lang="en-US" sz="800" i="1" baseline="-25000" dirty="0">
-                <a:latin typeface="Cambria Math"/>
-              </a:rPr>
-              <a:t> </a:t>
-            </a:r>
-            <a:r>
-              <a:rPr sz="900" dirty="0"/>
-              <a:t>, </a:t>
-            </a:r>
-            <a:r>
-              <a:rPr sz="900" i="1" dirty="0" err="1">
-                <a:latin typeface="Cambria Math"/>
-              </a:rPr>
-              <a:t>T</a:t>
-            </a:r>
-            <a:r>
-              <a:rPr sz="800" i="1" baseline="-25000" dirty="0" err="1">
-                <a:latin typeface="Cambria Math"/>
-              </a:rPr>
-              <a:t>j</a:t>
-            </a:r>
-            <a:r>
-              <a:rPr sz="900" dirty="0"/>
-              <a:t> (seed </a:t>
-            </a:r>
-            <a:r>
-              <a:rPr sz="900" i="1" dirty="0">
-                <a:latin typeface="Cambria Math"/>
-              </a:rPr>
-              <a:t>42</a:t>
-            </a:r>
-            <a:r>
-              <a:rPr sz="900" dirty="0"/>
-              <a:t>); only ASSIGN changes across arms.</a:t>
-            </a:r>
-          </a:p>
-          <a:p>
-            <a:pPr>
-              <a:spcBef>
-                <a:spcPts val="0"/>
-              </a:spcBef>
-              <a:spcAft>
-                <a:spcPts val="0"/>
-              </a:spcAft>
-            </a:pPr>
-            <a:r>
-              <a:rPr sz="900" dirty="0"/>
-              <a:t>Low </a:t>
-            </a:r>
-            <a:r>
-              <a:rPr sz="900" i="1" dirty="0">
-                <a:latin typeface="Cambria Math"/>
-              </a:rPr>
-              <a:t>ρ</a:t>
-            </a:r>
-            <a:r>
-              <a:rPr lang="en-US" sz="900" i="1" dirty="0">
-                <a:latin typeface="Cambria Math"/>
-              </a:rPr>
-              <a:t> </a:t>
-            </a:r>
-            <a:r>
-              <a:rPr sz="900" dirty="0"/>
-              <a:t>: players mix across teams — selection vs pool mean stays nearly flat.</a:t>
-            </a:r>
-          </a:p>
-          <a:p>
-            <a:pPr>
-              <a:spcBef>
-                <a:spcPts val="0"/>
-              </a:spcBef>
-              <a:spcAft>
-                <a:spcPts val="0"/>
-              </a:spcAft>
-            </a:pPr>
-            <a:r>
-              <a:rPr sz="900" dirty="0"/>
-              <a:t>High </a:t>
-            </a:r>
-            <a:r>
-              <a:rPr sz="900" i="1" dirty="0">
-                <a:latin typeface="Cambria Math"/>
-              </a:rPr>
-              <a:t>ρ</a:t>
-            </a:r>
-            <a:r>
-              <a:rPr lang="en-US" sz="900" i="1" dirty="0">
-                <a:latin typeface="Cambria Math"/>
-              </a:rPr>
-              <a:t> </a:t>
-            </a:r>
-            <a:r>
-              <a:rPr sz="900" dirty="0"/>
-              <a:t>: assortative matching — peer environments concentrate; inverted-</a:t>
-            </a:r>
-            <a:r>
-              <a:rPr sz="900" i="1" dirty="0">
-                <a:latin typeface="Cambria Math"/>
-              </a:rPr>
-              <a:t>U</a:t>
-            </a:r>
-            <a:r>
-              <a:rPr sz="900" dirty="0"/>
-              <a:t> emerges.</a:t>
-            </a:r>
-          </a:p>
-          <a:p>
-            <a:pPr>
-              <a:spcBef>
-                <a:spcPts val="0"/>
-              </a:spcBef>
-              <a:spcAft>
-                <a:spcPts val="0"/>
-              </a:spcAft>
-            </a:pPr>
-            <a:r>
-              <a:rPr sz="900" dirty="0"/>
-              <a:t>Sort-and-chop benchmark: hard rank match (same score rule as soft arms).</a:t>
-            </a:r>
-          </a:p>
-        </p:txBody>
-      </p:sp>
+      <mc:AlternateContent xmlns:mc="http://schemas.openxmlformats.org/markup-compatibility/2006">
+        <mc:Choice xmlns:a14="http://schemas.microsoft.com/office/drawing/2010/main" Requires="a14">
+          <p:sp>
+            <p:nvSpPr>
+              <p:cNvPr id="5" name="TextBox 4"/>
+              <p:cNvSpPr txBox="1"/>
+              <p:nvPr/>
+            </p:nvSpPr>
+            <p:spPr>
+              <a:xfrm>
+                <a:off x="411480" y="4681728"/>
+                <a:ext cx="11368735" cy="657424"/>
+              </a:xfrm>
+              <a:prstGeom prst="rect">
+                <a:avLst/>
+              </a:prstGeom>
+              <a:noFill/>
+            </p:spPr>
+            <p:txBody>
+              <a:bodyPr wrap="square">
+                <a:spAutoFit/>
+              </a:bodyPr>
+              <a:lstStyle/>
+              <a:p>
+                <a:pPr>
+                  <a:spcBef>
+                    <a:spcPts val="0"/>
+                  </a:spcBef>
+                  <a:spcAft>
+                    <a:spcPts val="0"/>
+                  </a:spcAft>
+                </a:pPr>
+                <a:r>
+                  <a:rPr sz="900" dirty="0"/>
+                  <a:t>OAT: one draw of </a:t>
+                </a:r>
+                <a14:m>
+                  <m:oMath xmlns:m="http://schemas.openxmlformats.org/officeDocument/2006/math">
+                    <m:r>
+                      <a:rPr lang="en-US" sz="900" i="1" dirty="0">
+                        <a:latin typeface="Cambria Math" panose="02040503050406030204" pitchFamily="18" charset="0"/>
+                      </a:rPr>
+                      <m:t>𝐴</m:t>
+                    </m:r>
+                    <m:r>
+                      <a:rPr lang="en-US" sz="800" i="1" baseline="-25000" dirty="0">
+                        <a:latin typeface="Cambria Math" panose="02040503050406030204" pitchFamily="18" charset="0"/>
+                      </a:rPr>
+                      <m:t>𝑖</m:t>
+                    </m:r>
+                    <m:sSub>
+                      <m:sSubPr>
+                        <m:ctrlPr>
+                          <a:rPr lang="en-US" sz="900" i="1" dirty="0">
+                            <a:latin typeface="Cambria Math" panose="02040503050406030204" pitchFamily="18" charset="0"/>
+                          </a:rPr>
+                        </m:ctrlPr>
+                      </m:sSubPr>
+                      <m:e>
+                        <m:r>
+                          <a:rPr lang="en-US" sz="900" i="1" dirty="0">
+                            <a:latin typeface="Cambria Math" panose="02040503050406030204" pitchFamily="18" charset="0"/>
+                          </a:rPr>
+                          <m:t> ,</m:t>
+                        </m:r>
+                        <m:r>
+                          <a:rPr lang="en-US" sz="900" i="1" dirty="0">
+                            <a:latin typeface="Cambria Math" panose="02040503050406030204" pitchFamily="18" charset="0"/>
+                          </a:rPr>
+                          <m:t>𝑇</m:t>
+                        </m:r>
+                      </m:e>
+                      <m:sub>
+                        <m:r>
+                          <a:rPr lang="en-US" sz="900" i="1" dirty="0">
+                            <a:latin typeface="Cambria Math" panose="02040503050406030204" pitchFamily="18" charset="0"/>
+                          </a:rPr>
+                          <m:t>𝑗</m:t>
+                        </m:r>
+                      </m:sub>
+                    </m:sSub>
+                    <m:r>
+                      <a:rPr lang="en-US" sz="900" i="1" dirty="0">
+                        <a:latin typeface="Cambria Math" panose="02040503050406030204" pitchFamily="18" charset="0"/>
+                      </a:rPr>
+                      <m:t> </m:t>
+                    </m:r>
+                  </m:oMath>
+                </a14:m>
+                <a:r>
+                  <a:rPr sz="900" dirty="0"/>
+                  <a:t>(seed </a:t>
+                </a:r>
+                <a14:m>
+                  <m:oMath xmlns:m="http://schemas.openxmlformats.org/officeDocument/2006/math">
+                    <m:r>
+                      <a:rPr lang="en-US" sz="900" i="1" dirty="0" smtClean="0">
+                        <a:latin typeface="Cambria Math" panose="02040503050406030204" pitchFamily="18" charset="0"/>
+                      </a:rPr>
+                      <m:t>42</m:t>
+                    </m:r>
+                  </m:oMath>
+                </a14:m>
+                <a:r>
+                  <a:rPr sz="900" dirty="0"/>
+                  <a:t>); only ASSIGN changes across arms.</a:t>
+                </a:r>
+              </a:p>
+              <a:p>
+                <a:pPr>
+                  <a:spcBef>
+                    <a:spcPts val="0"/>
+                  </a:spcBef>
+                  <a:spcAft>
+                    <a:spcPts val="0"/>
+                  </a:spcAft>
+                </a:pPr>
+                <a:r>
+                  <a:rPr sz="900" dirty="0"/>
+                  <a:t>Low </a:t>
+                </a:r>
+                <a14:m>
+                  <m:oMath xmlns:m="http://schemas.openxmlformats.org/officeDocument/2006/math">
+                    <m:r>
+                      <a:rPr lang="en-US" sz="900" i="1" dirty="0" smtClean="0">
+                        <a:latin typeface="Cambria Math" panose="02040503050406030204" pitchFamily="18" charset="0"/>
+                      </a:rPr>
+                      <m:t>𝜌</m:t>
+                    </m:r>
+                    <m:r>
+                      <a:rPr lang="en-US" sz="900" i="1" dirty="0" smtClean="0">
+                        <a:latin typeface="Cambria Math" panose="02040503050406030204" pitchFamily="18" charset="0"/>
+                      </a:rPr>
+                      <m:t> </m:t>
+                    </m:r>
+                  </m:oMath>
+                </a14:m>
+                <a:r>
+                  <a:rPr sz="900" dirty="0"/>
+                  <a:t>: players mix across teams — selection vs pool mean stays nearly flat.</a:t>
+                </a:r>
+              </a:p>
+              <a:p>
+                <a:pPr>
+                  <a:spcBef>
+                    <a:spcPts val="0"/>
+                  </a:spcBef>
+                  <a:spcAft>
+                    <a:spcPts val="0"/>
+                  </a:spcAft>
+                </a:pPr>
+                <a:r>
+                  <a:rPr sz="900" dirty="0"/>
+                  <a:t>High </a:t>
+                </a:r>
+                <a14:m>
+                  <m:oMath xmlns:m="http://schemas.openxmlformats.org/officeDocument/2006/math">
+                    <m:r>
+                      <a:rPr lang="en-US" sz="900" i="1" dirty="0" smtClean="0">
+                        <a:latin typeface="Cambria Math" panose="02040503050406030204" pitchFamily="18" charset="0"/>
+                      </a:rPr>
+                      <m:t>𝜌</m:t>
+                    </m:r>
+                    <m:r>
+                      <a:rPr lang="en-US" sz="900" i="1" dirty="0" smtClean="0">
+                        <a:latin typeface="Cambria Math" panose="02040503050406030204" pitchFamily="18" charset="0"/>
+                      </a:rPr>
+                      <m:t> </m:t>
+                    </m:r>
+                  </m:oMath>
+                </a14:m>
+                <a:r>
+                  <a:rPr sz="900" dirty="0"/>
+                  <a:t>: assortative matching — peer environments concentrate; inverted-</a:t>
+                </a:r>
+                <a:r>
+                  <a:rPr sz="900" i="1" dirty="0">
+                    <a:latin typeface="Cambria Math"/>
+                  </a:rPr>
+                  <a:t>U</a:t>
+                </a:r>
+                <a:r>
+                  <a:rPr sz="900" dirty="0"/>
+                  <a:t> emerges.</a:t>
+                </a:r>
+              </a:p>
+              <a:p>
+                <a:pPr>
+                  <a:spcBef>
+                    <a:spcPts val="0"/>
+                  </a:spcBef>
+                  <a:spcAft>
+                    <a:spcPts val="0"/>
+                  </a:spcAft>
+                </a:pPr>
+                <a:r>
+                  <a:rPr sz="900" dirty="0"/>
+                  <a:t>Sort-and-chop benchmark: hard rank match (same score rule as soft arms).</a:t>
+                </a:r>
+              </a:p>
+            </p:txBody>
+          </p:sp>
+        </mc:Choice>
+        <mc:Fallback>
+          <p:sp>
+            <p:nvSpPr>
+              <p:cNvPr id="5" name="TextBox 4"/>
+              <p:cNvSpPr txBox="1">
+                <a:spLocks noRot="1" noChangeAspect="1" noMove="1" noResize="1" noEditPoints="1" noAdjustHandles="1" noChangeArrowheads="1" noChangeShapeType="1" noTextEdit="1"/>
+              </p:cNvSpPr>
+              <p:nvPr/>
+            </p:nvSpPr>
+            <p:spPr>
+              <a:xfrm>
+                <a:off x="411480" y="4681728"/>
+                <a:ext cx="11368735" cy="657424"/>
+              </a:xfrm>
+              <a:prstGeom prst="rect">
+                <a:avLst/>
+              </a:prstGeom>
+              <a:blipFill>
+                <a:blip r:embed="rId4"/>
+                <a:stretch>
+                  <a:fillRect b="-1887"/>
+                </a:stretch>
+              </a:blipFill>
+            </p:spPr>
+            <p:txBody>
+              <a:bodyPr/>
+              <a:lstStyle/>
+              <a:p>
+                <a:r>
+                  <a:rPr lang="en-US">
+                    <a:noFill/>
+                  </a:rPr>
+                  <a:t> </a:t>
+                </a:r>
+              </a:p>
+            </p:txBody>
+          </p:sp>
+        </mc:Fallback>
+      </mc:AlternateContent>
       <mc:AlternateContent xmlns:mc="http://schemas.openxmlformats.org/markup-compatibility/2006">
         <mc:Choice xmlns:a14="http://schemas.microsoft.com/office/drawing/2010/main" Requires="a14">
           <p:sp>
@@ -4049,7 +6983,7 @@
                 <a:avLst/>
               </a:prstGeom>
               <a:blipFill>
-                <a:blip r:embed="rId4"/>
+                <a:blip r:embed="rId5"/>
                 <a:stretch>
                   <a:fillRect b="-14286"/>
                 </a:stretch>
@@ -4078,7 +7012,7 @@
 </p:sld>
 </file>
 
-<file path=ppt/slides/slide2.xml><?xml version="1.0" encoding="utf-8"?>
+<file path=ppt/slides/slide3.xml><?xml version="1.0" encoding="utf-8"?>
 <p:sld xmlns:a="http://schemas.openxmlformats.org/drawingml/2006/main" xmlns:r="http://schemas.openxmlformats.org/officeDocument/2006/relationships" xmlns:p="http://schemas.openxmlformats.org/presentationml/2006/main">
   <p:cSld>
     <p:spTree>
@@ -4271,30 +7205,30 @@
                       <m:sSub>
                         <m:sSubPr>
                           <m:ctrlPr>
-                            <a:rPr lang="ar-AE" sz="1000" i="1" dirty="0">
+                            <a:rPr lang="ar-AE" sz="1000" b="1" i="1" dirty="0">
                               <a:latin typeface="Cambria Math" panose="02040503050406030204" pitchFamily="18" charset="0"/>
                             </a:rPr>
                           </m:ctrlPr>
                         </m:sSubPr>
                         <m:e>
                           <m:r>
-                            <a:rPr lang="ar-AE" sz="1000" dirty="0">
+                            <a:rPr lang="ar-AE" sz="1000" b="1" i="1" dirty="0">
                               <a:latin typeface="Cambria Math" panose="02040503050406030204" pitchFamily="18" charset="0"/>
                             </a:rPr>
-                            <m:t>𝜋</m:t>
+                            <m:t>𝝅</m:t>
                           </m:r>
                         </m:e>
                         <m:sub>
                           <m:r>
-                            <a:rPr lang="ar-AE" sz="1000" dirty="0">
+                            <a:rPr lang="ar-AE" sz="1000" b="1" i="1" dirty="0">
                               <a:latin typeface="Cambria Math" panose="02040503050406030204" pitchFamily="18" charset="0"/>
                             </a:rPr>
-                            <m:t>𝑖𝑗</m:t>
+                            <m:t>𝒊𝒋</m:t>
                           </m:r>
                         </m:sub>
                       </m:sSub>
                       <m:r>
-                        <a:rPr lang="ar-AE" sz="1000" dirty="0">
+                        <a:rPr lang="ar-AE" sz="1000" b="1" dirty="0">
                           <a:latin typeface="Cambria Math" panose="02040503050406030204" pitchFamily="18" charset="0"/>
                         </a:rPr>
                         <m:t>∝</m:t>
@@ -4302,46 +7236,43 @@
                       <m:func>
                         <m:funcPr>
                           <m:ctrlPr>
-                            <a:rPr lang="ar-AE" sz="1000" i="1" dirty="0">
+                            <a:rPr lang="ar-AE" sz="1000" b="1" i="1" dirty="0">
                               <a:latin typeface="Cambria Math" panose="02040503050406030204" pitchFamily="18" charset="0"/>
                             </a:rPr>
                           </m:ctrlPr>
                         </m:funcPr>
                         <m:fName>
                           <m:r>
-                            <m:rPr>
-                              <m:sty m:val="p"/>
-                            </m:rPr>
-                            <a:rPr lang="en-US" sz="1000" dirty="0">
+                            <a:rPr lang="en-US" sz="1000" b="1" i="1" dirty="0">
                               <a:latin typeface="Cambria Math" panose="02040503050406030204" pitchFamily="18" charset="0"/>
                             </a:rPr>
-                            <m:t>exp</m:t>
+                            <m:t>𝐞𝐱𝐩</m:t>
                           </m:r>
                         </m:fName>
                         <m:e>
                           <m:d>
                             <m:dPr>
                               <m:ctrlPr>
-                                <a:rPr lang="ar-AE" sz="1000" i="1" dirty="0">
+                                <a:rPr lang="ar-AE" sz="1000" b="1" i="1" dirty="0">
                                   <a:latin typeface="Cambria Math" panose="02040503050406030204" pitchFamily="18" charset="0"/>
                                 </a:rPr>
                               </m:ctrlPr>
                             </m:dPr>
                             <m:e>
                               <m:r>
-                                <a:rPr lang="ar-AE" sz="1000" dirty="0">
+                                <a:rPr lang="ar-AE" sz="1000" b="1" dirty="0">
                                   <a:latin typeface="Cambria Math" panose="02040503050406030204" pitchFamily="18" charset="0"/>
                                 </a:rPr>
                                 <m:t>−</m:t>
                               </m:r>
                               <m:r>
-                                <a:rPr lang="ar-AE" sz="1000" dirty="0">
+                                <a:rPr lang="ar-AE" sz="1000" b="1" i="1" dirty="0">
                                   <a:latin typeface="Cambria Math" panose="02040503050406030204" pitchFamily="18" charset="0"/>
                                 </a:rPr>
-                                <m:t>𝜌</m:t>
+                                <m:t>𝛒</m:t>
                               </m:r>
                               <m:r>
-                                <a:rPr lang="ar-AE" sz="1000" dirty="0">
+                                <a:rPr lang="ar-AE" sz="1000" b="1" dirty="0">
                                   <a:latin typeface="Cambria Math" panose="02040503050406030204" pitchFamily="18" charset="0"/>
                                 </a:rPr>
                                 <m:t>⋅</m:t>
@@ -4349,7 +7280,7 @@
                               <m:f>
                                 <m:fPr>
                                   <m:ctrlPr>
-                                    <a:rPr lang="ar-AE" sz="1000" i="1" dirty="0">
+                                    <a:rPr lang="ar-AE" sz="1000" b="1" i="1" dirty="0">
                                       <a:latin typeface="Cambria Math" panose="02040503050406030204" pitchFamily="18" charset="0"/>
                                     </a:rPr>
                                   </m:ctrlPr>
@@ -4358,7 +7289,7 @@
                                   <m:sSup>
                                     <m:sSupPr>
                                       <m:ctrlPr>
-                                        <a:rPr lang="ar-AE" sz="1000" i="1" dirty="0">
+                                        <a:rPr lang="ar-AE" sz="1000" b="1" i="1" dirty="0">
                                           <a:latin typeface="Cambria Math" panose="02040503050406030204" pitchFamily="18" charset="0"/>
                                         </a:rPr>
                                       </m:ctrlPr>
@@ -4367,7 +7298,7 @@
                                       <m:d>
                                         <m:dPr>
                                           <m:ctrlPr>
-                                            <a:rPr lang="ar-AE" sz="1000" i="1" dirty="0">
+                                            <a:rPr lang="ar-AE" sz="1000" b="1" i="1" dirty="0">
                                               <a:latin typeface="Cambria Math" panose="02040503050406030204" pitchFamily="18" charset="0"/>
                                             </a:rPr>
                                           </m:ctrlPr>
@@ -4376,30 +7307,30 @@
                                           <m:sSub>
                                             <m:sSubPr>
                                               <m:ctrlPr>
-                                                <a:rPr lang="ar-AE" sz="1000" i="1" dirty="0">
+                                                <a:rPr lang="ar-AE" sz="1000" b="1" i="1" dirty="0">
                                                   <a:latin typeface="Cambria Math" panose="02040503050406030204" pitchFamily="18" charset="0"/>
                                                 </a:rPr>
                                               </m:ctrlPr>
                                             </m:sSubPr>
                                             <m:e>
                                               <m:r>
-                                                <a:rPr lang="ar-AE" sz="1000" dirty="0">
+                                                <a:rPr lang="ar-AE" sz="1000" b="1" i="1" dirty="0">
                                                   <a:latin typeface="Cambria Math" panose="02040503050406030204" pitchFamily="18" charset="0"/>
                                                 </a:rPr>
-                                                <m:t>𝐴</m:t>
+                                                <m:t>𝑨</m:t>
                                               </m:r>
                                             </m:e>
                                             <m:sub>
                                               <m:r>
-                                                <a:rPr lang="ar-AE" sz="1000" dirty="0">
+                                                <a:rPr lang="ar-AE" sz="1000" b="1" i="1" dirty="0">
                                                   <a:latin typeface="Cambria Math" panose="02040503050406030204" pitchFamily="18" charset="0"/>
                                                 </a:rPr>
-                                                <m:t>𝑖</m:t>
+                                                <m:t>𝒊</m:t>
                                               </m:r>
                                             </m:sub>
                                           </m:sSub>
                                           <m:r>
-                                            <a:rPr lang="ar-AE" sz="1000" dirty="0">
+                                            <a:rPr lang="ar-AE" sz="1000" b="1" dirty="0">
                                               <a:latin typeface="Cambria Math" panose="02040503050406030204" pitchFamily="18" charset="0"/>
                                             </a:rPr>
                                             <m:t>−</m:t>
@@ -4407,25 +7338,25 @@
                                           <m:sSub>
                                             <m:sSubPr>
                                               <m:ctrlPr>
-                                                <a:rPr lang="ar-AE" sz="1000" i="1" dirty="0">
+                                                <a:rPr lang="ar-AE" sz="1000" b="1" i="1" dirty="0">
                                                   <a:latin typeface="Cambria Math" panose="02040503050406030204" pitchFamily="18" charset="0"/>
                                                 </a:rPr>
                                               </m:ctrlPr>
                                             </m:sSubPr>
                                             <m:e>
                                               <m:r>
-                                                <a:rPr lang="ar-AE" sz="1000" dirty="0">
+                                                <a:rPr lang="ar-AE" sz="1000" b="1" i="1" dirty="0">
                                                   <a:latin typeface="Cambria Math" panose="02040503050406030204" pitchFamily="18" charset="0"/>
                                                 </a:rPr>
-                                                <m:t>𝑇</m:t>
+                                                <m:t>𝑻</m:t>
                                               </m:r>
                                             </m:e>
                                             <m:sub>
                                               <m:r>
-                                                <a:rPr lang="ar-AE" sz="1000" dirty="0">
+                                                <a:rPr lang="ar-AE" sz="1000" b="1" i="1" dirty="0">
                                                   <a:latin typeface="Cambria Math" panose="02040503050406030204" pitchFamily="18" charset="0"/>
                                                 </a:rPr>
-                                                <m:t>𝑗</m:t>
+                                                <m:t>𝒋</m:t>
                                               </m:r>
                                             </m:sub>
                                           </m:sSub>
@@ -4434,43 +7365,43 @@
                                     </m:e>
                                     <m:sup>
                                       <m:r>
-                                        <a:rPr lang="ar-AE" sz="1000" dirty="0">
+                                        <a:rPr lang="ar-AE" sz="1000" b="1" i="1" dirty="0">
                                           <a:latin typeface="Cambria Math" panose="02040503050406030204" pitchFamily="18" charset="0"/>
                                         </a:rPr>
-                                        <m:t>2</m:t>
+                                        <m:t>𝟐</m:t>
                                       </m:r>
                                     </m:sup>
                                   </m:sSup>
                                 </m:num>
                                 <m:den>
                                   <m:r>
-                                    <a:rPr lang="ar-AE" sz="1000" dirty="0">
+                                    <a:rPr lang="ar-AE" sz="1000" b="1" i="1" dirty="0">
                                       <a:latin typeface="Cambria Math" panose="02040503050406030204" pitchFamily="18" charset="0"/>
                                     </a:rPr>
-                                    <m:t>2</m:t>
+                                    <m:t>𝟐</m:t>
                                   </m:r>
                                   <m:sSup>
                                     <m:sSupPr>
                                       <m:ctrlPr>
-                                        <a:rPr lang="ar-AE" sz="1000" i="1" dirty="0">
+                                        <a:rPr lang="ar-AE" sz="1000" b="1" i="1" dirty="0">
                                           <a:latin typeface="Cambria Math" panose="02040503050406030204" pitchFamily="18" charset="0"/>
                                         </a:rPr>
                                       </m:ctrlPr>
                                     </m:sSupPr>
                                     <m:e>
                                       <m:r>
-                                        <a:rPr lang="ar-AE" sz="1000" dirty="0">
+                                        <a:rPr lang="ar-AE" sz="1000" b="1" i="1" dirty="0">
                                           <a:latin typeface="Cambria Math" panose="02040503050406030204" pitchFamily="18" charset="0"/>
                                         </a:rPr>
-                                        <m:t>𝜎</m:t>
+                                        <m:t>𝝈</m:t>
                                       </m:r>
                                     </m:e>
                                     <m:sup>
                                       <m:r>
-                                        <a:rPr lang="ar-AE" sz="1000" dirty="0">
+                                        <a:rPr lang="ar-AE" sz="1000" b="1" i="1" dirty="0">
                                           <a:latin typeface="Cambria Math" panose="02040503050406030204" pitchFamily="18" charset="0"/>
                                         </a:rPr>
-                                        <m:t>2</m:t>
+                                        <m:t>𝟐</m:t>
                                       </m:r>
                                     </m:sup>
                                   </m:sSup>
@@ -4483,7 +7414,7 @@
                     </m:oMath>
                   </m:oMathPara>
                 </a14:m>
-                <a:endParaRPr lang="ar-AE" sz="1000" i="1" dirty="0">
+                <a:endParaRPr lang="ar-AE" sz="1000" b="1" i="1" dirty="0">
                   <a:latin typeface="Cambria Math"/>
                 </a:endParaRPr>
               </a:p>
@@ -4761,7 +7692,7 @@
               <a:blipFill>
                 <a:blip r:embed="rId3"/>
                 <a:stretch>
-                  <a:fillRect b="-1333"/>
+                  <a:fillRect b="-2000"/>
                 </a:stretch>
               </a:blipFill>
             </p:spPr>
@@ -4854,12 +7785,6 @@
                       </a:rPr>
                       <m:t>𝑖</m:t>
                     </m:r>
-                    <m:r>
-                      <a:rPr lang="en-US" sz="900" i="1" dirty="0">
-                        <a:latin typeface="Cambria Math" panose="02040503050406030204" pitchFamily="18" charset="0"/>
-                      </a:rPr>
-                      <m:t>, </m:t>
-                    </m:r>
                     <m:sSub>
                       <m:sSubPr>
                         <m:ctrlPr>
@@ -4869,6 +7794,12 @@
                         </m:ctrlPr>
                       </m:sSubPr>
                       <m:e>
+                        <m:r>
+                          <a:rPr lang="en-US" sz="900" b="0" i="1" dirty="0" smtClean="0">
+                            <a:latin typeface="Cambria Math" panose="02040503050406030204" pitchFamily="18" charset="0"/>
+                          </a:rPr>
+                          <m:t> ,</m:t>
+                        </m:r>
                         <m:r>
                           <a:rPr lang="en-US" sz="900" b="0" i="1" dirty="0" smtClean="0">
                             <a:latin typeface="Cambria Math" panose="02040503050406030204" pitchFamily="18" charset="0"/>
@@ -4897,12 +7828,16 @@
                   <a:rPr lang="en-US" sz="900" dirty="0"/>
                   <a:t>(seed </a:t>
                 </a:r>
-                <a:r>
-                  <a:rPr lang="en-US" sz="900" i="1" dirty="0">
-                    <a:latin typeface="Cambria Math"/>
-                  </a:rPr>
-                  <a:t>42</a:t>
-                </a:r>
+                <a14:m>
+                  <m:oMath xmlns:m="http://schemas.openxmlformats.org/officeDocument/2006/math">
+                    <m:r>
+                      <a:rPr lang="en-US" sz="900" i="1" dirty="0" smtClean="0">
+                        <a:latin typeface="Cambria Math" panose="02040503050406030204" pitchFamily="18" charset="0"/>
+                      </a:rPr>
+                      <m:t>42</m:t>
+                    </m:r>
+                  </m:oMath>
+                </a14:m>
                 <a:r>
                   <a:rPr lang="en-US" sz="900" dirty="0"/>
                   <a:t>); only ASSIGN changes across arms.</a:t>
@@ -4933,7 +7868,7 @@
                 </a14:m>
                 <a:r>
                   <a:rPr lang="en-US" sz="900" dirty="0"/>
-                  <a:t>: players mix across teams — selection vs pool mean stays nearly flat.</a:t>
+                  <a:t> : players mix across teams — selection vs pool mean stays nearly flat.</a:t>
                 </a:r>
               </a:p>
               <a:p>
@@ -4961,7 +7896,7 @@
                 </a14:m>
                 <a:r>
                   <a:rPr lang="en-US" sz="900" dirty="0"/>
-                  <a:t>: assortative matching — peer environments concentrate; inverted-</a:t>
+                  <a:t> : assortative matching — peer environments concentrate; inverted-</a:t>
                 </a:r>
                 <a14:m>
                   <m:oMath xmlns:m="http://schemas.openxmlformats.org/officeDocument/2006/math">
@@ -5195,7 +8130,7 @@
 </p:sld>
 </file>
 
-<file path=ppt/slides/slide3.xml><?xml version="1.0" encoding="utf-8"?>
+<file path=ppt/slides/slide4.xml><?xml version="1.0" encoding="utf-8"?>
 <p:sld xmlns:a="http://schemas.openxmlformats.org/drawingml/2006/main" xmlns:r="http://schemas.openxmlformats.org/officeDocument/2006/relationships" xmlns:p="http://schemas.openxmlformats.org/presentationml/2006/main">
   <p:cSld>
     <p:spTree>
@@ -6070,7 +9005,7 @@
 </p:sld>
 </file>
 
-<file path=ppt/slides/slide4.xml><?xml version="1.0" encoding="utf-8"?>
+<file path=ppt/slides/slide5.xml><?xml version="1.0" encoding="utf-8"?>
 <p:sld xmlns:a="http://schemas.openxmlformats.org/drawingml/2006/main" xmlns:r="http://schemas.openxmlformats.org/officeDocument/2006/relationships" xmlns:p="http://schemas.openxmlformats.org/presentationml/2006/main">
   <p:cSld>
     <p:spTree>
@@ -6221,7 +9156,7 @@
             <p:spPr>
               <a:xfrm>
                 <a:off x="411479" y="768096"/>
-                <a:ext cx="4615823" cy="1521057"/>
+                <a:ext cx="4615823" cy="1690335"/>
               </a:xfrm>
               <a:prstGeom prst="rect">
                 <a:avLst/>
@@ -6265,6 +9200,16 @@
                     <a:spcPts val="0"/>
                   </a:spcAft>
                 </a:pPr>
+                <a:endParaRPr lang="en-US" sz="1100" i="1" dirty="0">
+                  <a:latin typeface="Cambria Math" panose="02040503050406030204" pitchFamily="18" charset="0"/>
+                </a:endParaRPr>
+              </a:p>
+              <a:p>
+                <a:pPr>
+                  <a:spcAft>
+                    <a:spcPts val="0"/>
+                  </a:spcAft>
+                </a:pPr>
                 <a14:m>
                   <m:oMathPara xmlns:m="http://schemas.openxmlformats.org/officeDocument/2006/math">
                     <m:oMathParaPr>
@@ -6272,82 +9217,82 @@
                     </m:oMathParaPr>
                     <m:oMath xmlns:m="http://schemas.openxmlformats.org/officeDocument/2006/math">
                       <m:r>
-                        <a:rPr lang="en-US" sz="1100" i="1" dirty="0" smtClean="0">
+                        <a:rPr lang="en-US" sz="1100" b="1" i="1" dirty="0" smtClean="0">
                           <a:latin typeface="Cambria Math" panose="02040503050406030204" pitchFamily="18" charset="0"/>
                         </a:rPr>
-                        <m:t>𝐿</m:t>
+                        <m:t>𝑳</m:t>
                       </m:r>
                       <m:r>
-                        <a:rPr lang="en-US" sz="900" i="1" baseline="-25000" dirty="0">
+                        <a:rPr lang="en-US" sz="900" b="1" i="1" baseline="-25000" dirty="0">
                           <a:latin typeface="Cambria Math" panose="02040503050406030204" pitchFamily="18" charset="0"/>
                         </a:rPr>
-                        <m:t>𝐶</m:t>
+                        <m:t>𝑪</m:t>
                       </m:r>
                       <m:r>
-                        <a:rPr lang="en-US" sz="1100" i="1" dirty="0">
+                        <a:rPr lang="en-US" sz="1100" b="1" i="1" dirty="0">
                           <a:latin typeface="Cambria Math" panose="02040503050406030204" pitchFamily="18" charset="0"/>
                         </a:rPr>
                         <m:t> </m:t>
                       </m:r>
                       <m:r>
-                        <a:rPr lang="en-US" sz="1100" i="1" dirty="0" smtClean="0">
+                        <a:rPr lang="en-US" sz="1100" b="1" i="1" dirty="0" smtClean="0">
                           <a:latin typeface="Cambria Math" panose="02040503050406030204" pitchFamily="18" charset="0"/>
                         </a:rPr>
                         <m:t>= </m:t>
                       </m:r>
                       <m:r>
-                        <a:rPr lang="en-US" sz="1100" i="1" dirty="0" smtClean="0">
+                        <a:rPr lang="en-US" sz="1100" b="1" i="1" dirty="0" smtClean="0">
                           <a:latin typeface="Cambria Math" panose="02040503050406030204" pitchFamily="18" charset="0"/>
                         </a:rPr>
-                        <m:t>𝜎</m:t>
+                        <m:t>𝝈</m:t>
                       </m:r>
                       <m:d>
                         <m:dPr>
                           <m:ctrlPr>
-                            <a:rPr lang="ar-AE" sz="1100" i="1" dirty="0">
+                            <a:rPr lang="ar-AE" sz="1100" b="1" i="1" dirty="0">
                               <a:latin typeface="Cambria Math" panose="02040503050406030204" pitchFamily="18" charset="0"/>
                             </a:rPr>
                           </m:ctrlPr>
                         </m:dPr>
                         <m:e>
                           <m:r>
-                            <a:rPr lang="ar-AE" sz="1100" i="1" dirty="0">
+                            <a:rPr lang="ar-AE" sz="1100" b="1" i="1" dirty="0">
                               <a:latin typeface="Cambria Math" panose="02040503050406030204" pitchFamily="18" charset="0"/>
                             </a:rPr>
-                            <m:t>𝛾</m:t>
+                            <m:t>𝜸</m:t>
                           </m:r>
                           <m:d>
                             <m:dPr>
                               <m:ctrlPr>
-                                <a:rPr lang="ar-AE" sz="1100" i="1" dirty="0" smtClean="0">
+                                <a:rPr lang="ar-AE" sz="1100" b="1" i="1" dirty="0" smtClean="0">
                                   <a:latin typeface="Cambria Math" panose="02040503050406030204" pitchFamily="18" charset="0"/>
                                 </a:rPr>
                               </m:ctrlPr>
                             </m:dPr>
                             <m:e>
                               <m:r>
-                                <a:rPr lang="ar-AE" sz="1100" i="1" dirty="0" smtClean="0">
+                                <a:rPr lang="ar-AE" sz="1100" b="1" i="1" dirty="0" smtClean="0">
                                   <a:latin typeface="Cambria Math" panose="02040503050406030204" pitchFamily="18" charset="0"/>
                                 </a:rPr>
-                                <m:t>𝐴</m:t>
+                                <m:t>𝑨</m:t>
                               </m:r>
                               <m:r>
-                                <a:rPr lang="ar-AE" sz="900" i="1" baseline="-25000" dirty="0">
+                                <a:rPr lang="ar-AE" sz="900" b="1" i="1" baseline="-25000" dirty="0">
                                   <a:latin typeface="Cambria Math" panose="02040503050406030204" pitchFamily="18" charset="0"/>
                                 </a:rPr>
-                                <m:t>𝑗</m:t>
+                                <m:t>𝒋</m:t>
                               </m:r>
                               <m:r>
-                                <a:rPr lang="ar-AE" sz="1100" i="1" dirty="0">
+                                <a:rPr lang="ar-AE" sz="1100" b="1" i="1" dirty="0">
                                   <a:latin typeface="Cambria Math" panose="02040503050406030204" pitchFamily="18" charset="0"/>
                                 </a:rPr>
                                 <m:t> − </m:t>
                               </m:r>
                               <m:r>
-                                <a:rPr lang="ar-AE" sz="1100" i="1" dirty="0">
+                                <a:rPr lang="ar-AE" sz="1100" b="1" i="1" dirty="0">
                                   <a:latin typeface="Cambria Math" panose="02040503050406030204" pitchFamily="18" charset="0"/>
                                 </a:rPr>
-                                <m:t>𝜃</m:t>
+                                <m:t>𝜽</m:t>
                               </m:r>
                             </m:e>
                           </m:d>
@@ -6390,7 +9335,7 @@
                       <a:rPr lang="ar-AE" sz="1000" i="1" dirty="0" smtClean="0">
                         <a:latin typeface="Cambria Math" panose="02040503050406030204" pitchFamily="18" charset="0"/>
                       </a:rPr>
-                      <m:t>=8, </m:t>
+                      <m:t>=8,  </m:t>
                     </m:r>
                     <m:r>
                       <a:rPr lang="ar-AE" sz="1000" i="1" dirty="0" smtClean="0">
@@ -6626,7 +9571,7 @@
             <p:spPr>
               <a:xfrm>
                 <a:off x="411479" y="768096"/>
-                <a:ext cx="4615823" cy="1521057"/>
+                <a:ext cx="4615823" cy="1690335"/>
               </a:xfrm>
               <a:prstGeom prst="rect">
                 <a:avLst/>
@@ -6634,7 +9579,7 @@
               <a:blipFill>
                 <a:blip r:embed="rId3"/>
                 <a:stretch>
-                  <a:fillRect b="-1653"/>
+                  <a:fillRect b="-1493"/>
                 </a:stretch>
               </a:blipFill>
             </p:spPr>
@@ -6710,7 +9655,7 @@
                   </a:spcAft>
                 </a:pPr>
                 <a:r>
-                  <a:rPr sz="900" dirty="0"/>
+                  <a:rPr lang="en-US" sz="900" dirty="0"/>
                   <a:t>OAT: soft </a:t>
                 </a:r>
                 <a14:m>
@@ -6725,7 +9670,7 @@
                       <a:rPr lang="en-US" sz="900" i="1" dirty="0" smtClean="0">
                         <a:latin typeface="Cambria Math" panose="02040503050406030204" pitchFamily="18" charset="0"/>
                       </a:rPr>
-                      <m:t>=8, </m:t>
+                      <m:t>=8,  </m:t>
                     </m:r>
                     <m:r>
                       <a:rPr lang="en-US" sz="900" i="1" dirty="0" smtClean="0">
@@ -6737,7 +9682,7 @@
                       <a:rPr lang="en-US" sz="900" i="1" dirty="0" smtClean="0">
                         <a:latin typeface="Cambria Math" panose="02040503050406030204" pitchFamily="18" charset="0"/>
                       </a:rPr>
-                      <m:t>=0.55, </m:t>
+                      <m:t>=0.55,  </m:t>
                     </m:r>
                     <m:r>
                       <a:rPr lang="en-US" sz="900" i="1" dirty="0" smtClean="0">
@@ -6754,7 +9699,7 @@
                   </m:oMath>
                 </a14:m>
                 <a:r>
-                  <a:rPr sz="900" dirty="0"/>
+                  <a:rPr lang="en-US" sz="900" dirty="0"/>
                   <a:t>fixed; only </a:t>
                 </a:r>
                 <a14:m>
@@ -6768,7 +9713,7 @@
                   </m:oMath>
                 </a14:m>
                 <a:r>
-                  <a:rPr sz="900" dirty="0"/>
+                  <a:rPr lang="en-US" sz="900" dirty="0"/>
                   <a:t> in </a:t>
                 </a:r>
                 <a14:m>
@@ -6824,7 +9769,7 @@
                   </m:oMath>
                 </a14:m>
                 <a:r>
-                  <a:rPr sz="900" dirty="0"/>
+                  <a:rPr lang="en-US" sz="900" dirty="0"/>
                   <a:t>changes.</a:t>
                 </a:r>
               </a:p>
@@ -6854,7 +9799,7 @@
                   </m:oMath>
                 </a14:m>
                 <a:r>
-                  <a:rPr sz="900" dirty="0"/>
+                  <a:rPr lang="en-US" sz="900" dirty="0"/>
                   <a:t>: mid-pool hump (peak bin </a:t>
                 </a:r>
                 <a14:m>
@@ -6874,7 +9819,7 @@
                   </m:oMath>
                 </a14:m>
                 <a:r>
-                  <a:rPr sz="900" dirty="0"/>
+                  <a:rPr lang="en-US" sz="900" dirty="0"/>
                   <a:t>).</a:t>
                 </a:r>
               </a:p>
@@ -6910,7 +9855,7 @@
                   </m:oMath>
                 </a14:m>
                 <a:r>
-                  <a:rPr sz="900" dirty="0"/>
+                  <a:rPr lang="en-US" sz="900" dirty="0"/>
                   <a:t>(539 default): similar hump, slightly higher peak rate.</a:t>
                 </a:r>
               </a:p>
@@ -6940,9 +9885,10 @@
                   </m:oMath>
                 </a14:m>
                 <a:r>
-                  <a:rPr sz="900" dirty="0"/>
+                  <a:rPr lang="en-US" sz="900" dirty="0"/>
                   <a:t>: top bins dominate — curve becomes monotone-increasing at the elite edge.</a:t>
                 </a:r>
+                <a:endParaRPr sz="900" dirty="0"/>
               </a:p>
             </p:txBody>
           </p:sp>
@@ -7181,7 +10127,1265 @@
 </p:sld>
 </file>
 
-<file path=ppt/slides/slide5.xml><?xml version="1.0" encoding="utf-8"?>
+<file path=ppt/slides/slide6.xml><?xml version="1.0" encoding="utf-8"?>
+<p:sld xmlns:a="http://schemas.openxmlformats.org/drawingml/2006/main" xmlns:r="http://schemas.openxmlformats.org/officeDocument/2006/relationships" xmlns:p="http://schemas.openxmlformats.org/presentationml/2006/main">
+  <p:cSld>
+    <p:spTree>
+      <p:nvGrpSpPr>
+        <p:cNvPr id="1" name="">
+          <a:extLst>
+            <a:ext uri="{FF2B5EF4-FFF2-40B4-BE49-F238E27FC236}">
+              <a16:creationId xmlns:a16="http://schemas.microsoft.com/office/drawing/2014/main" id="{175E311A-4434-F6F0-8F94-73C67C39A449}"/>
+            </a:ext>
+          </a:extLst>
+        </p:cNvPr>
+        <p:cNvGrpSpPr/>
+        <p:nvPr/>
+      </p:nvGrpSpPr>
+      <p:grpSpPr>
+        <a:xfrm>
+          <a:off x="0" y="0"/>
+          <a:ext cx="0" cy="0"/>
+          <a:chOff x="0" y="0"/>
+          <a:chExt cx="0" cy="0"/>
+        </a:xfrm>
+      </p:grpSpPr>
+      <p:pic>
+        <p:nvPicPr>
+          <p:cNvPr id="4" name="Picture 3">
+            <a:extLst>
+              <a:ext uri="{FF2B5EF4-FFF2-40B4-BE49-F238E27FC236}">
+                <a16:creationId xmlns:a16="http://schemas.microsoft.com/office/drawing/2014/main" id="{C75B8C41-7DF7-E2AC-9273-4A08C9AA69E0}"/>
+              </a:ext>
+            </a:extLst>
+          </p:cNvPr>
+          <p:cNvPicPr>
+            <a:picLocks noChangeAspect="1"/>
+          </p:cNvPicPr>
+          <p:nvPr/>
+        </p:nvPicPr>
+        <p:blipFill>
+          <a:blip r:embed="rId2"/>
+          <a:srcRect/>
+          <a:stretch/>
+        </p:blipFill>
+        <p:spPr>
+          <a:xfrm>
+            <a:off x="5015244" y="1301496"/>
+            <a:ext cx="6566437" cy="3895344"/>
+          </a:xfrm>
+          <a:prstGeom prst="rect">
+            <a:avLst/>
+          </a:prstGeom>
+        </p:spPr>
+      </p:pic>
+      <mc:AlternateContent xmlns:mc="http://schemas.openxmlformats.org/markup-compatibility/2006">
+        <mc:Choice xmlns:a14="http://schemas.microsoft.com/office/drawing/2010/main" Requires="a14">
+          <p:sp>
+            <p:nvSpPr>
+              <p:cNvPr id="2" name="TextBox 1">
+                <a:extLst>
+                  <a:ext uri="{FF2B5EF4-FFF2-40B4-BE49-F238E27FC236}">
+                    <a16:creationId xmlns:a16="http://schemas.microsoft.com/office/drawing/2014/main" id="{72D3A5A5-7FE9-7D3E-559F-4A64A1350D02}"/>
+                  </a:ext>
+                </a:extLst>
+              </p:cNvPr>
+              <p:cNvSpPr txBox="1"/>
+              <p:nvPr/>
+            </p:nvSpPr>
+            <p:spPr>
+              <a:xfrm>
+                <a:off x="411480" y="256032"/>
+                <a:ext cx="6172780" cy="400110"/>
+              </a:xfrm>
+              <a:prstGeom prst="rect">
+                <a:avLst/>
+              </a:prstGeom>
+              <a:noFill/>
+            </p:spPr>
+            <p:txBody>
+              <a:bodyPr wrap="none">
+                <a:spAutoFit/>
+              </a:bodyPr>
+              <a:lstStyle/>
+              <a:p>
+                <a:pPr>
+                  <a:defRPr b="1"/>
+                </a:pPr>
+                <a:r>
+                  <a:rPr sz="2000" dirty="0"/>
+                  <a:t>Phase B — Characterize </a:t>
+                </a:r>
+                <a14:m>
+                  <m:oMath xmlns:m="http://schemas.openxmlformats.org/officeDocument/2006/math">
+                    <m:r>
+                      <a:rPr lang="en-US" sz="2000" i="1" dirty="0" smtClean="0">
+                        <a:latin typeface="Cambria Math" panose="02040503050406030204" pitchFamily="18" charset="0"/>
+                      </a:rPr>
+                      <m:t>𝜃</m:t>
+                    </m:r>
+                    <m:r>
+                      <a:rPr lang="en-US" sz="2000" i="1" dirty="0" smtClean="0">
+                        <a:latin typeface="Cambria Math" panose="02040503050406030204" pitchFamily="18" charset="0"/>
+                      </a:rPr>
+                      <m:t> </m:t>
+                    </m:r>
+                  </m:oMath>
+                </a14:m>
+                <a:r>
+                  <a:rPr sz="2000" dirty="0"/>
+                  <a:t>— panel with </a:t>
+                </a:r>
+                <a14:m>
+                  <m:oMath xmlns:m="http://schemas.openxmlformats.org/officeDocument/2006/math">
+                    <m:r>
+                      <a:rPr lang="en-US" sz="2000" i="1" dirty="0" smtClean="0">
+                        <a:latin typeface="Cambria Math" panose="02040503050406030204" pitchFamily="18" charset="0"/>
+                      </a:rPr>
+                      <m:t>𝐾</m:t>
+                    </m:r>
+                    <m:r>
+                      <a:rPr lang="en-US" sz="2000" i="1" dirty="0" smtClean="0">
+                        <a:latin typeface="Cambria Math" panose="02040503050406030204" pitchFamily="18" charset="0"/>
+                      </a:rPr>
+                      <m:t>/</m:t>
+                    </m:r>
+                    <m:r>
+                      <a:rPr lang="en-US" sz="2000" i="1" dirty="0" smtClean="0">
+                        <a:latin typeface="Cambria Math" panose="02040503050406030204" pitchFamily="18" charset="0"/>
+                      </a:rPr>
+                      <m:t>𝑁</m:t>
+                    </m:r>
+                    <m:r>
+                      <a:rPr lang="en-US" sz="2000" i="1" dirty="0" smtClean="0">
+                        <a:latin typeface="Cambria Math" panose="02040503050406030204" pitchFamily="18" charset="0"/>
+                      </a:rPr>
+                      <m:t> </m:t>
+                    </m:r>
+                  </m:oMath>
+                </a14:m>
+                <a:r>
+                  <a:rPr sz="2000" dirty="0"/>
+                  <a:t>(selectivity)</a:t>
+                </a:r>
+              </a:p>
+            </p:txBody>
+          </p:sp>
+        </mc:Choice>
+        <mc:Fallback>
+          <p:sp>
+            <p:nvSpPr>
+              <p:cNvPr id="2" name="TextBox 1">
+                <a:extLst>
+                  <a:ext uri="{FF2B5EF4-FFF2-40B4-BE49-F238E27FC236}">
+                    <a16:creationId xmlns:a16="http://schemas.microsoft.com/office/drawing/2014/main" id="{72D3A5A5-7FE9-7D3E-559F-4A64A1350D02}"/>
+                  </a:ext>
+                </a:extLst>
+              </p:cNvPr>
+              <p:cNvSpPr txBox="1">
+                <a:spLocks noRot="1" noChangeAspect="1" noMove="1" noResize="1" noEditPoints="1" noAdjustHandles="1" noChangeArrowheads="1" noChangeShapeType="1" noTextEdit="1"/>
+              </p:cNvSpPr>
+              <p:nvPr/>
+            </p:nvSpPr>
+            <p:spPr>
+              <a:xfrm>
+                <a:off x="411480" y="256032"/>
+                <a:ext cx="6172780" cy="400110"/>
+              </a:xfrm>
+              <a:prstGeom prst="rect">
+                <a:avLst/>
+              </a:prstGeom>
+              <a:blipFill>
+                <a:blip r:embed="rId3"/>
+                <a:stretch>
+                  <a:fillRect l="-1027" t="-9375" r="-1027" b="-28125"/>
+                </a:stretch>
+              </a:blipFill>
+            </p:spPr>
+            <p:txBody>
+              <a:bodyPr/>
+              <a:lstStyle/>
+              <a:p>
+                <a:r>
+                  <a:rPr lang="en-US">
+                    <a:noFill/>
+                  </a:rPr>
+                  <a:t> </a:t>
+                </a:r>
+              </a:p>
+            </p:txBody>
+          </p:sp>
+        </mc:Fallback>
+      </mc:AlternateContent>
+      <mc:AlternateContent xmlns:mc="http://schemas.openxmlformats.org/markup-compatibility/2006">
+        <mc:Choice xmlns:a14="http://schemas.microsoft.com/office/drawing/2010/main" Requires="a14">
+          <p:sp>
+            <p:nvSpPr>
+              <p:cNvPr id="3" name="TextBox 2">
+                <a:extLst>
+                  <a:ext uri="{FF2B5EF4-FFF2-40B4-BE49-F238E27FC236}">
+                    <a16:creationId xmlns:a16="http://schemas.microsoft.com/office/drawing/2014/main" id="{ACB2E278-9E3D-FFBF-A763-4CC9CE1D47DF}"/>
+                  </a:ext>
+                </a:extLst>
+              </p:cNvPr>
+              <p:cNvSpPr txBox="1"/>
+              <p:nvPr/>
+            </p:nvSpPr>
+            <p:spPr>
+              <a:xfrm>
+                <a:off x="411480" y="768096"/>
+                <a:ext cx="5154598" cy="1697068"/>
+              </a:xfrm>
+              <a:prstGeom prst="rect">
+                <a:avLst/>
+              </a:prstGeom>
+              <a:noFill/>
+            </p:spPr>
+            <p:txBody>
+              <a:bodyPr wrap="square">
+                <a:spAutoFit/>
+              </a:bodyPr>
+              <a:lstStyle/>
+              <a:p>
+                <a:pPr>
+                  <a:spcAft>
+                    <a:spcPts val="0"/>
+                  </a:spcAft>
+                  <a:defRPr b="1"/>
+                </a:pPr>
+                <a:r>
+                  <a:rPr lang="en-US" sz="1100" dirty="0"/>
+                  <a:t>Characterize </a:t>
+                </a:r>
+                <a14:m>
+                  <m:oMath xmlns:m="http://schemas.openxmlformats.org/officeDocument/2006/math">
+                    <m:r>
+                      <a:rPr lang="en-US" sz="1100" i="1" dirty="0" smtClean="0">
+                        <a:latin typeface="Cambria Math" panose="02040503050406030204" pitchFamily="18" charset="0"/>
+                      </a:rPr>
+                      <m:t>𝜃</m:t>
+                    </m:r>
+                  </m:oMath>
+                </a14:m>
+                <a:r>
+                  <a:rPr lang="en-US" sz="1100" dirty="0"/>
+                  <a:t> — one-at-a-time at 539 baseline (</a:t>
+                </a:r>
+                <a14:m>
+                  <m:oMath xmlns:m="http://schemas.openxmlformats.org/officeDocument/2006/math">
+                    <m:r>
+                      <a:rPr lang="en-US" sz="1100" i="1" dirty="0" smtClean="0">
+                        <a:latin typeface="Cambria Math" panose="02040503050406030204" pitchFamily="18" charset="0"/>
+                      </a:rPr>
+                      <m:t>𝐾</m:t>
+                    </m:r>
+                    <m:r>
+                      <a:rPr lang="en-US" sz="1100" i="1" dirty="0" smtClean="0">
+                        <a:latin typeface="Cambria Math" panose="02040503050406030204" pitchFamily="18" charset="0"/>
+                      </a:rPr>
+                      <m:t>/</m:t>
+                    </m:r>
+                    <m:r>
+                      <a:rPr lang="en-US" sz="1100" i="1" dirty="0" smtClean="0">
+                        <a:latin typeface="Cambria Math" panose="02040503050406030204" pitchFamily="18" charset="0"/>
+                      </a:rPr>
+                      <m:t>𝑁</m:t>
+                    </m:r>
+                    <m:r>
+                      <a:rPr lang="en-US" sz="1100" i="1" dirty="0" smtClean="0">
+                        <a:latin typeface="Cambria Math" panose="02040503050406030204" pitchFamily="18" charset="0"/>
+                      </a:rPr>
+                      <m:t> </m:t>
+                    </m:r>
+                  </m:oMath>
+                </a14:m>
+                <a:r>
+                  <a:rPr lang="en-US" sz="1100" dirty="0"/>
+                  <a:t>varies; assign + score rule fixed)</a:t>
+                </a:r>
+              </a:p>
+              <a:p>
+                <a:pPr>
+                  <a:spcAft>
+                    <a:spcPts val="0"/>
+                  </a:spcAft>
+                </a:pPr>
+                <a:endParaRPr lang="en-US" sz="1100" i="1" dirty="0">
+                  <a:latin typeface="Cambria Math" panose="02040503050406030204" pitchFamily="18" charset="0"/>
+                </a:endParaRPr>
+              </a:p>
+              <a:p>
+                <a:pPr>
+                  <a:spcAft>
+                    <a:spcPts val="0"/>
+                  </a:spcAft>
+                </a:pPr>
+                <a14:m>
+                  <m:oMathPara xmlns:m="http://schemas.openxmlformats.org/officeDocument/2006/math">
+                    <m:oMathParaPr>
+                      <m:jc m:val="centerGroup"/>
+                    </m:oMathParaPr>
+                    <m:oMath xmlns:m="http://schemas.openxmlformats.org/officeDocument/2006/math">
+                      <m:r>
+                        <a:rPr lang="en-US" sz="1100" b="1" i="1" dirty="0" smtClean="0">
+                          <a:latin typeface="Cambria Math" panose="02040503050406030204" pitchFamily="18" charset="0"/>
+                        </a:rPr>
+                        <m:t>𝑳</m:t>
+                      </m:r>
+                      <m:r>
+                        <a:rPr lang="en-US" sz="900" b="1" i="1" baseline="-25000" dirty="0">
+                          <a:latin typeface="Cambria Math" panose="02040503050406030204" pitchFamily="18" charset="0"/>
+                        </a:rPr>
+                        <m:t>𝑪</m:t>
+                      </m:r>
+                      <m:r>
+                        <a:rPr lang="en-US" sz="1100" b="1" i="1" dirty="0">
+                          <a:latin typeface="Cambria Math" panose="02040503050406030204" pitchFamily="18" charset="0"/>
+                        </a:rPr>
+                        <m:t> =</m:t>
+                      </m:r>
+                      <m:sSub>
+                        <m:sSubPr>
+                          <m:ctrlPr>
+                            <a:rPr lang="en-US" sz="1100" b="1" i="0" dirty="0" smtClean="0">
+                              <a:latin typeface="Cambria Math" panose="02040503050406030204" pitchFamily="18" charset="0"/>
+                            </a:rPr>
+                          </m:ctrlPr>
+                        </m:sSubPr>
+                        <m:e>
+                          <m:r>
+                            <a:rPr lang="en-US" sz="1100" b="1" i="0" dirty="0" smtClean="0">
+                              <a:latin typeface="Cambria Math" panose="02040503050406030204" pitchFamily="18" charset="0"/>
+                            </a:rPr>
+                            <m:t>𝐦𝐞𝐚𝐧</m:t>
+                          </m:r>
+                        </m:e>
+                        <m:sub>
+                          <m:r>
+                            <a:rPr lang="en-US" sz="1100" b="1" i="0" dirty="0" smtClean="0">
+                              <a:latin typeface="Cambria Math" panose="02040503050406030204" pitchFamily="18" charset="0"/>
+                            </a:rPr>
+                            <m:t>𝐣</m:t>
+                          </m:r>
+                          <m:r>
+                            <a:rPr lang="en-US" sz="1100" b="1" i="1" dirty="0" smtClean="0">
+                              <a:latin typeface="Cambria Math" panose="02040503050406030204" pitchFamily="18" charset="0"/>
+                              <a:ea typeface="Cambria Math" panose="02040503050406030204" pitchFamily="18" charset="0"/>
+                            </a:rPr>
+                            <m:t>≠</m:t>
+                          </m:r>
+                          <m:r>
+                            <a:rPr lang="en-US" sz="1100" b="1" i="0" dirty="0" smtClean="0">
+                              <a:latin typeface="Cambria Math" panose="02040503050406030204" pitchFamily="18" charset="0"/>
+                              <a:ea typeface="Cambria Math" panose="02040503050406030204" pitchFamily="18" charset="0"/>
+                            </a:rPr>
+                            <m:t>𝐢</m:t>
+                          </m:r>
+                        </m:sub>
+                      </m:sSub>
+                      <m:r>
+                        <a:rPr lang="en-US" sz="1100" b="1" i="1" dirty="0" smtClean="0">
+                          <a:latin typeface="Cambria Math" panose="02040503050406030204" pitchFamily="18" charset="0"/>
+                        </a:rPr>
+                        <m:t> </m:t>
+                      </m:r>
+                      <m:r>
+                        <a:rPr lang="en-US" sz="1100" b="1" i="1" dirty="0" err="1" smtClean="0">
+                          <a:latin typeface="Cambria Math" panose="02040503050406030204" pitchFamily="18" charset="0"/>
+                        </a:rPr>
+                        <m:t>𝝈</m:t>
+                      </m:r>
+                      <m:d>
+                        <m:dPr>
+                          <m:ctrlPr>
+                            <a:rPr lang="ar-AE" sz="1100" b="1" i="1" dirty="0" smtClean="0">
+                              <a:latin typeface="Cambria Math" panose="02040503050406030204" pitchFamily="18" charset="0"/>
+                            </a:rPr>
+                          </m:ctrlPr>
+                        </m:dPr>
+                        <m:e>
+                          <m:r>
+                            <a:rPr lang="ar-AE" sz="1100" b="1" i="1" dirty="0" smtClean="0">
+                              <a:latin typeface="Cambria Math" panose="02040503050406030204" pitchFamily="18" charset="0"/>
+                            </a:rPr>
+                            <m:t>𝜸</m:t>
+                          </m:r>
+                          <m:d>
+                            <m:dPr>
+                              <m:ctrlPr>
+                                <a:rPr lang="ar-AE" sz="1100" b="1" i="1" dirty="0" smtClean="0">
+                                  <a:latin typeface="Cambria Math" panose="02040503050406030204" pitchFamily="18" charset="0"/>
+                                </a:rPr>
+                              </m:ctrlPr>
+                            </m:dPr>
+                            <m:e>
+                              <m:r>
+                                <a:rPr lang="ar-AE" sz="1100" b="1" i="1" dirty="0">
+                                  <a:latin typeface="Cambria Math" panose="02040503050406030204" pitchFamily="18" charset="0"/>
+                                </a:rPr>
+                                <m:t>𝑨</m:t>
+                              </m:r>
+                              <m:r>
+                                <a:rPr lang="ar-AE" sz="900" b="1" i="1" baseline="-25000" dirty="0">
+                                  <a:latin typeface="Cambria Math" panose="02040503050406030204" pitchFamily="18" charset="0"/>
+                                </a:rPr>
+                                <m:t>𝒋</m:t>
+                              </m:r>
+                              <m:r>
+                                <a:rPr lang="ar-AE" sz="1100" b="1" i="1" dirty="0">
+                                  <a:latin typeface="Cambria Math" panose="02040503050406030204" pitchFamily="18" charset="0"/>
+                                </a:rPr>
+                                <m:t> − </m:t>
+                              </m:r>
+                              <m:r>
+                                <a:rPr lang="ar-AE" sz="1100" b="1" i="1" dirty="0" smtClean="0">
+                                  <a:latin typeface="Cambria Math" panose="02040503050406030204" pitchFamily="18" charset="0"/>
+                                </a:rPr>
+                                <m:t>𝜽</m:t>
+                              </m:r>
+                            </m:e>
+                          </m:d>
+                        </m:e>
+                      </m:d>
+                    </m:oMath>
+                  </m:oMathPara>
+                </a14:m>
+                <a:endParaRPr lang="ar-AE" sz="1100" b="1" i="1" dirty="0">
+                  <a:latin typeface="Cambria Math" panose="02040503050406030204" pitchFamily="18" charset="0"/>
+                </a:endParaRPr>
+              </a:p>
+              <a:p>
+                <a:pPr>
+                  <a:spcAft>
+                    <a:spcPts val="0"/>
+                  </a:spcAft>
+                </a:pPr>
+                <a14:m/>
+              </a:p>
+              <a:p>
+                <a:pPr marL="171450" indent="-171450">
+                  <a:lnSpc>
+                    <a:spcPct val="150000"/>
+                  </a:lnSpc>
+                  <a:spcAft>
+                    <a:spcPts val="0"/>
+                  </a:spcAft>
+                  <a:buFont typeface="Arial" panose="020B0604020202020204" pitchFamily="34" charset="0"/>
+                  <a:buChar char="•"/>
+                </a:pPr>
+                <a:r>
+                  <a:rPr lang="en-US" sz="1000" dirty="0"/>
+                  <a:t>fixed</a:t>
+                </a:r>
+              </a:p>
+              <a:p>
+                <a:pPr marL="171450" indent="-171450">
+                  <a:lnSpc>
+                    <a:spcPct val="150000"/>
+                  </a:lnSpc>
+                  <a:spcAft>
+                    <a:spcPts val="0"/>
+                  </a:spcAft>
+                  <a:buFont typeface="Arial" panose="020B0604020202020204" pitchFamily="34" charset="0"/>
+                  <a:buChar char="•"/>
+                </a:pPr>
+                <a:r>
+                  <a:rPr lang="en-US" sz="1000" dirty="0"/>
+                  <a:t> </a:t>
+                </a:r>
+                <a14:m/>
+              </a:p>
+              <a:p>
+                <a:pPr marL="171450" indent="-171450">
+                  <a:lnSpc>
+                    <a:spcPct val="150000"/>
+                  </a:lnSpc>
+                  <a:spcAft>
+                    <a:spcPts val="0"/>
+                  </a:spcAft>
+                  <a:buFont typeface="Arial" panose="020B0604020202020204" pitchFamily="34" charset="0"/>
+                  <a:buChar char="•"/>
+                </a:pPr>
+                <a:r>
+                  <a:rPr lang="en-US" sz="1000" dirty="0"/>
+                  <a:t>— heatmap = peak pool-mean bin</a:t>
+                </a:r>
+              </a:p>
+              <a:p>
+                <a:pPr marL="171450" indent="-171450">
+                  <a:lnSpc>
+                    <a:spcPct val="150000"/>
+                  </a:lnSpc>
+                  <a:spcAft>
+                    <a:spcPts val="0"/>
+                  </a:spcAft>
+                  <a:buFont typeface="Arial" panose="020B0604020202020204" pitchFamily="34" charset="0"/>
+                  <a:buChar char="•"/>
+                </a:pPr>
+                <a:r>
+                  <a:rPr lang="en-US" sz="1000" dirty="0"/>
+                  <a:t>Readout: where the inverted-</a:t>
+                </a:r>
+                <a:r>
+                  <a:rPr lang="en-US" sz="1000" i="1" dirty="0">
+                    <a:latin typeface="Cambria Math"/>
+                  </a:rPr>
+                  <a:t>U</a:t>
+                </a:r>
+                <a:r>
+                  <a:rPr lang="en-US" sz="1000" dirty="0"/>
+                  <a:t> peak sits vs selectivity</a:t>
+                </a:r>
+                <a:endParaRPr sz="1000" dirty="0"/>
+              </a:p>
+            </p:txBody>
+          </p:sp>
+        </mc:Choice>
+        <mc:Fallback>
+          <p:sp>
+            <p:nvSpPr>
+              <p:cNvPr id="3" name="TextBox 2">
+                <a:extLst>
+                  <a:ext uri="{FF2B5EF4-FFF2-40B4-BE49-F238E27FC236}">
+                    <a16:creationId xmlns:a16="http://schemas.microsoft.com/office/drawing/2014/main" id="{ACB2E278-9E3D-FFBF-A763-4CC9CE1D47DF}"/>
+                  </a:ext>
+                </a:extLst>
+              </p:cNvPr>
+              <p:cNvSpPr txBox="1">
+                <a:spLocks noRot="1" noChangeAspect="1" noMove="1" noResize="1" noEditPoints="1" noAdjustHandles="1" noChangeArrowheads="1" noChangeShapeType="1" noTextEdit="1"/>
+              </p:cNvSpPr>
+              <p:nvPr/>
+            </p:nvSpPr>
+            <p:spPr>
+              <a:xfrm>
+                <a:off x="411480" y="768096"/>
+                <a:ext cx="5154598" cy="1697068"/>
+              </a:xfrm>
+              <a:prstGeom prst="rect">
+                <a:avLst/>
+              </a:prstGeom>
+              <a:blipFill>
+                <a:blip r:embed="rId4"/>
+                <a:stretch>
+                  <a:fillRect b="-1493"/>
+                </a:stretch>
+              </a:blipFill>
+            </p:spPr>
+            <p:txBody>
+              <a:bodyPr/>
+              <a:lstStyle/>
+              <a:p>
+                <a:r>
+                  <a:rPr lang="en-US">
+                    <a:noFill/>
+                  </a:rPr>
+                  <a:t> </a:t>
+                </a:r>
+              </a:p>
+            </p:txBody>
+          </p:sp>
+        </mc:Fallback>
+      </mc:AlternateContent>
+      <mc:AlternateContent xmlns:mc="http://schemas.openxmlformats.org/markup-compatibility/2006">
+        <mc:Choice xmlns:a14="http://schemas.microsoft.com/office/drawing/2010/main" Requires="a14">
+          <p:sp>
+            <p:nvSpPr>
+              <p:cNvPr id="5" name="TextBox 4">
+                <a:extLst>
+                  <a:ext uri="{FF2B5EF4-FFF2-40B4-BE49-F238E27FC236}">
+                    <a16:creationId xmlns:a16="http://schemas.microsoft.com/office/drawing/2014/main" id="{6D5CD7F4-89DE-1758-936C-551CCC8DF70D}"/>
+                  </a:ext>
+                </a:extLst>
+              </p:cNvPr>
+              <p:cNvSpPr txBox="1"/>
+              <p:nvPr/>
+            </p:nvSpPr>
+            <p:spPr>
+              <a:xfrm>
+                <a:off x="411480" y="4681728"/>
+                <a:ext cx="11368735" cy="784830"/>
+              </a:xfrm>
+              <a:prstGeom prst="rect">
+                <a:avLst/>
+              </a:prstGeom>
+              <a:noFill/>
+            </p:spPr>
+            <p:txBody>
+              <a:bodyPr wrap="square">
+                <a:spAutoFit/>
+              </a:bodyPr>
+              <a:lstStyle/>
+              <a:p>
+                <a:pPr>
+                  <a:spcBef>
+                    <a:spcPts val="0"/>
+                  </a:spcBef>
+                  <a:spcAft>
+                    <a:spcPts val="0"/>
+                  </a:spcAft>
+                </a:pPr>
+                <a:r>
+                  <a:rPr lang="en-US" sz="900" dirty="0"/>
+                  <a:t>Grid: </a:t>
+                </a:r>
+                <a14:m>
+                  <m:oMath xmlns:m="http://schemas.openxmlformats.org/officeDocument/2006/math">
+                    <m:r>
+                      <a:rPr lang="en-US" sz="900" i="1" dirty="0" smtClean="0">
+                        <a:latin typeface="Cambria Math" panose="02040503050406030204" pitchFamily="18" charset="0"/>
+                      </a:rPr>
+                      <m:t>𝜃</m:t>
+                    </m:r>
+                    <m:r>
+                      <a:rPr lang="en-US" sz="900" i="1" dirty="0" smtClean="0">
+                        <a:latin typeface="Cambria Math" panose="02040503050406030204" pitchFamily="18" charset="0"/>
+                      </a:rPr>
+                      <m:t> ∈ </m:t>
+                    </m:r>
+                    <m:d>
+                      <m:dPr>
+                        <m:begChr m:val="{"/>
+                        <m:endChr m:val="}"/>
+                        <m:ctrlPr>
+                          <a:rPr lang="ar-AE" sz="900" i="1" dirty="0">
+                            <a:latin typeface="Cambria Math" panose="02040503050406030204" pitchFamily="18" charset="0"/>
+                          </a:rPr>
+                        </m:ctrlPr>
+                      </m:dPr>
+                      <m:e>
+                        <m:r>
+                          <a:rPr lang="ar-AE" sz="900" i="1" dirty="0">
+                            <a:latin typeface="Cambria Math" panose="02040503050406030204" pitchFamily="18" charset="0"/>
+                          </a:rPr>
+                          <m:t>0.50, 0.72, 0.90</m:t>
+                        </m:r>
+                      </m:e>
+                    </m:d>
+                    <m:r>
+                      <a:rPr lang="en-US" sz="900" b="0" i="1" dirty="0" smtClean="0">
+                        <a:latin typeface="Cambria Math" panose="02040503050406030204" pitchFamily="18" charset="0"/>
+                      </a:rPr>
+                      <m:t> </m:t>
+                    </m:r>
+                    <m:r>
+                      <a:rPr lang="ar-AE" sz="900" i="1" dirty="0" smtClean="0">
+                        <a:latin typeface="Cambria Math" panose="02040503050406030204" pitchFamily="18" charset="0"/>
+                      </a:rPr>
+                      <m:t>×</m:t>
+                    </m:r>
+                    <m:r>
+                      <a:rPr lang="en-US" sz="900" b="0" i="1" dirty="0" smtClean="0">
+                        <a:latin typeface="Cambria Math" panose="02040503050406030204" pitchFamily="18" charset="0"/>
+                      </a:rPr>
+                      <m:t> </m:t>
+                    </m:r>
+                    <m:r>
+                      <a:rPr lang="ar-AE" sz="900" i="1" dirty="0">
+                        <a:latin typeface="Cambria Math" panose="02040503050406030204" pitchFamily="18" charset="0"/>
+                      </a:rPr>
+                      <m:t>𝐾</m:t>
+                    </m:r>
+                    <m:r>
+                      <a:rPr lang="ar-AE" sz="900" i="1" dirty="0">
+                        <a:latin typeface="Cambria Math" panose="02040503050406030204" pitchFamily="18" charset="0"/>
+                      </a:rPr>
+                      <m:t>/</m:t>
+                    </m:r>
+                    <m:r>
+                      <a:rPr lang="ar-AE" sz="900" i="1" dirty="0">
+                        <a:latin typeface="Cambria Math" panose="02040503050406030204" pitchFamily="18" charset="0"/>
+                      </a:rPr>
+                      <m:t>𝑁</m:t>
+                    </m:r>
+                    <m:r>
+                      <a:rPr lang="ar-AE" sz="900" i="1" dirty="0">
+                        <a:latin typeface="Cambria Math" panose="02040503050406030204" pitchFamily="18" charset="0"/>
+                      </a:rPr>
+                      <m:t> ∈ {1%, 10%, 4</m:t>
+                    </m:r>
+                    <m:r>
+                      <a:rPr lang="ar-AE" sz="900" i="1" dirty="0" smtClean="0">
+                        <a:latin typeface="Cambria Math" panose="02040503050406030204" pitchFamily="18" charset="0"/>
+                      </a:rPr>
+                      <m:t>0%} </m:t>
+                    </m:r>
+                  </m:oMath>
+                </a14:m>
+                <a:r>
+                  <a:rPr lang="en-US" sz="900" dirty="0"/>
+                  <a:t>on </a:t>
+                </a:r>
+                <a:r>
+                  <a:rPr lang="en-US" sz="900" i="1" dirty="0">
+                    <a:latin typeface="Cambria Math"/>
+                  </a:rPr>
+                  <a:t>N=5600</a:t>
+                </a:r>
+                <a:r>
+                  <a:rPr lang="en-US" sz="900" dirty="0"/>
+                  <a:t>.</a:t>
+                </a:r>
+              </a:p>
+              <a:p>
+                <a:pPr>
+                  <a:spcBef>
+                    <a:spcPts val="0"/>
+                  </a:spcBef>
+                  <a:spcAft>
+                    <a:spcPts val="0"/>
+                  </a:spcAft>
+                </a:pPr>
+                <a:r>
+                  <a:rPr lang="en-US" sz="900" dirty="0"/>
+                  <a:t>At</a:t>
+                </a:r>
+                <a14:m>
+                  <m:oMath xmlns:m="http://schemas.openxmlformats.org/officeDocument/2006/math">
+                    <m:r>
+                      <a:rPr lang="en-US" sz="900" i="1" dirty="0" smtClean="0">
+                        <a:latin typeface="Cambria Math" panose="02040503050406030204" pitchFamily="18" charset="0"/>
+                      </a:rPr>
+                      <m:t> </m:t>
+                    </m:r>
+                    <m:r>
+                      <a:rPr lang="en-US" sz="900" i="1" dirty="0" smtClean="0">
+                        <a:latin typeface="Cambria Math" panose="02040503050406030204" pitchFamily="18" charset="0"/>
+                      </a:rPr>
+                      <m:t>𝐾</m:t>
+                    </m:r>
+                    <m:r>
+                      <a:rPr lang="en-US" sz="900" i="1" dirty="0" smtClean="0">
+                        <a:latin typeface="Cambria Math" panose="02040503050406030204" pitchFamily="18" charset="0"/>
+                      </a:rPr>
+                      <m:t>/</m:t>
+                    </m:r>
+                    <m:r>
+                      <a:rPr lang="en-US" sz="900" i="1" dirty="0" smtClean="0">
+                        <a:latin typeface="Cambria Math" panose="02040503050406030204" pitchFamily="18" charset="0"/>
+                      </a:rPr>
+                      <m:t>𝑁</m:t>
+                    </m:r>
+                    <m:r>
+                      <a:rPr lang="en-US" sz="900" i="1" dirty="0" smtClean="0">
+                        <a:latin typeface="Cambria Math" panose="02040503050406030204" pitchFamily="18" charset="0"/>
+                      </a:rPr>
+                      <m:t>=1%: </m:t>
+                    </m:r>
+                  </m:oMath>
+                </a14:m>
+                <a:r>
+                  <a:rPr lang="en-US" sz="900" dirty="0"/>
+                  <a:t>peak bin rises </a:t>
+                </a:r>
+                <a14:m>
+                  <m:oMath xmlns:m="http://schemas.openxmlformats.org/officeDocument/2006/math">
+                    <m:r>
+                      <a:rPr lang="en-US" sz="900" i="1" dirty="0" smtClean="0">
+                        <a:latin typeface="Cambria Math" panose="02040503050406030204" pitchFamily="18" charset="0"/>
+                      </a:rPr>
+                      <m:t>6 →9 →12 </m:t>
+                    </m:r>
+                  </m:oMath>
+                </a14:m>
+                <a:r>
+                  <a:rPr lang="en-US" sz="900" dirty="0"/>
+                  <a:t>as </a:t>
+                </a:r>
+                <a14:m>
+                  <m:oMath xmlns:m="http://schemas.openxmlformats.org/officeDocument/2006/math">
+                    <m:r>
+                      <a:rPr lang="en-US" sz="900" i="1" dirty="0" smtClean="0">
+                        <a:latin typeface="Cambria Math" panose="02040503050406030204" pitchFamily="18" charset="0"/>
+                      </a:rPr>
+                      <m:t>𝜃</m:t>
+                    </m:r>
+                    <m:r>
+                      <a:rPr lang="en-US" sz="900" i="1" dirty="0" smtClean="0">
+                        <a:latin typeface="Cambria Math" panose="02040503050406030204" pitchFamily="18" charset="0"/>
+                      </a:rPr>
+                      <m:t> </m:t>
+                    </m:r>
+                  </m:oMath>
+                </a14:m>
+                <a:r>
+                  <a:rPr lang="en-US" sz="900" dirty="0"/>
+                  <a:t>increases.</a:t>
+                </a:r>
+              </a:p>
+              <a:p>
+                <a:pPr>
+                  <a:spcBef>
+                    <a:spcPts val="0"/>
+                  </a:spcBef>
+                  <a:spcAft>
+                    <a:spcPts val="0"/>
+                  </a:spcAft>
+                </a:pPr>
+                <a14:m>
+                  <m:oMath xmlns:m="http://schemas.openxmlformats.org/officeDocument/2006/math">
+                    <m:r>
+                      <m:rPr>
+                        <m:sty m:val="p"/>
+                      </m:rPr>
+                      <a:rPr lang="en-US" sz="900" i="0" dirty="0" smtClean="0"/>
+                      <m:t>At</m:t>
+                    </m:r>
+                    <m:r>
+                      <a:rPr lang="en-US" sz="900" i="0" dirty="0" smtClean="0"/>
+                      <m:t> </m:t>
+                    </m:r>
+                    <m:r>
+                      <a:rPr lang="en-US" sz="900" i="1" dirty="0" smtClean="0">
+                        <a:latin typeface="Cambria Math" panose="02040503050406030204" pitchFamily="18" charset="0"/>
+                      </a:rPr>
+                      <m:t>𝐾</m:t>
+                    </m:r>
+                    <m:r>
+                      <a:rPr lang="en-US" sz="900" i="1" dirty="0" smtClean="0">
+                        <a:latin typeface="Cambria Math" panose="02040503050406030204" pitchFamily="18" charset="0"/>
+                      </a:rPr>
+                      <m:t>/</m:t>
+                    </m:r>
+                    <m:r>
+                      <a:rPr lang="en-US" sz="900" i="1" dirty="0" smtClean="0">
+                        <a:latin typeface="Cambria Math" panose="02040503050406030204" pitchFamily="18" charset="0"/>
+                      </a:rPr>
+                      <m:t>𝑁</m:t>
+                    </m:r>
+                    <m:r>
+                      <a:rPr lang="en-US" sz="900" i="1" dirty="0" smtClean="0">
+                        <a:latin typeface="Cambria Math" panose="02040503050406030204" pitchFamily="18" charset="0"/>
+                      </a:rPr>
+                      <m:t>=10%: </m:t>
+                    </m:r>
+                    <m:r>
+                      <a:rPr lang="en-US" sz="900" i="1" dirty="0" smtClean="0">
+                        <a:latin typeface="Cambria Math" panose="02040503050406030204" pitchFamily="18" charset="0"/>
+                      </a:rPr>
+                      <m:t>𝜃</m:t>
+                    </m:r>
+                    <m:r>
+                      <a:rPr lang="en-US" sz="900" i="1" dirty="0" smtClean="0">
+                        <a:latin typeface="Cambria Math" panose="02040503050406030204" pitchFamily="18" charset="0"/>
+                      </a:rPr>
+                      <m:t>=0.90 </m:t>
+                    </m:r>
+                  </m:oMath>
+                </a14:m>
+                <a:r>
+                  <a:rPr lang="en-US" sz="900" dirty="0"/>
+                  <a:t>pushes peak to bin </a:t>
+                </a:r>
+                <a14:m>
+                  <m:oMath xmlns:m="http://schemas.openxmlformats.org/officeDocument/2006/math">
+                    <m:r>
+                      <a:rPr lang="en-US" sz="900" i="1" dirty="0" smtClean="0">
+                        <a:latin typeface="Cambria Math" panose="02040503050406030204" pitchFamily="18" charset="0"/>
+                      </a:rPr>
+                      <m:t>16</m:t>
+                    </m:r>
+                  </m:oMath>
+                </a14:m>
+                <a:r>
+                  <a:rPr lang="en-US" sz="900" dirty="0"/>
+                  <a:t> (top saturation).</a:t>
+                </a:r>
+              </a:p>
+              <a:p>
+                <a:pPr>
+                  <a:spcBef>
+                    <a:spcPts val="0"/>
+                  </a:spcBef>
+                  <a:spcAft>
+                    <a:spcPts val="0"/>
+                  </a:spcAft>
+                </a:pPr>
+                <a:r>
+                  <a:rPr lang="en-US" sz="900" dirty="0"/>
+                  <a:t>At </a:t>
+                </a:r>
+                <a14:m>
+                  <m:oMath xmlns:m="http://schemas.openxmlformats.org/officeDocument/2006/math">
+                    <m:r>
+                      <a:rPr lang="en-US" sz="900" i="1" dirty="0" smtClean="0">
+                        <a:latin typeface="Cambria Math" panose="02040503050406030204" pitchFamily="18" charset="0"/>
+                      </a:rPr>
+                      <m:t>𝐾</m:t>
+                    </m:r>
+                    <m:r>
+                      <a:rPr lang="en-US" sz="900" i="1" dirty="0" smtClean="0">
+                        <a:latin typeface="Cambria Math" panose="02040503050406030204" pitchFamily="18" charset="0"/>
+                      </a:rPr>
+                      <m:t>/</m:t>
+                    </m:r>
+                    <m:r>
+                      <a:rPr lang="en-US" sz="900" i="1" dirty="0" smtClean="0">
+                        <a:latin typeface="Cambria Math" panose="02040503050406030204" pitchFamily="18" charset="0"/>
+                      </a:rPr>
+                      <m:t>𝑁</m:t>
+                    </m:r>
+                    <m:r>
+                      <a:rPr lang="en-US" sz="900" i="1" dirty="0" smtClean="0">
+                        <a:latin typeface="Cambria Math" panose="02040503050406030204" pitchFamily="18" charset="0"/>
+                      </a:rPr>
+                      <m:t>=40%</m:t>
+                    </m:r>
+                  </m:oMath>
+                </a14:m>
+                <a:r>
+                  <a:rPr lang="en-US" sz="900" dirty="0"/>
+                  <a:t>: all arms peak at bin </a:t>
+                </a:r>
+                <a14:m>
+                  <m:oMath xmlns:m="http://schemas.openxmlformats.org/officeDocument/2006/math">
+                    <m:r>
+                      <a:rPr lang="en-US" sz="900" i="1" dirty="0" smtClean="0">
+                        <a:latin typeface="Cambria Math" panose="02040503050406030204" pitchFamily="18" charset="0"/>
+                      </a:rPr>
+                      <m:t>16</m:t>
+                    </m:r>
+                  </m:oMath>
+                </a14:m>
+                <a:r>
+                  <a:rPr lang="en-US" sz="900" dirty="0"/>
+                  <a:t> — selectivity dominates </a:t>
+                </a:r>
+                <a14:m>
+                  <m:oMath xmlns:m="http://schemas.openxmlformats.org/officeDocument/2006/math">
+                    <m:r>
+                      <a:rPr lang="en-US" sz="900" i="1" dirty="0" smtClean="0">
+                        <a:latin typeface="Cambria Math" panose="02040503050406030204" pitchFamily="18" charset="0"/>
+                      </a:rPr>
+                      <m:t>𝜃</m:t>
+                    </m:r>
+                  </m:oMath>
+                </a14:m>
+                <a:r>
+                  <a:rPr lang="en-US" sz="900" dirty="0"/>
+                  <a:t>.</a:t>
+                </a:r>
+              </a:p>
+              <a:p>
+                <a:pPr>
+                  <a:spcBef>
+                    <a:spcPts val="0"/>
+                  </a:spcBef>
+                  <a:spcAft>
+                    <a:spcPts val="0"/>
+                  </a:spcAft>
+                </a:pPr>
+                <a:r>
+                  <a:rPr lang="en-US" sz="900" dirty="0"/>
+                  <a:t>Do not fix </a:t>
+                </a:r>
+                <a14:m>
+                  <m:oMath xmlns:m="http://schemas.openxmlformats.org/officeDocument/2006/math">
+                    <m:r>
+                      <a:rPr lang="en-US" sz="900" i="1" dirty="0" smtClean="0">
+                        <a:latin typeface="Cambria Math" panose="02040503050406030204" pitchFamily="18" charset="0"/>
+                      </a:rPr>
+                      <m:t>𝜃</m:t>
+                    </m:r>
+                    <m:r>
+                      <a:rPr lang="en-US" sz="900" i="1" dirty="0" smtClean="0">
+                        <a:latin typeface="Cambria Math" panose="02040503050406030204" pitchFamily="18" charset="0"/>
+                      </a:rPr>
+                      <m:t> = </m:t>
+                    </m:r>
+                    <m:r>
+                      <a:rPr lang="en-US" sz="900" i="1" dirty="0">
+                        <a:latin typeface="Cambria Math" panose="02040503050406030204" pitchFamily="18" charset="0"/>
+                      </a:rPr>
+                      <m:t>𝑓</m:t>
+                    </m:r>
+                    <m:r>
+                      <a:rPr lang="en-US" sz="900" i="1" dirty="0">
+                        <a:latin typeface="Cambria Math" panose="02040503050406030204" pitchFamily="18" charset="0"/>
+                      </a:rPr>
+                      <m:t>(</m:t>
+                    </m:r>
+                    <m:r>
+                      <a:rPr lang="en-US" sz="900" i="1" dirty="0">
+                        <a:latin typeface="Cambria Math" panose="02040503050406030204" pitchFamily="18" charset="0"/>
+                      </a:rPr>
+                      <m:t>𝐾</m:t>
+                    </m:r>
+                    <m:r>
+                      <a:rPr lang="en-US" sz="900" i="1" dirty="0">
+                        <a:latin typeface="Cambria Math" panose="02040503050406030204" pitchFamily="18" charset="0"/>
+                      </a:rPr>
+                      <m:t>/</m:t>
+                    </m:r>
+                    <m:r>
+                      <a:rPr lang="en-US" sz="900" i="1" dirty="0">
+                        <a:latin typeface="Cambria Math" panose="02040503050406030204" pitchFamily="18" charset="0"/>
+                      </a:rPr>
+                      <m:t>𝑁</m:t>
+                    </m:r>
+                    <m:r>
+                      <a:rPr lang="en-US" sz="900" i="1" dirty="0">
+                        <a:latin typeface="Cambria Math" panose="02040503050406030204" pitchFamily="18" charset="0"/>
+                      </a:rPr>
+                      <m:t>) </m:t>
+                    </m:r>
+                  </m:oMath>
+                </a14:m>
+                <a:r>
+                  <a:rPr lang="en-US" sz="900" dirty="0"/>
+                  <a:t>without Alex — panel is descriptive.</a:t>
+                </a:r>
+                <a:endParaRPr sz="900" dirty="0"/>
+              </a:p>
+            </p:txBody>
+          </p:sp>
+        </mc:Choice>
+        <mc:Fallback>
+          <p:sp>
+            <p:nvSpPr>
+              <p:cNvPr id="5" name="TextBox 4">
+                <a:extLst>
+                  <a:ext uri="{FF2B5EF4-FFF2-40B4-BE49-F238E27FC236}">
+                    <a16:creationId xmlns:a16="http://schemas.microsoft.com/office/drawing/2014/main" id="{6D5CD7F4-89DE-1758-936C-551CCC8DF70D}"/>
+                  </a:ext>
+                </a:extLst>
+              </p:cNvPr>
+              <p:cNvSpPr txBox="1">
+                <a:spLocks noRot="1" noChangeAspect="1" noMove="1" noResize="1" noEditPoints="1" noAdjustHandles="1" noChangeArrowheads="1" noChangeShapeType="1" noTextEdit="1"/>
+              </p:cNvSpPr>
+              <p:nvPr/>
+            </p:nvSpPr>
+            <p:spPr>
+              <a:xfrm>
+                <a:off x="411480" y="4681728"/>
+                <a:ext cx="11368735" cy="784830"/>
+              </a:xfrm>
+              <a:prstGeom prst="rect">
+                <a:avLst/>
+              </a:prstGeom>
+              <a:blipFill>
+                <a:blip r:embed="rId5"/>
+                <a:stretch>
+                  <a:fillRect b="-3175"/>
+                </a:stretch>
+              </a:blipFill>
+            </p:spPr>
+            <p:txBody>
+              <a:bodyPr/>
+              <a:lstStyle/>
+              <a:p>
+                <a:r>
+                  <a:rPr lang="en-US">
+                    <a:noFill/>
+                  </a:rPr>
+                  <a:t> </a:t>
+                </a:r>
+              </a:p>
+            </p:txBody>
+          </p:sp>
+        </mc:Fallback>
+      </mc:AlternateContent>
+      <mc:AlternateContent xmlns:mc="http://schemas.openxmlformats.org/markup-compatibility/2006">
+        <mc:Choice xmlns:a14="http://schemas.microsoft.com/office/drawing/2010/main" Requires="a14">
+          <p:sp>
+            <p:nvSpPr>
+              <p:cNvPr id="6" name="TextBox 5">
+                <a:extLst>
+                  <a:ext uri="{FF2B5EF4-FFF2-40B4-BE49-F238E27FC236}">
+                    <a16:creationId xmlns:a16="http://schemas.microsoft.com/office/drawing/2014/main" id="{2DE2F838-57E1-F3AF-4EEF-DD9761CB242D}"/>
+                  </a:ext>
+                </a:extLst>
+              </p:cNvPr>
+              <p:cNvSpPr txBox="1"/>
+              <p:nvPr/>
+            </p:nvSpPr>
+            <p:spPr>
+              <a:xfrm>
+                <a:off x="411480" y="5971032"/>
+                <a:ext cx="9676047" cy="261610"/>
+              </a:xfrm>
+              <a:prstGeom prst="rect">
+                <a:avLst/>
+              </a:prstGeom>
+              <a:noFill/>
+            </p:spPr>
+            <p:txBody>
+              <a:bodyPr wrap="none">
+                <a:spAutoFit/>
+              </a:bodyPr>
+              <a:lstStyle/>
+              <a:p>
+                <a:pPr algn="l">
+                  <a:defRPr b="1"/>
+                </a:pPr>
+                <a:r>
+                  <a:rPr sz="1100" dirty="0"/>
+                  <a:t>Claim: </a:t>
+                </a:r>
+                <a14:m>
+                  <m:oMath xmlns:m="http://schemas.openxmlformats.org/officeDocument/2006/math">
+                    <m:r>
+                      <a:rPr lang="en-US" sz="1100" i="1" dirty="0" smtClean="0">
+                        <a:latin typeface="Cambria Math" panose="02040503050406030204" pitchFamily="18" charset="0"/>
+                      </a:rPr>
+                      <m:t>𝜃</m:t>
+                    </m:r>
+                  </m:oMath>
+                </a14:m>
+                <a:r>
+                  <a:rPr sz="1100" dirty="0"/>
+                  <a:t> and </a:t>
+                </a:r>
+                <a14:m>
+                  <m:oMath xmlns:m="http://schemas.openxmlformats.org/officeDocument/2006/math">
+                    <m:r>
+                      <a:rPr lang="en-US" sz="1100" i="1" dirty="0" smtClean="0">
+                        <a:latin typeface="Cambria Math" panose="02040503050406030204" pitchFamily="18" charset="0"/>
+                      </a:rPr>
+                      <m:t>𝐾</m:t>
+                    </m:r>
+                    <m:r>
+                      <a:rPr lang="en-US" sz="1100" i="1" dirty="0" smtClean="0">
+                        <a:latin typeface="Cambria Math" panose="02040503050406030204" pitchFamily="18" charset="0"/>
+                      </a:rPr>
+                      <m:t>/</m:t>
+                    </m:r>
+                    <m:r>
+                      <a:rPr lang="en-US" sz="1100" i="1" dirty="0" smtClean="0">
+                        <a:latin typeface="Cambria Math" panose="02040503050406030204" pitchFamily="18" charset="0"/>
+                      </a:rPr>
+                      <m:t>𝑁</m:t>
+                    </m:r>
+                    <m:r>
+                      <a:rPr lang="en-US" sz="1100" i="1" dirty="0" smtClean="0">
+                        <a:latin typeface="Cambria Math" panose="02040503050406030204" pitchFamily="18" charset="0"/>
+                      </a:rPr>
+                      <m:t> </m:t>
+                    </m:r>
+                  </m:oMath>
+                </a14:m>
+                <a:r>
+                  <a:rPr sz="1100" dirty="0"/>
+                  <a:t>co-vary — at MBB-like selectivity (</a:t>
+                </a:r>
+                <a14:m>
+                  <m:oMath xmlns:m="http://schemas.openxmlformats.org/officeDocument/2006/math">
+                    <m:r>
+                      <a:rPr lang="en-US" sz="1100" i="1" dirty="0" smtClean="0">
+                        <a:latin typeface="Cambria Math" panose="02040503050406030204" pitchFamily="18" charset="0"/>
+                      </a:rPr>
+                      <m:t>1%</m:t>
+                    </m:r>
+                  </m:oMath>
+                </a14:m>
+                <a:r>
+                  <a:rPr sz="1100" dirty="0"/>
+                  <a:t>) raising </a:t>
+                </a:r>
+                <a14:m>
+                  <m:oMath xmlns:m="http://schemas.openxmlformats.org/officeDocument/2006/math">
+                    <m:r>
+                      <a:rPr lang="en-US" sz="1100" i="1" dirty="0" smtClean="0">
+                        <a:latin typeface="Cambria Math" panose="02040503050406030204" pitchFamily="18" charset="0"/>
+                      </a:rPr>
+                      <m:t>𝜃</m:t>
+                    </m:r>
+                  </m:oMath>
+                </a14:m>
+                <a:r>
+                  <a:rPr sz="1100" dirty="0"/>
+                  <a:t> shifts peak bin up the pool ladder; at </a:t>
+                </a:r>
+                <a14:m>
+                  <m:oMath xmlns:m="http://schemas.openxmlformats.org/officeDocument/2006/math">
+                    <m:r>
+                      <a:rPr lang="en-US" sz="1100" i="1" dirty="0" smtClean="0">
+                        <a:latin typeface="Cambria Math" panose="02040503050406030204" pitchFamily="18" charset="0"/>
+                      </a:rPr>
+                      <m:t>40%</m:t>
+                    </m:r>
+                  </m:oMath>
+                </a14:m>
+                <a:r>
+                  <a:rPr sz="1100" dirty="0"/>
+                  <a:t> selectivity curves are top-saturated regardless of </a:t>
+                </a:r>
+                <a14:m>
+                  <m:oMath xmlns:m="http://schemas.openxmlformats.org/officeDocument/2006/math">
+                    <m:r>
+                      <a:rPr lang="en-US" sz="1100" i="1" dirty="0" smtClean="0">
+                        <a:latin typeface="Cambria Math" panose="02040503050406030204" pitchFamily="18" charset="0"/>
+                      </a:rPr>
+                      <m:t>𝜃</m:t>
+                    </m:r>
+                  </m:oMath>
+                </a14:m>
+                <a:r>
+                  <a:rPr sz="1100" dirty="0"/>
+                  <a:t>.</a:t>
+                </a:r>
+              </a:p>
+            </p:txBody>
+          </p:sp>
+        </mc:Choice>
+        <mc:Fallback>
+          <p:sp>
+            <p:nvSpPr>
+              <p:cNvPr id="6" name="TextBox 5">
+                <a:extLst>
+                  <a:ext uri="{FF2B5EF4-FFF2-40B4-BE49-F238E27FC236}">
+                    <a16:creationId xmlns:a16="http://schemas.microsoft.com/office/drawing/2014/main" id="{2DE2F838-57E1-F3AF-4EEF-DD9761CB242D}"/>
+                  </a:ext>
+                </a:extLst>
+              </p:cNvPr>
+              <p:cNvSpPr txBox="1">
+                <a:spLocks noRot="1" noChangeAspect="1" noMove="1" noResize="1" noEditPoints="1" noAdjustHandles="1" noChangeArrowheads="1" noChangeShapeType="1" noTextEdit="1"/>
+              </p:cNvSpPr>
+              <p:nvPr/>
+            </p:nvSpPr>
+            <p:spPr>
+              <a:xfrm>
+                <a:off x="411480" y="5971032"/>
+                <a:ext cx="9676047" cy="261610"/>
+              </a:xfrm>
+              <a:prstGeom prst="rect">
+                <a:avLst/>
+              </a:prstGeom>
+              <a:blipFill>
+                <a:blip r:embed="rId6"/>
+                <a:stretch>
+                  <a:fillRect b="-14286"/>
+                </a:stretch>
+              </a:blipFill>
+            </p:spPr>
+            <p:txBody>
+              <a:bodyPr/>
+              <a:lstStyle/>
+              <a:p>
+                <a:r>
+                  <a:rPr lang="en-US">
+                    <a:noFill/>
+                  </a:rPr>
+                  <a:t> </a:t>
+                </a:r>
+              </a:p>
+            </p:txBody>
+          </p:sp>
+        </mc:Fallback>
+      </mc:AlternateContent>
+    </p:spTree>
+    <p:extLst>
+      <p:ext uri="{BB962C8B-B14F-4D97-AF65-F5344CB8AC3E}">
+        <p14:creationId xmlns:p14="http://schemas.microsoft.com/office/powerpoint/2010/main" val="1552164772"/>
+      </p:ext>
+    </p:extLst>
+  </p:cSld>
+  <p:clrMapOvr>
+    <a:masterClrMapping/>
+  </p:clrMapOvr>
+</p:sld>
+</file>
+
+<file path=ppt/slides/slide7.xml><?xml version="1.0" encoding="utf-8"?>
 <p:sld xmlns:a="http://schemas.openxmlformats.org/drawingml/2006/main" xmlns:r="http://schemas.openxmlformats.org/officeDocument/2006/relationships" xmlns:p="http://schemas.openxmlformats.org/presentationml/2006/main">
   <p:cSld>
     <p:spTree>
@@ -7198,6 +11402,30 @@
           <a:chExt cx="0" cy="0"/>
         </a:xfrm>
       </p:grpSpPr>
+      <p:pic>
+        <p:nvPicPr>
+          <p:cNvPr id="4" name="Picture 3" descr="image.png"/>
+          <p:cNvPicPr>
+            <a:picLocks noChangeAspect="1"/>
+          </p:cNvPicPr>
+          <p:nvPr/>
+        </p:nvPicPr>
+        <p:blipFill>
+          <a:blip r:embed="rId2"/>
+          <a:stretch>
+            <a:fillRect/>
+          </a:stretch>
+        </p:blipFill>
+        <p:spPr>
+          <a:xfrm>
+            <a:off x="4835268" y="768096"/>
+            <a:ext cx="6882846" cy="3895344"/>
+          </a:xfrm>
+          <a:prstGeom prst="rect">
+            <a:avLst/>
+          </a:prstGeom>
+        </p:spPr>
+      </p:pic>
       <mc:AlternateContent xmlns:mc="http://schemas.openxmlformats.org/markup-compatibility/2006">
         <mc:Choice xmlns:a14="http://schemas.microsoft.com/office/drawing/2010/main" Requires="a14">
           <p:sp>
@@ -7303,7 +11531,7 @@
                 <a:avLst/>
               </a:prstGeom>
               <a:blipFill>
-                <a:blip r:embed="rId2"/>
+                <a:blip r:embed="rId3"/>
                 <a:stretch>
                   <a:fillRect l="-1027" t="-9375" r="-1027" b="-28125"/>
                 </a:stretch>
@@ -7335,7 +11563,7 @@
             <p:spPr>
               <a:xfrm>
                 <a:off x="411480" y="768096"/>
-                <a:ext cx="5154598" cy="1406795"/>
+                <a:ext cx="5154598" cy="1697068"/>
               </a:xfrm>
               <a:prstGeom prst="rect">
                 <a:avLst/>
@@ -7411,7 +11639,7 @@
                     <a:spcPts val="0"/>
                   </a:spcAft>
                 </a:pPr>
-                <a:endParaRPr lang="en-US" sz="1100" i="1" dirty="0">
+                <a:endParaRPr lang="en-US" sz="1100" b="1" i="1" dirty="0">
                   <a:latin typeface="Cambria Math" panose="02040503050406030204" pitchFamily="18" charset="0"/>
                 </a:endParaRPr>
               </a:p>
@@ -7428,19 +11656,19 @@
                     </m:oMathParaPr>
                     <m:oMath xmlns:m="http://schemas.openxmlformats.org/officeDocument/2006/math">
                       <m:r>
-                        <a:rPr lang="en-US" sz="1100" i="1" dirty="0" smtClean="0">
+                        <a:rPr lang="en-US" sz="1100" b="1" i="1" dirty="0" smtClean="0">
                           <a:latin typeface="Cambria Math" panose="02040503050406030204" pitchFamily="18" charset="0"/>
                         </a:rPr>
-                        <m:t>𝐿</m:t>
+                        <m:t>𝑳</m:t>
                       </m:r>
                       <m:r>
-                        <a:rPr lang="en-US" sz="900" i="1" baseline="-25000" dirty="0">
+                        <a:rPr lang="en-US" sz="900" b="1" i="1" baseline="-25000" dirty="0" smtClean="0">
                           <a:latin typeface="Cambria Math" panose="02040503050406030204" pitchFamily="18" charset="0"/>
                         </a:rPr>
-                        <m:t>𝐶</m:t>
+                        <m:t>𝑪</m:t>
                       </m:r>
                       <m:r>
-                        <a:rPr lang="en-US" sz="1100" i="1" dirty="0">
+                        <a:rPr lang="en-US" sz="1100" b="1" i="1" dirty="0" smtClean="0">
                           <a:latin typeface="Cambria Math" panose="02040503050406030204" pitchFamily="18" charset="0"/>
                         </a:rPr>
                         <m:t> =</m:t>
@@ -7448,110 +11676,101 @@
                       <m:sSub>
                         <m:sSubPr>
                           <m:ctrlPr>
-                            <a:rPr lang="en-US" sz="1100" b="0" i="0" dirty="0" smtClean="0">
+                            <a:rPr lang="en-US" sz="1100" b="1" i="0" dirty="0" smtClean="0">
                               <a:latin typeface="Cambria Math" panose="02040503050406030204" pitchFamily="18" charset="0"/>
                             </a:rPr>
                           </m:ctrlPr>
                         </m:sSubPr>
                         <m:e>
                           <m:r>
-                            <m:rPr>
-                              <m:sty m:val="p"/>
-                            </m:rPr>
-                            <a:rPr lang="en-US" sz="1100" b="0" i="0" dirty="0" smtClean="0">
+                            <a:rPr lang="en-US" sz="1100" b="1" i="0" dirty="0" smtClean="0">
                               <a:latin typeface="Cambria Math" panose="02040503050406030204" pitchFamily="18" charset="0"/>
                             </a:rPr>
-                            <m:t>mean</m:t>
+                            <m:t>𝐦𝐞𝐚𝐧</m:t>
                           </m:r>
                         </m:e>
                         <m:sub>
                           <m:r>
-                            <m:rPr>
-                              <m:sty m:val="p"/>
-                            </m:rPr>
-                            <a:rPr lang="en-US" sz="1100" b="0" i="0" dirty="0" smtClean="0">
+                            <a:rPr lang="en-US" sz="1100" b="1" i="0" dirty="0" smtClean="0">
                               <a:latin typeface="Cambria Math" panose="02040503050406030204" pitchFamily="18" charset="0"/>
                             </a:rPr>
-                            <m:t>j</m:t>
+                            <m:t>𝐣</m:t>
                           </m:r>
                           <m:r>
-                            <a:rPr lang="en-US" sz="1100" b="0" i="1" dirty="0" smtClean="0">
+                            <a:rPr lang="en-US" sz="1100" b="1" i="1" dirty="0" smtClean="0">
                               <a:latin typeface="Cambria Math" panose="02040503050406030204" pitchFamily="18" charset="0"/>
                               <a:ea typeface="Cambria Math" panose="02040503050406030204" pitchFamily="18" charset="0"/>
                             </a:rPr>
                             <m:t>≠</m:t>
                           </m:r>
                           <m:r>
-                            <m:rPr>
-                              <m:sty m:val="p"/>
-                            </m:rPr>
-                            <a:rPr lang="en-US" sz="1100" b="0" i="0" dirty="0" smtClean="0">
+                            <a:rPr lang="en-US" sz="1100" b="1" i="0" dirty="0" smtClean="0">
                               <a:latin typeface="Cambria Math" panose="02040503050406030204" pitchFamily="18" charset="0"/>
                               <a:ea typeface="Cambria Math" panose="02040503050406030204" pitchFamily="18" charset="0"/>
                             </a:rPr>
-                            <m:t>i</m:t>
+                            <m:t>𝐢</m:t>
                           </m:r>
                         </m:sub>
                       </m:sSub>
                       <m:r>
-                        <a:rPr lang="en-US" sz="1100" b="0" i="1" dirty="0" smtClean="0">
+                        <a:rPr lang="en-US" sz="1100" b="1" i="1" dirty="0" smtClean="0">
                           <a:latin typeface="Cambria Math" panose="02040503050406030204" pitchFamily="18" charset="0"/>
                         </a:rPr>
                         <m:t> </m:t>
                       </m:r>
                       <m:r>
-                        <a:rPr lang="en-US" sz="1100" i="1" dirty="0" err="1" smtClean="0">
+                        <a:rPr lang="en-US" sz="1100" b="1" i="1" dirty="0" smtClean="0">
                           <a:latin typeface="Cambria Math" panose="02040503050406030204" pitchFamily="18" charset="0"/>
                         </a:rPr>
-                        <m:t>𝜎</m:t>
+                        <m:t>𝝈</m:t>
                       </m:r>
                       <m:d>
                         <m:dPr>
                           <m:ctrlPr>
-                            <a:rPr lang="ar-AE" sz="1100" i="1" dirty="0" smtClean="0">
+                            <a:rPr lang="ar-AE" sz="1100" b="1" i="1" dirty="0" smtClean="0">
                               <a:latin typeface="Cambria Math" panose="02040503050406030204" pitchFamily="18" charset="0"/>
                             </a:rPr>
                           </m:ctrlPr>
                         </m:dPr>
                         <m:e>
                           <m:r>
-                            <a:rPr lang="ar-AE" sz="1100" i="1" dirty="0" smtClean="0">
+                            <a:rPr lang="ar-AE" sz="1100" b="1" i="1" dirty="0" smtClean="0">
                               <a:latin typeface="Cambria Math" panose="02040503050406030204" pitchFamily="18" charset="0"/>
                             </a:rPr>
-                            <m:t>𝛾</m:t>
+                            <m:t>𝜸</m:t>
                           </m:r>
                           <m:d>
                             <m:dPr>
                               <m:ctrlPr>
-                                <a:rPr lang="ar-AE" sz="1100" i="1" dirty="0" smtClean="0">
+                                <a:rPr lang="ar-AE" sz="1100" b="1" i="1" dirty="0" smtClean="0">
                                   <a:latin typeface="Cambria Math" panose="02040503050406030204" pitchFamily="18" charset="0"/>
                                 </a:rPr>
                               </m:ctrlPr>
                             </m:dPr>
                             <m:e>
                               <m:r>
-                                <a:rPr lang="ar-AE" sz="1100" i="1" dirty="0">
+                                <a:rPr lang="ar-AE" sz="1100" b="1" i="1" dirty="0" smtClean="0">
                                   <a:latin typeface="Cambria Math" panose="02040503050406030204" pitchFamily="18" charset="0"/>
                                 </a:rPr>
-                                <m:t>𝐴</m:t>
+                                <m:t>𝑨</m:t>
                               </m:r>
                               <m:r>
-                                <a:rPr lang="ar-AE" sz="900" i="1" baseline="-25000" dirty="0">
+                                <a:rPr lang="ar-AE" sz="900" b="1" i="1" baseline="-25000" dirty="0" smtClean="0">
                                   <a:latin typeface="Cambria Math" panose="02040503050406030204" pitchFamily="18" charset="0"/>
                                 </a:rPr>
-                                <m:t>𝑗</m:t>
+                                <m:t>𝒋</m:t>
                               </m:r>
                               <m:r>
-                                <a:rPr lang="ar-AE" sz="1100" i="1" dirty="0">
+                                <a:rPr lang="ar-AE" sz="1100" b="1" i="1" dirty="0" smtClean="0">
                                   <a:latin typeface="Cambria Math" panose="02040503050406030204" pitchFamily="18" charset="0"/>
                                 </a:rPr>
                                 <m:t> − </m:t>
                               </m:r>
                               <m:r>
-                                <a:rPr lang="ar-AE" sz="1100" i="1" dirty="0" smtClean="0">
+                                <a:rPr lang="ar-AE" sz="1100" b="1" i="1" dirty="0" smtClean="0">
                                   <a:latin typeface="Cambria Math" panose="02040503050406030204" pitchFamily="18" charset="0"/>
                                 </a:rPr>
-                                <m:t>𝜃</m:t>
+                                <m:t>𝜽</m:t>
                               </m:r>
                             </m:e>
                           </m:d>
@@ -7560,7 +11779,7 @@
                     </m:oMath>
                   </m:oMathPara>
                 </a14:m>
-                <a:endParaRPr lang="ar-AE" sz="1100" i="1" dirty="0">
+                <a:endParaRPr lang="ar-AE" sz="1100" b="1" i="1" dirty="0">
                   <a:latin typeface="Cambria Math" panose="02040503050406030204" pitchFamily="18" charset="0"/>
                 </a:endParaRPr>
               </a:p>
@@ -7573,10 +11792,15 @@
                 <a14:m/>
               </a:p>
               <a:p>
-                <a:pPr>
+                <a:pPr marL="171450" indent="-171450">
+                  <a:lnSpc>
+                    <a:spcPct val="150000"/>
+                  </a:lnSpc>
                   <a:spcAft>
                     <a:spcPts val="0"/>
                   </a:spcAft>
+                  <a:buFont typeface="Arial" panose="020B0604020202020204" pitchFamily="34" charset="0"/>
+                  <a:buChar char="•"/>
                 </a:pPr>
                 <a:r>
                   <a:rPr lang="en-US" sz="1000" dirty="0"/>
@@ -7584,10 +11808,15 @@
                 </a:r>
               </a:p>
               <a:p>
-                <a:pPr>
+                <a:pPr marL="171450" indent="-171450">
+                  <a:lnSpc>
+                    <a:spcPct val="150000"/>
+                  </a:lnSpc>
                   <a:spcAft>
                     <a:spcPts val="0"/>
                   </a:spcAft>
+                  <a:buFont typeface="Arial" panose="020B0604020202020204" pitchFamily="34" charset="0"/>
+                  <a:buChar char="•"/>
                 </a:pPr>
                 <a:r>
                   <a:rPr lang="en-US" sz="1000" dirty="0"/>
@@ -7596,10 +11825,15 @@
                 <a14:m/>
               </a:p>
               <a:p>
-                <a:pPr>
+                <a:pPr marL="171450" indent="-171450">
+                  <a:lnSpc>
+                    <a:spcPct val="150000"/>
+                  </a:lnSpc>
                   <a:spcAft>
                     <a:spcPts val="0"/>
                   </a:spcAft>
+                  <a:buFont typeface="Arial" panose="020B0604020202020204" pitchFamily="34" charset="0"/>
+                  <a:buChar char="•"/>
                 </a:pPr>
                 <a:r>
                   <a:rPr lang="en-US" sz="1000" dirty="0"/>
@@ -7607,10 +11841,15 @@
                 </a:r>
               </a:p>
               <a:p>
-                <a:pPr>
+                <a:pPr marL="171450" indent="-171450">
+                  <a:lnSpc>
+                    <a:spcPct val="150000"/>
+                  </a:lnSpc>
                   <a:spcAft>
                     <a:spcPts val="0"/>
                   </a:spcAft>
+                  <a:buFont typeface="Arial" panose="020B0604020202020204" pitchFamily="34" charset="0"/>
+                  <a:buChar char="•"/>
                 </a:pPr>
                 <a:r>
                   <a:rPr lang="en-US" sz="1000" dirty="0"/>
@@ -7643,15 +11882,15 @@
             <p:spPr>
               <a:xfrm>
                 <a:off x="411480" y="768096"/>
-                <a:ext cx="5154598" cy="1406795"/>
+                <a:ext cx="5154598" cy="1697068"/>
               </a:xfrm>
               <a:prstGeom prst="rect">
                 <a:avLst/>
               </a:prstGeom>
               <a:blipFill>
-                <a:blip r:embed="rId3"/>
+                <a:blip r:embed="rId4"/>
                 <a:stretch>
-                  <a:fillRect b="-1786"/>
+                  <a:fillRect b="-1493"/>
                 </a:stretch>
               </a:blipFill>
             </p:spPr>
@@ -7670,30 +11909,6 @@
           </p:sp>
         </mc:Fallback>
       </mc:AlternateContent>
-      <p:pic>
-        <p:nvPicPr>
-          <p:cNvPr id="4" name="Picture 3" descr="image.png"/>
-          <p:cNvPicPr>
-            <a:picLocks noChangeAspect="1"/>
-          </p:cNvPicPr>
-          <p:nvPr/>
-        </p:nvPicPr>
-        <p:blipFill>
-          <a:blip r:embed="rId4"/>
-          <a:stretch>
-            <a:fillRect/>
-          </a:stretch>
-        </p:blipFill>
-        <p:spPr>
-          <a:xfrm>
-            <a:off x="4835268" y="768096"/>
-            <a:ext cx="6882846" cy="3895344"/>
-          </a:xfrm>
-          <a:prstGeom prst="rect">
-            <a:avLst/>
-          </a:prstGeom>
-        </p:spPr>
-      </p:pic>
       <mc:AlternateContent xmlns:mc="http://schemas.openxmlformats.org/markup-compatibility/2006">
         <mc:Choice xmlns:a14="http://schemas.microsoft.com/office/drawing/2010/main" Requires="a14">
           <p:sp>
@@ -8364,7 +12579,7 @@
 </p:sld>
 </file>
 
-<file path=ppt/slides/slide6.xml><?xml version="1.0" encoding="utf-8"?>
+<file path=ppt/slides/slide8.xml><?xml version="1.0" encoding="utf-8"?>
 <p:sld xmlns:a="http://schemas.openxmlformats.org/drawingml/2006/main" xmlns:r="http://schemas.openxmlformats.org/officeDocument/2006/relationships" xmlns:p="http://schemas.openxmlformats.org/presentationml/2006/main">
   <p:cSld>
     <p:spTree>
@@ -8447,6 +12662,10 @@
                   </m:oMath>
                 </a14:m>
                 <a:r>
+                  <a:rPr lang="en-US" sz="2000" dirty="0"/>
+                  <a:t> </a:t>
+                </a:r>
+                <a:r>
                   <a:rPr sz="2000" dirty="0"/>
                   <a:t>(viability sharpness) — selection curves</a:t>
                 </a:r>
@@ -8474,7 +12693,7 @@
               <a:blipFill>
                 <a:blip r:embed="rId3"/>
                 <a:stretch>
-                  <a:fillRect l="-896" t="-9375" b="-28125"/>
+                  <a:fillRect l="-896" t="-9375" r="-717" b="-28125"/>
                 </a:stretch>
               </a:blipFill>
             </p:spPr>
@@ -8504,7 +12723,7 @@
             <p:spPr>
               <a:xfrm>
                 <a:off x="411480" y="768096"/>
-                <a:ext cx="4160520" cy="1481752"/>
+                <a:ext cx="4160520" cy="1881862"/>
               </a:xfrm>
               <a:prstGeom prst="rect">
                 <a:avLst/>
@@ -8524,7 +12743,7 @@
                   <a:defRPr b="1"/>
                 </a:pPr>
                 <a:r>
-                  <a:rPr sz="1100" dirty="0"/>
+                  <a:rPr lang="en-US" sz="1100" dirty="0"/>
                   <a:t>Characterize </a:t>
                 </a:r>
                 <a14:m>
@@ -8538,7 +12757,7 @@
                   </m:oMath>
                 </a14:m>
                 <a:r>
-                  <a:rPr sz="1100" dirty="0"/>
+                  <a:rPr lang="en-US" sz="1100" dirty="0"/>
                   <a:t>— one-at-a-time (539 sort-and-chop benchmark)</a:t>
                 </a:r>
               </a:p>
@@ -8548,7 +12767,156 @@
                     <a:spcPts val="0"/>
                   </a:spcAft>
                 </a:pPr>
-                <a14:m/>
+                <a:endParaRPr lang="en-US" sz="1100" i="1" dirty="0">
+                  <a:latin typeface="Cambria Math" panose="02040503050406030204" pitchFamily="18" charset="0"/>
+                </a:endParaRPr>
+              </a:p>
+              <a:p>
+                <a:pPr>
+                  <a:spcAft>
+                    <a:spcPts val="0"/>
+                  </a:spcAft>
+                </a:pPr>
+                <a14:m>
+                  <m:oMathPara xmlns:m="http://schemas.openxmlformats.org/officeDocument/2006/math">
+                    <m:oMathParaPr>
+                      <m:jc m:val="centerGroup"/>
+                    </m:oMathParaPr>
+                    <m:oMath xmlns:m="http://schemas.openxmlformats.org/officeDocument/2006/math">
+                      <m:r>
+                        <a:rPr lang="en-US" sz="1100" b="1" i="1" dirty="0" smtClean="0">
+                          <a:latin typeface="Cambria Math" panose="02040503050406030204" pitchFamily="18" charset="0"/>
+                        </a:rPr>
+                        <m:t>𝝈</m:t>
+                      </m:r>
+                      <m:d>
+                        <m:dPr>
+                          <m:ctrlPr>
+                            <a:rPr lang="ar-AE" sz="1100" b="1" i="1" dirty="0" smtClean="0">
+                              <a:latin typeface="Cambria Math" panose="02040503050406030204" pitchFamily="18" charset="0"/>
+                            </a:rPr>
+                          </m:ctrlPr>
+                        </m:dPr>
+                        <m:e>
+                          <m:r>
+                            <a:rPr lang="ar-AE" sz="1100" b="1" i="1" dirty="0" smtClean="0">
+                              <a:latin typeface="Cambria Math" panose="02040503050406030204" pitchFamily="18" charset="0"/>
+                            </a:rPr>
+                            <m:t>𝒙</m:t>
+                          </m:r>
+                        </m:e>
+                      </m:d>
+                      <m:r>
+                        <a:rPr lang="ar-AE" sz="1100" b="1" i="1" dirty="0" smtClean="0">
+                          <a:latin typeface="Cambria Math" panose="02040503050406030204" pitchFamily="18" charset="0"/>
+                        </a:rPr>
+                        <m:t>=</m:t>
+                      </m:r>
+                      <m:f>
+                        <m:fPr>
+                          <m:ctrlPr>
+                            <a:rPr lang="ar-AE" sz="1100" b="1" i="1" dirty="0" smtClean="0">
+                              <a:latin typeface="Cambria Math" panose="02040503050406030204" pitchFamily="18" charset="0"/>
+                            </a:rPr>
+                          </m:ctrlPr>
+                        </m:fPr>
+                        <m:num>
+                          <m:r>
+                            <a:rPr lang="ar-AE" sz="1100" b="1" i="1" dirty="0" smtClean="0">
+                              <a:latin typeface="Cambria Math" panose="02040503050406030204" pitchFamily="18" charset="0"/>
+                            </a:rPr>
+                            <m:t>𝟏</m:t>
+                          </m:r>
+                        </m:num>
+                        <m:den>
+                          <m:r>
+                            <a:rPr lang="ar-AE" sz="1100" b="1" i="1" dirty="0" smtClean="0">
+                              <a:latin typeface="Cambria Math" panose="02040503050406030204" pitchFamily="18" charset="0"/>
+                            </a:rPr>
+                            <m:t>𝟏</m:t>
+                          </m:r>
+                          <m:r>
+                            <a:rPr lang="ar-AE" sz="1100" b="1" i="1" dirty="0" smtClean="0">
+                              <a:latin typeface="Cambria Math" panose="02040503050406030204" pitchFamily="18" charset="0"/>
+                            </a:rPr>
+                            <m:t>+</m:t>
+                          </m:r>
+                          <m:r>
+                            <a:rPr lang="ar-AE" sz="1100" b="1" i="1" dirty="0" smtClean="0">
+                              <a:latin typeface="Cambria Math" panose="02040503050406030204" pitchFamily="18" charset="0"/>
+                            </a:rPr>
+                            <m:t>𝒆</m:t>
+                          </m:r>
+                          <m:r>
+                            <a:rPr lang="ar-AE" sz="900" b="1" i="1" baseline="30000" dirty="0">
+                              <a:latin typeface="Cambria Math" panose="02040503050406030204" pitchFamily="18" charset="0"/>
+                            </a:rPr>
+                            <m:t>−</m:t>
+                          </m:r>
+                          <m:r>
+                            <a:rPr lang="ar-AE" sz="900" b="1" i="1" baseline="30000" dirty="0">
+                              <a:latin typeface="Cambria Math" panose="02040503050406030204" pitchFamily="18" charset="0"/>
+                            </a:rPr>
+                            <m:t>𝒙</m:t>
+                          </m:r>
+                        </m:den>
+                      </m:f>
+                      <m:r>
+                        <a:rPr lang="ar-AE" sz="1100" b="1" i="1" dirty="0">
+                          <a:latin typeface="Cambria Math" panose="02040503050406030204" pitchFamily="18" charset="0"/>
+                        </a:rPr>
+                        <m:t>, </m:t>
+                      </m:r>
+                      <m:r>
+                        <a:rPr lang="ar-AE" sz="1100" b="1" i="1" dirty="0">
+                          <a:latin typeface="Cambria Math" panose="02040503050406030204" pitchFamily="18" charset="0"/>
+                        </a:rPr>
+                        <m:t>𝒙</m:t>
+                      </m:r>
+                      <m:r>
+                        <a:rPr lang="ar-AE" sz="1100" b="1" i="1" dirty="0">
+                          <a:latin typeface="Cambria Math" panose="02040503050406030204" pitchFamily="18" charset="0"/>
+                        </a:rPr>
+                        <m:t> = </m:t>
+                      </m:r>
+                      <m:r>
+                        <a:rPr lang="ar-AE" sz="1100" b="1" i="1" dirty="0">
+                          <a:latin typeface="Cambria Math" panose="02040503050406030204" pitchFamily="18" charset="0"/>
+                        </a:rPr>
+                        <m:t>𝜸</m:t>
+                      </m:r>
+                      <m:d>
+                        <m:dPr>
+                          <m:ctrlPr>
+                            <a:rPr lang="ar-AE" sz="1100" b="1" i="1" dirty="0">
+                              <a:latin typeface="Cambria Math" panose="02040503050406030204" pitchFamily="18" charset="0"/>
+                            </a:rPr>
+                          </m:ctrlPr>
+                        </m:dPr>
+                        <m:e>
+                          <m:r>
+                            <a:rPr lang="ar-AE" sz="1100" b="1" i="1" dirty="0" smtClean="0">
+                              <a:latin typeface="Cambria Math" panose="02040503050406030204" pitchFamily="18" charset="0"/>
+                            </a:rPr>
+                            <m:t>𝑨</m:t>
+                          </m:r>
+                          <m:r>
+                            <a:rPr lang="ar-AE" sz="1100" b="1" i="1" dirty="0" smtClean="0">
+                              <a:latin typeface="Cambria Math" panose="02040503050406030204" pitchFamily="18" charset="0"/>
+                            </a:rPr>
+                            <m:t>−</m:t>
+                          </m:r>
+                          <m:r>
+                            <a:rPr lang="ar-AE" sz="1100" b="1" i="1" dirty="0" smtClean="0">
+                              <a:latin typeface="Cambria Math" panose="02040503050406030204" pitchFamily="18" charset="0"/>
+                            </a:rPr>
+                            <m:t>𝜽</m:t>
+                          </m:r>
+                        </m:e>
+                      </m:d>
+                    </m:oMath>
+                  </m:oMathPara>
+                </a14:m>
               </a:p>
               <a:p>
                 <a:pPr marL="171450" indent="-171450">
@@ -8561,10 +12929,9 @@
                   <a:buFont typeface="Arial" panose="020B0604020202020204" pitchFamily="34" charset="0"/>
                   <a:buChar char="•"/>
                 </a:pPr>
-                <a:r>
-                  <a:rPr sz="1000" dirty="0"/>
-                  <a:t>fixed; sort-and-chop assign</a:t>
-                </a:r>
+                <a:endParaRPr lang="ar-AE" sz="1000" i="1" dirty="0">
+                  <a:latin typeface="Cambria Math" panose="02040503050406030204" pitchFamily="18" charset="0"/>
+                </a:endParaRPr>
               </a:p>
               <a:p>
                 <a:pPr marL="171450" indent="-171450">
@@ -8577,8 +12944,40 @@
                   <a:buFont typeface="Arial" panose="020B0604020202020204" pitchFamily="34" charset="0"/>
                   <a:buChar char="•"/>
                 </a:pPr>
-                <a:r>
-                  <a:rPr sz="1000" dirty="0"/>
+                <a14:m>
+                  <m:oMath xmlns:m="http://schemas.openxmlformats.org/officeDocument/2006/math">
+                    <m:r>
+                      <a:rPr lang="ar-AE" sz="1000" i="1" dirty="0" smtClean="0">
+                        <a:latin typeface="Cambria Math" panose="02040503050406030204" pitchFamily="18" charset="0"/>
+                      </a:rPr>
+                      <m:t>𝜃</m:t>
+                    </m:r>
+                    <m:r>
+                      <a:rPr lang="ar-AE" sz="1000" i="1" dirty="0" smtClean="0">
+                        <a:latin typeface="Cambria Math" panose="02040503050406030204" pitchFamily="18" charset="0"/>
+                      </a:rPr>
+                      <m:t>=0.72 </m:t>
+                    </m:r>
+                  </m:oMath>
+                </a14:m>
+                <a:r>
+                  <a:rPr lang="en-US" sz="1000" dirty="0"/>
+                  <a:t>fixed; sort-and-chop assign</a:t>
+                </a:r>
+              </a:p>
+              <a:p>
+                <a:pPr marL="171450" indent="-171450">
+                  <a:lnSpc>
+                    <a:spcPct val="150000"/>
+                  </a:lnSpc>
+                  <a:spcAft>
+                    <a:spcPts val="0"/>
+                  </a:spcAft>
+                  <a:buFont typeface="Arial" panose="020B0604020202020204" pitchFamily="34" charset="0"/>
+                  <a:buChar char="•"/>
+                </a:pPr>
+                <a:r>
+                  <a:rPr lang="en-US" sz="1000" dirty="0"/>
                   <a:t>arms: </a:t>
                 </a:r>
                 <a14:m>
@@ -8600,14 +12999,14 @@
                         <m:begChr m:val="{"/>
                         <m:endChr m:val="}"/>
                         <m:ctrlPr>
-                          <a:rPr lang="en-US" sz="1000" i="1" dirty="0" smtClean="0">
+                          <a:rPr lang="ar-AE" sz="1000" i="1" dirty="0" smtClean="0">
                             <a:latin typeface="Cambria Math" panose="02040503050406030204" pitchFamily="18" charset="0"/>
                           </a:rPr>
                         </m:ctrlPr>
                       </m:dPr>
                       <m:e>
                         <m:r>
-                          <a:rPr lang="en-US" sz="1000" i="1" dirty="0" smtClean="0">
+                          <a:rPr lang="ar-AE" sz="1000" i="1" dirty="0" smtClean="0">
                             <a:latin typeface="Cambria Math" panose="02040503050406030204" pitchFamily="18" charset="0"/>
                           </a:rPr>
                           <m:t>5, 10, 20</m:t>
@@ -8629,7 +13028,7 @@
                   <a:buChar char="•"/>
                 </a:pPr>
                 <a:r>
-                  <a:rPr sz="1000" dirty="0"/>
+                  <a:rPr lang="en-US" sz="1000" dirty="0"/>
                   <a:t>within each </a:t>
                 </a:r>
                 <a14:m>
@@ -8663,14 +13062,14 @@
                         <m:begChr m:val="{"/>
                         <m:endChr m:val="}"/>
                         <m:ctrlPr>
-                          <a:rPr lang="en-US" sz="1000" i="1" dirty="0" smtClean="0">
+                          <a:rPr lang="ar-AE" sz="1000" i="1" dirty="0" smtClean="0">
                             <a:latin typeface="Cambria Math" panose="02040503050406030204" pitchFamily="18" charset="0"/>
                           </a:rPr>
                         </m:ctrlPr>
                       </m:dPr>
                       <m:e>
                         <m:r>
-                          <a:rPr lang="en-US" sz="1000" i="1" dirty="0" smtClean="0">
+                          <a:rPr lang="ar-AE" sz="1000" i="1" dirty="0" smtClean="0">
                             <a:latin typeface="Cambria Math" panose="02040503050406030204" pitchFamily="18" charset="0"/>
                           </a:rPr>
                           <m:t>0, 0.25, 0.55, 0.75, 1.0</m:t>
@@ -8692,23 +13091,23 @@
                   <a:buChar char="•"/>
                 </a:pPr>
                 <a:r>
-                  <a:rPr sz="1000" dirty="0"/>
+                  <a:rPr lang="en-US" sz="1000" dirty="0"/>
                   <a:t>VISUALIZE = mean </a:t>
                 </a:r>
                 <a:r>
-                  <a:rPr sz="1000" i="1" dirty="0">
+                  <a:rPr lang="en-US" sz="1000" i="1" dirty="0">
                     <a:latin typeface="Cambria Math"/>
                   </a:rPr>
                   <a:t>Y</a:t>
                 </a:r>
                 <a:r>
-                  <a:rPr sz="800" i="1" baseline="-25000" dirty="0">
+                  <a:rPr lang="en-US" sz="800" i="1" baseline="-25000" dirty="0">
                     <a:latin typeface="Cambria Math"/>
                   </a:rPr>
                   <a:t>selected</a:t>
                 </a:r>
                 <a:r>
-                  <a:rPr sz="1000" dirty="0"/>
+                  <a:rPr lang="en-US" sz="1000" dirty="0"/>
                   <a:t> vs pool mean (</a:t>
                 </a:r>
                 <a14:m>
@@ -8722,9 +13121,10 @@
                   </m:oMath>
                 </a14:m>
                 <a:r>
-                  <a:rPr sz="1000" dirty="0"/>
+                  <a:rPr lang="en-US" sz="1000" dirty="0"/>
                   <a:t>bins)</a:t>
                 </a:r>
+                <a:endParaRPr sz="1000" dirty="0"/>
               </a:p>
             </p:txBody>
           </p:sp>
@@ -8741,7 +13141,7 @@
             <p:spPr>
               <a:xfrm>
                 <a:off x="411480" y="768096"/>
-                <a:ext cx="4160520" cy="1481752"/>
+                <a:ext cx="4160520" cy="1881862"/>
               </a:xfrm>
               <a:prstGeom prst="rect">
                 <a:avLst/>
@@ -8749,7 +13149,7 @@
               <a:blipFill>
                 <a:blip r:embed="rId4"/>
                 <a:stretch>
-                  <a:fillRect b="-1695"/>
+                  <a:fillRect b="-1342"/>
                 </a:stretch>
               </a:blipFill>
             </p:spPr>
@@ -9324,7 +13724,7 @@
 </p:sld>
 </file>
 
-<file path=ppt/slides/slide7.xml><?xml version="1.0" encoding="utf-8"?>
+<file path=ppt/slides/slide9.xml><?xml version="1.0" encoding="utf-8"?>
 <p:sld xmlns:a="http://schemas.openxmlformats.org/drawingml/2006/main" xmlns:r="http://schemas.openxmlformats.org/officeDocument/2006/relationships" xmlns:p="http://schemas.openxmlformats.org/presentationml/2006/main">
   <p:cSld>
     <p:spTree>
@@ -9341,60 +13741,122 @@
           <a:chExt cx="0" cy="0"/>
         </a:xfrm>
       </p:grpSpPr>
-      <p:sp>
-        <p:nvSpPr>
-          <p:cNvPr id="2" name="TextBox 1"/>
-          <p:cNvSpPr txBox="1"/>
-          <p:nvPr/>
-        </p:nvSpPr>
-        <p:spPr>
-          <a:xfrm>
-            <a:off x="411480" y="256032"/>
-            <a:ext cx="11368735" cy="420624"/>
-          </a:xfrm>
-          <a:prstGeom prst="rect">
-            <a:avLst/>
-          </a:prstGeom>
-          <a:noFill/>
-        </p:spPr>
-        <p:txBody>
-          <a:bodyPr wrap="none">
-            <a:spAutoFit/>
-          </a:bodyPr>
-          <a:lstStyle/>
-          <a:p>
-            <a:pPr>
-              <a:defRPr b="1"/>
-            </a:pPr>
-            <a:r>
-              <a:rPr sz="2000"/>
-              <a:t>Phase B — </a:t>
-            </a:r>
-            <a:r>
-              <a:rPr sz="2000" i="1">
-                <a:latin typeface="Cambria Math"/>
-              </a:rPr>
-              <a:t>λ</a:t>
-            </a:r>
-            <a:r>
-              <a:rPr sz="1800" i="1" baseline="-25000">
-                <a:latin typeface="Cambria Math"/>
-              </a:rPr>
-              <a:t>crit</a:t>
-            </a:r>
-            <a:r>
-              <a:rPr sz="2000" i="1">
-                <a:latin typeface="Cambria Math"/>
-              </a:rPr>
-              <a:t> \approx 4/\gamma</a:t>
-            </a:r>
-            <a:r>
-              <a:rPr sz="2000"/>
-              <a:t> (sort-and-chop algebra)</a:t>
-            </a:r>
-          </a:p>
-        </p:txBody>
-      </p:sp>
+      <mc:AlternateContent xmlns:mc="http://schemas.openxmlformats.org/markup-compatibility/2006">
+        <mc:Choice xmlns:a14="http://schemas.microsoft.com/office/drawing/2010/main" Requires="a14">
+          <p:sp>
+            <p:nvSpPr>
+              <p:cNvPr id="2" name="TextBox 1"/>
+              <p:cNvSpPr txBox="1"/>
+              <p:nvPr/>
+            </p:nvSpPr>
+            <p:spPr>
+              <a:xfrm>
+                <a:off x="411480" y="256032"/>
+                <a:ext cx="5165966" cy="400110"/>
+              </a:xfrm>
+              <a:prstGeom prst="rect">
+                <a:avLst/>
+              </a:prstGeom>
+              <a:noFill/>
+            </p:spPr>
+            <p:txBody>
+              <a:bodyPr wrap="none">
+                <a:spAutoFit/>
+              </a:bodyPr>
+              <a:lstStyle/>
+              <a:p>
+                <a:pPr>
+                  <a:defRPr b="1"/>
+                </a:pPr>
+                <a:r>
+                  <a:rPr sz="2000" dirty="0"/>
+                  <a:t>Phase B — </a:t>
+                </a:r>
+                <a14:m>
+                  <m:oMath xmlns:m="http://schemas.openxmlformats.org/officeDocument/2006/math">
+                    <m:r>
+                      <a:rPr lang="en-US" sz="2000" i="1" dirty="0" smtClean="0">
+                        <a:latin typeface="Cambria Math" panose="02040503050406030204" pitchFamily="18" charset="0"/>
+                      </a:rPr>
+                      <m:t>𝜆</m:t>
+                    </m:r>
+                    <m:r>
+                      <a:rPr lang="en-US" sz="1800" i="1" baseline="-25000" dirty="0" err="1">
+                        <a:latin typeface="Cambria Math" panose="02040503050406030204" pitchFamily="18" charset="0"/>
+                      </a:rPr>
+                      <m:t>𝑐𝑟𝑖𝑡</m:t>
+                    </m:r>
+                    <m:r>
+                      <a:rPr lang="en-US" sz="2000" i="1" dirty="0">
+                        <a:latin typeface="Cambria Math" panose="02040503050406030204" pitchFamily="18" charset="0"/>
+                      </a:rPr>
+                      <m:t> ≈4</m:t>
+                    </m:r>
+                    <m:r>
+                      <a:rPr lang="en-US" sz="2000" i="1" dirty="0">
+                        <a:latin typeface="Cambria Math" panose="02040503050406030204" pitchFamily="18" charset="0"/>
+                      </a:rPr>
+                      <m:t>/</m:t>
+                    </m:r>
+                    <m:r>
+                      <a:rPr lang="en-US" sz="2000" i="1" dirty="0">
+                        <a:latin typeface="Cambria Math" panose="02040503050406030204" pitchFamily="18" charset="0"/>
+                      </a:rPr>
+                      <m:t>𝛾</m:t>
+                    </m:r>
+                  </m:oMath>
+                </a14:m>
+                <a:r>
+                  <a:rPr lang="en-US" sz="2000" dirty="0"/>
+                  <a:t>  </a:t>
+                </a:r>
+                <a:r>
+                  <a:rPr sz="2000" dirty="0"/>
+                  <a:t>(sort-and-chop algebra)</a:t>
+                </a:r>
+              </a:p>
+            </p:txBody>
+          </p:sp>
+        </mc:Choice>
+        <mc:Fallback>
+          <p:sp>
+            <p:nvSpPr>
+              <p:cNvPr id="2" name="TextBox 1"/>
+              <p:cNvSpPr txBox="1">
+                <a:spLocks noRot="1" noChangeAspect="1" noMove="1" noResize="1" noEditPoints="1" noAdjustHandles="1" noChangeArrowheads="1" noChangeShapeType="1" noTextEdit="1"/>
+              </p:cNvSpPr>
+              <p:nvPr/>
+            </p:nvSpPr>
+            <p:spPr>
+              <a:xfrm>
+                <a:off x="411480" y="256032"/>
+                <a:ext cx="5165966" cy="400110"/>
+              </a:xfrm>
+              <a:prstGeom prst="rect">
+                <a:avLst/>
+              </a:prstGeom>
+              <a:blipFill>
+                <a:blip r:embed="rId2"/>
+                <a:stretch>
+                  <a:fillRect l="-1225" t="-9375" r="-245" b="-28125"/>
+                </a:stretch>
+              </a:blipFill>
+            </p:spPr>
+            <p:txBody>
+              <a:bodyPr/>
+              <a:lstStyle/>
+              <a:p>
+                <a:r>
+                  <a:rPr lang="en-US">
+                    <a:noFill/>
+                  </a:rPr>
+                  <a:t> </a:t>
+                </a:r>
+              </a:p>
+            </p:txBody>
+          </p:sp>
+        </mc:Fallback>
+      </mc:AlternateContent>
       <mc:AlternateContent xmlns:mc="http://schemas.openxmlformats.org/markup-compatibility/2006">
         <mc:Choice xmlns:a14="http://schemas.microsoft.com/office/drawing/2010/main" Requires="a14">
           <p:sp>
@@ -9406,7 +13868,7 @@
             <p:spPr>
               <a:xfrm>
                 <a:off x="411480" y="768096"/>
-                <a:ext cx="4160520" cy="1482137"/>
+                <a:ext cx="4160520" cy="1881605"/>
               </a:xfrm>
               <a:prstGeom prst="rect">
                 <a:avLst/>
@@ -9450,135 +13912,170 @@
                     <a:spcPts val="0"/>
                   </a:spcAft>
                 </a:pPr>
-                <a14:m>
-                  <m:oMath xmlns:m="http://schemas.openxmlformats.org/officeDocument/2006/math">
-                    <m:r>
-                      <a:rPr lang="en-US" sz="1100" i="1" dirty="0" smtClean="0">
-                        <a:latin typeface="Cambria Math" panose="02040503050406030204" pitchFamily="18" charset="0"/>
-                      </a:rPr>
-                      <m:t>𝜎</m:t>
-                    </m:r>
-                    <m:d>
-                      <m:dPr>
-                        <m:ctrlPr>
-                          <a:rPr lang="en-US" sz="1100" i="1" dirty="0" smtClean="0">
-                            <a:latin typeface="Cambria Math" panose="02040503050406030204" pitchFamily="18" charset="0"/>
-                          </a:rPr>
-                        </m:ctrlPr>
-                      </m:dPr>
-                      <m:e>
-                        <m:r>
-                          <a:rPr lang="en-US" sz="1100" i="1" dirty="0" smtClean="0">
-                            <a:latin typeface="Cambria Math" panose="02040503050406030204" pitchFamily="18" charset="0"/>
-                          </a:rPr>
-                          <m:t>𝑥</m:t>
-                        </m:r>
-                      </m:e>
-                    </m:d>
-                    <m:r>
-                      <a:rPr lang="en-US" sz="1100" i="1" dirty="0" smtClean="0">
-                        <a:latin typeface="Cambria Math" panose="02040503050406030204" pitchFamily="18" charset="0"/>
-                      </a:rPr>
-                      <m:t>=</m:t>
-                    </m:r>
-                    <m:f>
-                      <m:fPr>
-                        <m:ctrlPr>
-                          <a:rPr lang="en-US" sz="1100" i="1" dirty="0" smtClean="0">
-                            <a:latin typeface="Cambria Math" panose="02040503050406030204" pitchFamily="18" charset="0"/>
-                          </a:rPr>
-                        </m:ctrlPr>
-                      </m:fPr>
-                      <m:num>
-                        <m:r>
-                          <a:rPr lang="en-US" sz="1100" i="1" dirty="0" smtClean="0">
-                            <a:latin typeface="Cambria Math" panose="02040503050406030204" pitchFamily="18" charset="0"/>
-                          </a:rPr>
-                          <m:t>1</m:t>
-                        </m:r>
-                      </m:num>
-                      <m:den>
-                        <m:r>
-                          <a:rPr lang="en-US" sz="1100" i="1" dirty="0" smtClean="0">
-                            <a:latin typeface="Cambria Math" panose="02040503050406030204" pitchFamily="18" charset="0"/>
-                          </a:rPr>
-                          <m:t>1+</m:t>
-                        </m:r>
-                        <m:r>
-                          <a:rPr lang="en-US" sz="1100" i="1" dirty="0" smtClean="0">
-                            <a:latin typeface="Cambria Math" panose="02040503050406030204" pitchFamily="18" charset="0"/>
-                          </a:rPr>
-                          <m:t>𝑒</m:t>
-                        </m:r>
-                        <m:r>
-                          <a:rPr lang="en-US" sz="900" i="1" baseline="30000" dirty="0">
-                            <a:latin typeface="Cambria Math" panose="02040503050406030204" pitchFamily="18" charset="0"/>
-                          </a:rPr>
-                          <m:t>−</m:t>
-                        </m:r>
-                        <m:r>
-                          <a:rPr lang="en-US" sz="900" i="1" baseline="30000" dirty="0">
-                            <a:latin typeface="Cambria Math" panose="02040503050406030204" pitchFamily="18" charset="0"/>
-                          </a:rPr>
-                          <m:t>𝑥</m:t>
-                        </m:r>
-                      </m:den>
-                    </m:f>
-                    <m:r>
-                      <a:rPr lang="en-US" sz="1100" i="1" dirty="0">
-                        <a:latin typeface="Cambria Math" panose="02040503050406030204" pitchFamily="18" charset="0"/>
-                      </a:rPr>
-                      <m:t>, </m:t>
-                    </m:r>
-                    <m:r>
-                      <a:rPr lang="en-US" sz="1100" i="1" dirty="0" smtClean="0">
-                        <a:latin typeface="Cambria Math" panose="02040503050406030204" pitchFamily="18" charset="0"/>
-                      </a:rPr>
-                      <m:t>𝑥</m:t>
-                    </m:r>
-                    <m:r>
-                      <a:rPr lang="en-US" sz="1100" i="1" dirty="0" smtClean="0">
-                        <a:latin typeface="Cambria Math" panose="02040503050406030204" pitchFamily="18" charset="0"/>
-                      </a:rPr>
-                      <m:t> = </m:t>
-                    </m:r>
-                    <m:r>
-                      <a:rPr lang="en-US" sz="1100" i="1" dirty="0" smtClean="0">
-                        <a:latin typeface="Cambria Math" panose="02040503050406030204" pitchFamily="18" charset="0"/>
-                      </a:rPr>
-                      <m:t>𝛾</m:t>
-                    </m:r>
-                    <m:d>
-                      <m:dPr>
-                        <m:ctrlPr>
-                          <a:rPr lang="en-US" sz="1100" i="1" dirty="0" smtClean="0">
-                            <a:latin typeface="Cambria Math" panose="02040503050406030204" pitchFamily="18" charset="0"/>
-                          </a:rPr>
-                        </m:ctrlPr>
-                      </m:dPr>
-                      <m:e>
-                        <m:r>
-                          <a:rPr lang="en-US" sz="1100" i="1" dirty="0" smtClean="0">
-                            <a:latin typeface="Cambria Math" panose="02040503050406030204" pitchFamily="18" charset="0"/>
-                          </a:rPr>
-                          <m:t>𝐴</m:t>
-                        </m:r>
-                        <m:r>
-                          <a:rPr lang="en-US" sz="1100" i="1" dirty="0" smtClean="0">
-                            <a:latin typeface="Cambria Math" panose="02040503050406030204" pitchFamily="18" charset="0"/>
-                          </a:rPr>
-                          <m:t>−</m:t>
-                        </m:r>
-                        <m:r>
-                          <a:rPr lang="en-US" sz="1100" i="1" dirty="0" smtClean="0">
-                            <a:latin typeface="Cambria Math" panose="02040503050406030204" pitchFamily="18" charset="0"/>
-                          </a:rPr>
-                          <m:t>𝜃</m:t>
-                        </m:r>
-                      </m:e>
-                    </m:d>
-                  </m:oMath>
-                </a14:m>
+                <a:endParaRPr lang="en-US" sz="1100" b="1" i="1" dirty="0">
+                  <a:latin typeface="Cambria Math" panose="02040503050406030204" pitchFamily="18" charset="0"/>
+                </a:endParaRPr>
+              </a:p>
+              <a:p>
+                <a:pPr>
+                  <a:spcAft>
+                    <a:spcPts val="0"/>
+                  </a:spcAft>
+                </a:pPr>
+                <a14:m>
+                  <m:oMathPara xmlns:m="http://schemas.openxmlformats.org/officeDocument/2006/math">
+                    <m:oMathParaPr>
+                      <m:jc m:val="centerGroup"/>
+                    </m:oMathParaPr>
+                    <m:oMath xmlns:m="http://schemas.openxmlformats.org/officeDocument/2006/math">
+                      <m:r>
+                        <a:rPr lang="en-US" sz="1100" b="1" i="1" dirty="0" smtClean="0">
+                          <a:latin typeface="Cambria Math" panose="02040503050406030204" pitchFamily="18" charset="0"/>
+                        </a:rPr>
+                        <m:t>𝝈</m:t>
+                      </m:r>
+                      <m:d>
+                        <m:dPr>
+                          <m:ctrlPr>
+                            <a:rPr lang="en-US" sz="1100" b="1" i="1" dirty="0" smtClean="0">
+                              <a:latin typeface="Cambria Math" panose="02040503050406030204" pitchFamily="18" charset="0"/>
+                            </a:rPr>
+                          </m:ctrlPr>
+                        </m:dPr>
+                        <m:e>
+                          <m:r>
+                            <a:rPr lang="en-US" sz="1100" b="1" i="1" dirty="0" smtClean="0">
+                              <a:latin typeface="Cambria Math" panose="02040503050406030204" pitchFamily="18" charset="0"/>
+                            </a:rPr>
+                            <m:t>𝒙</m:t>
+                          </m:r>
+                        </m:e>
+                      </m:d>
+                      <m:r>
+                        <a:rPr lang="en-US" sz="1100" b="1" i="1" dirty="0" smtClean="0">
+                          <a:latin typeface="Cambria Math" panose="02040503050406030204" pitchFamily="18" charset="0"/>
+                        </a:rPr>
+                        <m:t>=</m:t>
+                      </m:r>
+                      <m:f>
+                        <m:fPr>
+                          <m:ctrlPr>
+                            <a:rPr lang="en-US" sz="1100" b="1" i="1" dirty="0" smtClean="0">
+                              <a:latin typeface="Cambria Math" panose="02040503050406030204" pitchFamily="18" charset="0"/>
+                            </a:rPr>
+                          </m:ctrlPr>
+                        </m:fPr>
+                        <m:num>
+                          <m:r>
+                            <a:rPr lang="en-US" sz="1100" b="1" i="1" dirty="0" smtClean="0">
+                              <a:latin typeface="Cambria Math" panose="02040503050406030204" pitchFamily="18" charset="0"/>
+                            </a:rPr>
+                            <m:t>𝟏</m:t>
+                          </m:r>
+                        </m:num>
+                        <m:den>
+                          <m:r>
+                            <a:rPr lang="en-US" sz="1100" b="1" i="1" dirty="0" smtClean="0">
+                              <a:latin typeface="Cambria Math" panose="02040503050406030204" pitchFamily="18" charset="0"/>
+                            </a:rPr>
+                            <m:t>𝟏</m:t>
+                          </m:r>
+                          <m:r>
+                            <a:rPr lang="en-US" sz="1100" b="1" i="1" dirty="0" smtClean="0">
+                              <a:latin typeface="Cambria Math" panose="02040503050406030204" pitchFamily="18" charset="0"/>
+                            </a:rPr>
+                            <m:t>+</m:t>
+                          </m:r>
+                          <m:r>
+                            <a:rPr lang="en-US" sz="1100" b="1" i="1" dirty="0" smtClean="0">
+                              <a:latin typeface="Cambria Math" panose="02040503050406030204" pitchFamily="18" charset="0"/>
+                            </a:rPr>
+                            <m:t>𝒆</m:t>
+                          </m:r>
+                          <m:r>
+                            <a:rPr lang="en-US" sz="900" b="1" i="1" baseline="30000" dirty="0" smtClean="0">
+                              <a:latin typeface="Cambria Math" panose="02040503050406030204" pitchFamily="18" charset="0"/>
+                            </a:rPr>
+                            <m:t>−</m:t>
+                          </m:r>
+                          <m:r>
+                            <a:rPr lang="en-US" sz="900" b="1" i="1" baseline="30000" dirty="0" smtClean="0">
+                              <a:latin typeface="Cambria Math" panose="02040503050406030204" pitchFamily="18" charset="0"/>
+                            </a:rPr>
+                            <m:t>𝒙</m:t>
+                          </m:r>
+                        </m:den>
+                      </m:f>
+                      <m:r>
+                        <a:rPr lang="en-US" sz="1100" b="1" i="1" dirty="0" smtClean="0">
+                          <a:latin typeface="Cambria Math" panose="02040503050406030204" pitchFamily="18" charset="0"/>
+                        </a:rPr>
+                        <m:t>, </m:t>
+                      </m:r>
+                      <m:r>
+                        <a:rPr lang="en-US" sz="1100" b="1" i="1" dirty="0" smtClean="0">
+                          <a:latin typeface="Cambria Math" panose="02040503050406030204" pitchFamily="18" charset="0"/>
+                        </a:rPr>
+                        <m:t>𝒙</m:t>
+                      </m:r>
+                      <m:r>
+                        <a:rPr lang="en-US" sz="1100" b="1" i="1" dirty="0" smtClean="0">
+                          <a:latin typeface="Cambria Math" panose="02040503050406030204" pitchFamily="18" charset="0"/>
+                        </a:rPr>
+                        <m:t> = </m:t>
+                      </m:r>
+                      <m:r>
+                        <a:rPr lang="en-US" sz="1100" b="1" i="1" dirty="0" smtClean="0">
+                          <a:latin typeface="Cambria Math" panose="02040503050406030204" pitchFamily="18" charset="0"/>
+                        </a:rPr>
+                        <m:t>𝜸</m:t>
+                      </m:r>
+                      <m:d>
+                        <m:dPr>
+                          <m:ctrlPr>
+                            <a:rPr lang="en-US" sz="1100" b="1" i="1" dirty="0" smtClean="0">
+                              <a:latin typeface="Cambria Math" panose="02040503050406030204" pitchFamily="18" charset="0"/>
+                            </a:rPr>
+                          </m:ctrlPr>
+                        </m:dPr>
+                        <m:e>
+                          <m:r>
+                            <a:rPr lang="en-US" sz="1100" b="1" i="1" dirty="0" smtClean="0">
+                              <a:latin typeface="Cambria Math" panose="02040503050406030204" pitchFamily="18" charset="0"/>
+                            </a:rPr>
+                            <m:t>𝑨</m:t>
+                          </m:r>
+                          <m:r>
+                            <a:rPr lang="en-US" sz="1100" b="1" i="1" dirty="0" smtClean="0">
+                              <a:latin typeface="Cambria Math" panose="02040503050406030204" pitchFamily="18" charset="0"/>
+                            </a:rPr>
+                            <m:t>−</m:t>
+                          </m:r>
+                          <m:r>
+                            <a:rPr lang="en-US" sz="1100" b="1" i="1" dirty="0" smtClean="0">
+                              <a:latin typeface="Cambria Math" panose="02040503050406030204" pitchFamily="18" charset="0"/>
+                            </a:rPr>
+                            <m:t>𝜽</m:t>
+                          </m:r>
+                        </m:e>
+                      </m:d>
+                    </m:oMath>
+                  </m:oMathPara>
+                </a14:m>
+                <a:endParaRPr lang="en-US" dirty="0"/>
+              </a:p>
+              <a:p>
+                <a:pPr marL="171450" indent="-171450">
+                  <a:lnSpc>
+                    <a:spcPct val="150000"/>
+                  </a:lnSpc>
+                  <a:spcAft>
+                    <a:spcPts val="0"/>
+                  </a:spcAft>
+                  <a:buFont typeface="Arial" panose="020B0604020202020204" pitchFamily="34" charset="0"/>
+                  <a:buChar char="•"/>
+                </a:pPr>
+                <a:endParaRPr lang="en-US" sz="1000" dirty="0"/>
               </a:p>
               <a:p>
                 <a:pPr marL="171450" indent="-171450">
@@ -9817,15 +14314,15 @@
             <p:spPr>
               <a:xfrm>
                 <a:off x="411480" y="768096"/>
-                <a:ext cx="4160520" cy="1482137"/>
+                <a:ext cx="4160520" cy="1881605"/>
               </a:xfrm>
               <a:prstGeom prst="rect">
                 <a:avLst/>
               </a:prstGeom>
               <a:blipFill>
-                <a:blip r:embed="rId2"/>
+                <a:blip r:embed="rId3"/>
                 <a:stretch>
-                  <a:fillRect b="-1695"/>
+                  <a:fillRect b="-1342"/>
                 </a:stretch>
               </a:blipFill>
             </p:spPr>
@@ -9853,7 +14350,7 @@
           <p:nvPr/>
         </p:nvPicPr>
         <p:blipFill>
-          <a:blip r:embed="rId3"/>
+          <a:blip r:embed="rId4"/>
           <a:stretch>
             <a:fillRect/>
           </a:stretch>
@@ -10344,7 +14841,7 @@
                 <a:avLst/>
               </a:prstGeom>
               <a:blipFill>
-                <a:blip r:embed="rId4"/>
+                <a:blip r:embed="rId5"/>
                 <a:stretch>
                   <a:fillRect/>
                 </a:stretch>
@@ -10506,7 +15003,7 @@
                 <a:avLst/>
               </a:prstGeom>
               <a:blipFill>
-                <a:blip r:embed="rId5"/>
+                <a:blip r:embed="rId6"/>
                 <a:stretch>
                   <a:fillRect b="-14286"/>
                 </a:stretch>
